--- a/presentation/token_cost_bonus.pptx
+++ b/presentation/token_cost_bonus.pptx
@@ -511,22 +511,27 @@
           <a:lstStyle/>
           <a:p>
             <a:r>
-              <a:t>BONUS / 정정판</a:t>
-            </a:r>
-          </a:p>
-          <a:p>
-            <a:r>
-              <a:t>캐시 · 루프 · 스펙 · 서브에이전트 · 정책 재생</a:t>
-            </a:r>
-          </a:p>
-          <a:p>
-            <a:r>
-              <a:t>모든 숫자에는 실측/가정의 구분이 붙는다.</a:t>
+              <a:t>본편에서 다 못 다룬 레버를 심화한다. 각 레버는 '켜는 조건'과 '깨지는 조건'이 한 쌍이다.</a:t>
+            </a:r>
+          </a:p>
+          <a:p>
+            <a:r>
+              <a:t>심화 세션이므로 숫자의 가정(모델 단가·토큰 수)을 슬라이드마다 확인한다.</a:t>
+            </a:r>
+          </a:p>
+          <a:p>
+            <a:r>
+              <a:t>마지막에 우선순위와 보안 주의로 정리한다.</a:t>
             </a:r>
           </a:p>
           <a:p>
             <a:r>
               <a:t>근거: docs/CORRECTIONS.md</a:t>
+            </a:r>
+          </a:p>
+          <a:p>
+            <a:r>
+              <a:t>증거 범위: 심화 세션</a:t>
             </a:r>
           </a:p>
         </p:txBody>
@@ -596,32 +601,27 @@
           <a:lstStyle/>
           <a:p>
             <a:r>
-              <a:t>재현 자료</a:t>
-            </a:r>
-          </a:p>
-          <a:p>
-            <a:r>
-              <a:t>results/audit_metrics.json: 저장 로그 통계 + 로컬 측정 + 시나리오를 분리한 지표.</a:t>
-            </a:r>
-          </a:p>
-          <a:p>
-            <a:r>
-              <a:t>docs/CORRECTIONS.md: 무엇을 유지하고 무엇을 바꿨는지 상세 설명.</a:t>
-            </a:r>
-          </a:p>
-          <a:p>
-            <a:r>
-              <a:t>SOURCES.md: 공식 단가, 논문 표, 외부 케이스의 비교 조건.</a:t>
-            </a:r>
-          </a:p>
-          <a:p>
-            <a:r>
-              <a:t>원본 110행은 보존. 없는 원자료를 재측정 없이 만들어 넣지 않는다.</a:t>
-            </a:r>
-          </a:p>
-          <a:p>
-            <a:r>
-              <a:t>근거: python tools/reproduce_audit.py · python tools/verify_deck.py</a:t>
+              <a:t>오늘 배운 것을 다 적용하지 말고 되돌리기 쉬운 것 하나만 켜고 재측정한다.</a:t>
+            </a:r>
+          </a:p>
+          <a:p>
+            <a:r>
+              <a:t>절감률은 자기 데이터에서 나온 값이어야 한다. 이 자료의 숫자는 출발점이다.</a:t>
+            </a:r>
+          </a:p>
+          <a:p>
+            <a:r>
+              <a:t>발표 자료의 근거·한계·정정 이력은 저장소 문서에 그대로 남아 있다.</a:t>
+            </a:r>
+          </a:p>
+          <a:p>
+            <a:r>
+              <a:t>근거: github.com/giyeop-cody/token-cost-lab</a:t>
+            </a:r>
+          </a:p>
+          <a:p>
+            <a:r>
+              <a:t>증거 범위: 마무리</a:t>
             </a:r>
           </a:p>
         </p:txBody>
@@ -691,32 +691,27 @@
           <a:lstStyle/>
           <a:p>
             <a:r>
-              <a:t>공식 가격 확인: 2026-09-20</a:t>
-            </a:r>
-          </a:p>
-          <a:p>
-            <a:r>
-              <a:t>Gemini 3.1 Flash-Lite · Standard text · USD / 1M tokens</a:t>
-            </a:r>
-          </a:p>
-          <a:p>
-            <a:r>
-              <a:t>출력에는 thoughtsTokenCount + candidatesTokenCount를 포함한다.</a:t>
-            </a:r>
-          </a:p>
-          <a:p>
-            <a:r>
-              <a:t>기존 $1.25/$10은 발표 환산 가정으로 보존한다. Flash-Lite 공식 과거 가격이라는 뜻은 아니다.</a:t>
-            </a:r>
-          </a:p>
-          <a:p>
-            <a:r>
-              <a:t>usage × 리스트 단가는 청구서가 아니다. 무료 티어·계약·세금·도구료는 별도.</a:t>
-            </a:r>
-          </a:p>
-          <a:p>
-            <a:r>
-              <a:t>근거: ai.google.dev/gemini-api/docs/pricing · lab/pricing.py</a:t>
+              <a:t>캐시는 프리픽스를 단위로 매칭한다. 앞부분이 한 글자만 달라도 전액을 다시 낸다.</a:t>
+            </a:r>
+          </a:p>
+          <a:p>
+            <a:r>
+              <a:t>히트율 0%에서는 쓰기 프리미엄만 계속 물어 캐시 없음($8.55)보다 비싸진다($10.05).</a:t>
+            </a:r>
+          </a:p>
+          <a:p>
+            <a:r>
+              <a:t>반대로 히트율이 40%만 넘어도 이미 이득이다. 그래서 '켜고, 적중률을 본다'가 순서다.</a:t>
+            </a:r>
+          </a:p>
+          <a:p>
+            <a:r>
+              <a:t>근거: experiments/exp03_prompt_caching.py</a:t>
+            </a:r>
+          </a:p>
+          <a:p>
+            <a:r>
+              <a:t>증거 범위: 비용 시나리오</a:t>
             </a:r>
           </a:p>
         </p:txBody>
@@ -786,27 +781,32 @@
           <a:lstStyle/>
           <a:p>
             <a:r>
-              <a:t>같은 가정의 2×2 비용 비교</a:t>
-            </a:r>
-          </a:p>
-          <a:p>
-            <a:r>
-              <a:t>Sonnet 단가, 프리픽스 12,000, 100회: 첫 쓰기 + 이후 99회 캐시 읽기.</a:t>
-            </a:r>
-          </a:p>
-          <a:p>
-            <a:r>
-              <a:t>원문 캐시 $0.4014 / 절반 압축 + 캐시 $0.2007.</a:t>
-            </a:r>
-          </a:p>
-          <a:p>
-            <a:r>
-              <a:t>압축 비용·품질·최소 길이·TTL 조건을 만족해야 한다. 요약 생성 비용은 이 표 밖이다.</a:t>
-            </a:r>
-          </a:p>
-          <a:p>
-            <a:r>
-              <a:t>근거: experiments/exp09_dry.py §B</a:t>
+              <a:t>같은 12,000토큰을 매번 보내던 세션을 절반으로 줄이고 캐시까지 걸었을 때의 산술이다.</a:t>
+            </a:r>
+          </a:p>
+          <a:p>
+            <a:r>
+              <a:t>압축률과 정확도는 작업별로 다르다. 지시·수용 기준을 지우면 요구사항이 바뀐다.</a:t>
+            </a:r>
+          </a:p>
+          <a:p>
+            <a:r>
+              <a:t>압축기 실행 비용과 지연도 손익에 포함해야 한다. 짧은 프롬프트는 압축이 손해일 수 있다.</a:t>
+            </a:r>
+          </a:p>
+          <a:p>
+            <a:r>
+              <a:t>압축 자체의 지연·품질 손실은 이 계산 밖이다.</a:t>
+            </a:r>
+          </a:p>
+          <a:p>
+            <a:r>
+              <a:t>근거: experiments/exp09_dry.py</a:t>
+            </a:r>
+          </a:p>
+          <a:p>
+            <a:r>
+              <a:t>증거 범위: 비용 시나리오</a:t>
             </a:r>
           </a:p>
         </p:txBody>
@@ -876,27 +876,27 @@
           <a:lstStyle/>
           <a:p>
             <a:r>
-              <a:t>공식 조건 + 경계값 회귀 테스트</a:t>
-            </a:r>
-          </a:p>
-          <a:p>
-            <a:r>
-              <a:t>Sonnet 4.6: 1,024 / Opus 4.6: 4,096 (공식 문서 확인일 2026-09-20)</a:t>
-            </a:r>
-          </a:p>
-          <a:p>
-            <a:r>
-              <a:t>짧은 프리픽스를 1K 공통 규칙으로 할인하지 않는다. 미확인 기준은 ‘미확인’으로 둔다.</a:t>
-            </a:r>
-          </a:p>
-          <a:p>
-            <a:r>
-              <a:t>적격성 충족은 히트 보장이 아니다. 실제 cache usage·TTL·쓰기/저장료를 본다.</a:t>
-            </a:r>
-          </a:p>
-          <a:p>
-            <a:r>
-              <a:t>근거: platform.claude.com/docs/en/build-with-claude/prompt-caching</a:t>
+              <a:t>20턴 세션에 캐싱만 걸면 $1.91(+17%) — 이력 누적은 그대로 남기 때문이다.</a:t>
+            </a:r>
+          </a:p>
+          <a:p>
+            <a:r>
+              <a:t>요약은 품질에 영향을 준다. 압축 과정에서 잃는 정보가 재작업을 만들면 절감이 상쇄된다.</a:t>
+            </a:r>
+          </a:p>
+          <a:p>
+            <a:r>
+              <a:t>주기를 바꿔 가며 재작업률과 총비용을 함께 측정할 것을 권한다.</a:t>
+            </a:r>
+          </a:p>
+          <a:p>
+            <a:r>
+              <a:t>근거: experiments/exp04_agent_loop_sdd.py</a:t>
+            </a:r>
+          </a:p>
+          <a:p>
+            <a:r>
+              <a:t>증거 범위: 비용 시나리오</a:t>
             </a:r>
           </a:p>
         </p:txBody>
@@ -966,27 +966,27 @@
           <a:lstStyle/>
           <a:p>
             <a:r>
-              <a:t>첫 쓰기 비용 포함 시나리오</a:t>
-            </a:r>
-          </a:p>
-          <a:p>
-            <a:r>
-              <a:t>고정 20,000 + 가변 1,000, 출력 1,500, 100회, Sonnet: $8.550 → $3.219</a:t>
-            </a:r>
-          </a:p>
-          <a:p>
-            <a:r>
-              <a:t>히트 0, 매번 쓰기 가정은 $10.050. 캐시 없음보다 비쌀 수 있다.</a:t>
-            </a:r>
-          </a:p>
-          <a:p>
-            <a:r>
-              <a:t>‘캐싱 90%’는 캐시 읽기 단가 할인이다. 전체 세션 절감률과 다르다.</a:t>
-            </a:r>
-          </a:p>
-          <a:p>
-            <a:r>
-              <a:t>근거: experiments/exp03_prompt_caching.py</a:t>
+              <a:t>같은 툴 작업량을 가정하고 메인·자식·요약 비용을 모두 합산한 값이다.</a:t>
+            </a:r>
+          </a:p>
+          <a:p>
+            <a:r>
+              <a:t>서브에이전트는 요약 품질과 실패·재시도 특성이 다르다. 비용만으로 우열을 단정하지 않는다.</a:t>
+            </a:r>
+          </a:p>
+          <a:p>
+            <a:r>
+              <a:t>과거의 -87%는 자식·요약을 빼고 계산한 값이어서 전체 절감으로 쓰지 않는다.</a:t>
+            </a:r>
+          </a:p>
+          <a:p>
+            <a:r>
+              <a:t>근거: experiments/exp11_tool_output_bloat.py</a:t>
+            </a:r>
+          </a:p>
+          <a:p>
+            <a:r>
+              <a:t>증거 범위: 전체 시스템 비용 시나리오</a:t>
             </a:r>
           </a:p>
         </p:txBody>
@@ -1056,32 +1056,27 @@
           <a:lstStyle/>
           <a:p>
             <a:r>
-              <a:t>SDD 비용 시나리오</a:t>
-            </a:r>
-          </a:p>
-          <a:p>
-            <a:r>
-              <a:t>40턴 → 12턴은 모델의 입력 가정. 스펙이 실제 이만큼 줄였다는 관측은 없다.</a:t>
-            </a:r>
-          </a:p>
-          <a:p>
-            <a:r>
-              <a:t>스펙 작성: 입력 3,000 + 출력 4,000 비용을 이미 포함한다.</a:t>
-            </a:r>
-          </a:p>
-          <a:p>
-            <a:r>
-              <a:t>기존 약 71%는 캐시 예열 비용 제외. 기본은 사이클별 첫 쓰기까지 포함한다.</a:t>
-            </a:r>
-          </a:p>
-          <a:p>
-            <a:r>
-              <a:t>주장 유지: 짧고 결정적인 스펙을 우선 시도하되 재작업·품질·총비용으로 검증한다.</a:t>
-            </a:r>
-          </a:p>
-          <a:p>
-            <a:r>
-              <a:t>근거: experiments/exp04_agent_loop_sdd.py (--warm-cache = legacy)</a:t>
+              <a:t>벤치마크에서 잡은 임계값을 그대로 프로덕션에 쓰면 절감이 과대 추정된다.</a:t>
+            </a:r>
+          </a:p>
+          <a:p>
+            <a:r>
+              <a:t>저볼륨에서는 라우팅 오버헤드가 절감을 상쇄한다. 반복률과 볼륨을 먼저 본다.</a:t>
+            </a:r>
+          </a:p>
+          <a:p>
+            <a:r>
+              <a:t>라우터 오류율·검출률은 이 저장소에서 측정하지 않았다. 참조 구현의 회귀 테스트만 있다.</a:t>
+            </a:r>
+          </a:p>
+          <a:p>
+            <a:r>
+              <a:t>근거: experiments/exp06_other_levers.py</a:t>
+            </a:r>
+          </a:p>
+          <a:p>
+            <a:r>
+              <a:t>증거 범위: 시나리오 (10,000콜)</a:t>
             </a:r>
           </a:p>
         </p:txBody>
@@ -1151,27 +1146,27 @@
           <a:lstStyle/>
           <a:p>
             <a:r>
-              <a:t>순차 잔여비용 시나리오</a:t>
-            </a:r>
-          </a:p>
-          <a:p>
-            <a:r>
-              <a:t>잔여비용에 30%, 40%, 50%, 25%, 10%를 순차 적용한 산술 결과.</a:t>
-            </a:r>
-          </a:p>
-          <a:p>
-            <a:r>
-              <a:t>85.825%는 60–80% 범위 밖이다. ‘일치한다’는 표현은 삭제한다.</a:t>
-            </a:r>
-          </a:p>
-          <a:p>
-            <a:r>
-              <a:t>레버의 중복·상호작용·추가 비용을 검증하지 않았다. 경험적 상한도 아니다.</a:t>
-            </a:r>
-          </a:p>
-          <a:p>
-            <a:r>
-              <a:t>근거: experiments/exp06_other_levers.py §E</a:t>
+              <a:t>토큰 수는 그대로이고 지원 서비스에서 가격을 줄이는 레버다.</a:t>
+            </a:r>
+          </a:p>
+          <a:p>
+            <a:r>
+              <a:t>실시간 UI, 대화형 코딩 에이전트처럼 대기 화면이 있는 작업에는 쓸 수 없다.</a:t>
+            </a:r>
+          </a:p>
+          <a:p>
+            <a:r>
+              <a:t>지연·실패 처리·지원 조건(요청 수 상한, 결과 보관 기간)을 확인해야 한다.</a:t>
+            </a:r>
+          </a:p>
+          <a:p>
+            <a:r>
+              <a:t>근거: experiments/exp06_other_levers.py</a:t>
+            </a:r>
+          </a:p>
+          <a:p>
+            <a:r>
+              <a:t>증거 범위: 가격표 + 시나리오</a:t>
             </a:r>
           </a:p>
         </p:txBody>
@@ -1241,32 +1236,27 @@
           <a:lstStyle/>
           <a:p>
             <a:r>
-              <a:t>전체 시스템 비용 시나리오</a:t>
-            </a:r>
-          </a:p>
-          <a:p>
-            <a:r>
-              <a:t>동일 툴 작업 가정: naive $5.6010, compact $3.4425, subagent $2.7360</a:t>
-            </a:r>
-          </a:p>
-          <a:p>
-            <a:r>
-              <a:t>20턴, 매 턴 툴 8,000, 초기 5,000, 출력 300, 요약 1,500, 같은 Sonnet 단가.</a:t>
-            </a:r>
-          </a:p>
-          <a:p>
-            <a:r>
-              <a:t>기존 -87%는 자식·요약 비용이 빠진 메인 컨텍스트 계산이었다.</a:t>
-            </a:r>
-          </a:p>
-          <a:p>
-            <a:r>
-              <a:t>동일 작업량 가정이어도 요약 품질·실패·재시도까지 같다고 검증한 것은 아니다.</a:t>
-            </a:r>
-          </a:p>
-          <a:p>
-            <a:r>
-              <a:t>근거: experiments/exp11_tool_output_bloat.py §A</a:t>
+              <a:t>각 레버의 절감률을 순서대로 곱한 값이다. 실제 도입에서는 서로 겹치는 부분이 생긴다.</a:t>
+            </a:r>
+          </a:p>
+          <a:p>
+            <a:r>
+              <a:t>검증된 상한도 아니다. 자기 데이터로 A/B를 돌려 확정해야 한다.</a:t>
+            </a:r>
+          </a:p>
+          <a:p>
+            <a:r>
+              <a:t>발표에서는 '이론적 상한'이라는 표현보다 '순차 가정의 산술'이라고 말한다.</a:t>
+            </a:r>
+          </a:p>
+          <a:p>
+            <a:r>
+              <a:t>근거: experiments/exp06_other_levers.py</a:t>
+            </a:r>
+          </a:p>
+          <a:p>
+            <a:r>
+              <a:t>증거 범위: 순차 시나리오</a:t>
             </a:r>
           </a:p>
         </p:txBody>
@@ -1336,32 +1326,27 @@
           <a:lstStyle/>
           <a:p>
             <a:r>
-              <a:t>정책 시뮬레이션 / 소프트웨어 테스트</a:t>
-            </a:r>
-          </a:p>
-          <a:p>
-            <a:r>
-              <a:t>기존 3.06배는 고정 발화를 다른 정책으로 처리한다는 비용 재생이었다.</a:t>
-            </a:r>
-          </a:p>
-          <a:p>
-            <a:r>
-              <a:t>지금은 respec의 무료 중단과 실행 비용을 분리하고, 총 입력 증가분을 한 번만 더한다.</a:t>
-            </a:r>
-          </a:p>
-          <a:p>
-            <a:r>
-              <a:t>A·오케스트레이터는 범위·리셋·출력 상한·진단 후 적용 비용을 공통 함수로 계산.</a:t>
-            </a:r>
-          </a:p>
-          <a:p>
-            <a:r>
-              <a:t>새 task_id의 의도 이력을 분리해 앞 작업의 재작업 상태가 새 작업으로 새지 않게 한다.</a:t>
-            </a:r>
-          </a:p>
-          <a:p>
-            <a:r>
-              <a:t>근거: analysis/lean_vs_full.py · agent_setup/orchestrator.py</a:t>
+              <a:t>캐시는 비용 레버이면서 데이터 보존 문제다. 개인정보가 섞인 접두부는 캐싱 대상에서 뺀다.</a:t>
+            </a:r>
+          </a:p>
+          <a:p>
+            <a:r>
+              <a:t>시맨틱 캐시는 질의가 비슷할 때 호출 자체를 제거한다. 히트율보다 오답 위험이 먼저다.</a:t>
+            </a:r>
+          </a:p>
+          <a:p>
+            <a:r>
+              <a:t>TTL과 삭제 시점을 벤더 문서 기준으로 확인하고 기록해 둔다.</a:t>
+            </a:r>
+          </a:p>
+          <a:p>
+            <a:r>
+              <a:t>근거: experiments/exp06_other_levers.py</a:t>
+            </a:r>
+          </a:p>
+          <a:p>
+            <a:r>
+              <a:t>증거 범위: 운영 주의</a:t>
             </a:r>
           </a:p>
         </p:txBody>
@@ -4485,7 +4470,7 @@
                 <a:ea typeface="NanumGothic"/>
                 <a:cs typeface="NanumGothic"/>
               </a:rPr>
-              <a:t>BONUS / 정정판</a:t>
+              <a:t>심화 세션</a:t>
             </a:r>
           </a:p>
         </p:txBody>
@@ -4557,7 +4542,7 @@
                 <a:ea typeface="NanumGothic"/>
                 <a:cs typeface="NanumGothic"/>
               </a:rPr>
-              <a:t>조건을 명시하는 비용 절감</a:t>
+              <a:t>원칙 5개로 다 못 줄인 비용은 어디 있나</a:t>
             </a:r>
           </a:p>
         </p:txBody>
@@ -4593,7 +4578,7 @@
                 <a:ea typeface="NanumGothic"/>
                 <a:cs typeface="NanumGothic"/>
               </a:rPr>
-              <a:t>캐시 · 루프 · 스펙 · 서브에이전트 · 정책 재생</a:t>
+              <a:t>캐싱 · 압축 · 컴팩션 · 서브에이전트 · 라우팅 · 배치</a:t>
             </a:r>
           </a:p>
         </p:txBody>
@@ -4629,14 +4614,50 @@
                 <a:ea typeface="NanumGothic"/>
                 <a:cs typeface="NanumGothic"/>
               </a:rPr>
-              <a:t>모든 숫자에는 실측/가정의 구분이 붙는다.</a:t>
-            </a:r>
-          </a:p>
-        </p:txBody>
-      </p:sp>
-      <p:sp>
-        <p:nvSpPr>
-          <p:cNvPr id="9" name="audit:source"/>
+              <a:t>각 레버의 조건과 함정을 한 장씩 본다</a:t>
+            </a:r>
+          </a:p>
+        </p:txBody>
+      </p:sp>
+      <p:sp>
+        <p:nvSpPr>
+          <p:cNvPr id="9" name="audit:body-2"/>
+          <p:cNvSpPr txBox="1"/>
+          <p:nvPr/>
+        </p:nvSpPr>
+        <p:spPr>
+          <a:xfrm>
+            <a:off x="777240" y="4142231"/>
+            <a:ext cx="10652760" cy="612648"/>
+          </a:xfrm>
+          <a:prstGeom prst="rect">
+            <a:avLst/>
+          </a:prstGeom>
+          <a:noFill/>
+        </p:spPr>
+        <p:txBody>
+          <a:bodyPr wrap="square" lIns="0" rIns="0" tIns="0" bIns="0">
+            <a:spAutoFit/>
+          </a:bodyPr>
+          <a:lstStyle/>
+          <a:p>
+            <a:r>
+              <a:rPr sz="1750" b="0">
+                <a:solidFill>
+                  <a:srgbClr val="ECF1F6"/>
+                </a:solidFill>
+                <a:latin typeface="NanumGothic"/>
+                <a:ea typeface="NanumGothic"/>
+                <a:cs typeface="NanumGothic"/>
+              </a:rPr>
+              <a:t>레버는 곱해진다 — 우선순위는 뒤에서</a:t>
+            </a:r>
+          </a:p>
+        </p:txBody>
+      </p:sp>
+      <p:sp>
+        <p:nvSpPr>
+          <p:cNvPr id="10" name="audit:source"/>
           <p:cNvSpPr txBox="1"/>
           <p:nvPr/>
         </p:nvSpPr>
@@ -4672,7 +4693,7 @@
       </p:sp>
       <p:sp>
         <p:nvSpPr>
-          <p:cNvPr id="10" name="audit:footer"/>
+          <p:cNvPr id="11" name="audit:footer"/>
           <p:cNvSpPr txBox="1"/>
           <p:nvPr/>
         </p:nvSpPr>
@@ -4842,7 +4863,7 @@
                 <a:ea typeface="NanumGothic"/>
                 <a:cs typeface="NanumGothic"/>
               </a:rPr>
-              <a:t>재현 자료</a:t>
+              <a:t>마무리</a:t>
             </a:r>
           </a:p>
         </p:txBody>
@@ -4878,7 +4899,7 @@
                 <a:ea typeface="NanumGothic"/>
                 <a:cs typeface="NanumGothic"/>
               </a:rPr>
-              <a:t>숫자를 직접 확인할 수 있게 남긴다</a:t>
+              <a:t>작게 시작해서 자기 usage로 확인한다</a:t>
             </a:r>
           </a:p>
         </p:txBody>
@@ -4914,7 +4935,7 @@
                 <a:ea typeface="NanumGothic"/>
                 <a:cs typeface="NanumGothic"/>
               </a:rPr>
-              <a:t>원자료 · 산식 · 기준일 · 재현 명령</a:t>
+              <a:t>오늘 한 가지만 켜라 — 캐시</a:t>
             </a:r>
           </a:p>
         </p:txBody>
@@ -4950,7 +4971,7 @@
                 <a:ea typeface="NanumGothic"/>
                 <a:cs typeface="NanumGothic"/>
               </a:rPr>
-              <a:t>results/audit_metrics.json: 저장 로그 통계 + 로컬 측정 + 시나리오를 분리한 지표.</a:t>
+              <a:t>다음 주에 배수와 적중률을 다시 잰다</a:t>
             </a:r>
           </a:p>
         </p:txBody>
@@ -4986,7 +5007,7 @@
                 <a:ea typeface="NanumGothic"/>
                 <a:cs typeface="NanumGothic"/>
               </a:rPr>
-              <a:t>docs/CORRECTIONS.md: 무엇을 유지하고 무엇을 바꿨는지 상세 설명.</a:t>
+              <a:t>품질 게이트를 함께 둔다 — 절감만으로 대신하지 않는다</a:t>
             </a:r>
           </a:p>
         </p:txBody>
@@ -5022,21 +5043,21 @@
                 <a:ea typeface="NanumGothic"/>
                 <a:cs typeface="NanumGothic"/>
               </a:rPr>
-              <a:t>SOURCES.md: 공식 단가, 논문 표, 외부 케이스의 비교 조건.</a:t>
-            </a:r>
-          </a:p>
-        </p:txBody>
-      </p:sp>
-      <p:sp>
-        <p:nvSpPr>
-          <p:cNvPr id="10" name="audit:body-3"/>
+              <a:t>질문과 재현 결과는 저장소 이슈로 남긴다</a:t>
+            </a:r>
+          </a:p>
+        </p:txBody>
+      </p:sp>
+      <p:sp>
+        <p:nvSpPr>
+          <p:cNvPr id="10" name="audit:source"/>
           <p:cNvSpPr txBox="1"/>
           <p:nvPr/>
         </p:nvSpPr>
         <p:spPr>
           <a:xfrm>
-            <a:off x="777240" y="4782312"/>
-            <a:ext cx="10652760" cy="612648"/>
+            <a:off x="640080" y="6080760"/>
+            <a:ext cx="10972800" cy="274320"/>
           </a:xfrm>
           <a:prstGeom prst="rect">
             <a:avLst/>
@@ -5050,58 +5071,22 @@
           <a:lstStyle/>
           <a:p>
             <a:r>
-              <a:rPr sz="1750" b="0">
-                <a:solidFill>
-                  <a:srgbClr val="ECF1F6"/>
+              <a:rPr sz="1000" b="0">
+                <a:solidFill>
+                  <a:srgbClr val="93A4B5"/>
                 </a:solidFill>
                 <a:latin typeface="NanumGothic"/>
                 <a:ea typeface="NanumGothic"/>
                 <a:cs typeface="NanumGothic"/>
               </a:rPr>
-              <a:t>원본 110행은 보존. 없는 원자료를 재측정 없이 만들어 넣지 않는다.</a:t>
-            </a:r>
-          </a:p>
-        </p:txBody>
-      </p:sp>
-      <p:sp>
-        <p:nvSpPr>
-          <p:cNvPr id="11" name="audit:source"/>
-          <p:cNvSpPr txBox="1"/>
-          <p:nvPr/>
-        </p:nvSpPr>
-        <p:spPr>
-          <a:xfrm>
-            <a:off x="640080" y="6080760"/>
-            <a:ext cx="10972800" cy="274320"/>
-          </a:xfrm>
-          <a:prstGeom prst="rect">
-            <a:avLst/>
-          </a:prstGeom>
-          <a:noFill/>
-        </p:spPr>
-        <p:txBody>
-          <a:bodyPr wrap="square" lIns="0" rIns="0" tIns="0" bIns="0">
-            <a:spAutoFit/>
-          </a:bodyPr>
-          <a:lstStyle/>
-          <a:p>
-            <a:r>
-              <a:rPr sz="1000" b="0">
-                <a:solidFill>
-                  <a:srgbClr val="93A4B5"/>
-                </a:solidFill>
-                <a:latin typeface="NanumGothic"/>
-                <a:ea typeface="NanumGothic"/>
-                <a:cs typeface="NanumGothic"/>
-              </a:rPr>
-              <a:t>python tools/reproduce_audit.py · python tools/verify_deck.py</a:t>
-            </a:r>
-          </a:p>
-        </p:txBody>
-      </p:sp>
-      <p:sp>
-        <p:nvSpPr>
-          <p:cNvPr id="12" name="audit:footer"/>
+              <a:t>github.com/giyeop-cody/token-cost-lab</a:t>
+            </a:r>
+          </a:p>
+        </p:txBody>
+      </p:sp>
+      <p:sp>
+        <p:nvSpPr>
+          <p:cNvPr id="11" name="audit:footer"/>
           <p:cNvSpPr txBox="1"/>
           <p:nvPr/>
         </p:nvSpPr>
@@ -5271,7 +5256,7 @@
                 <a:ea typeface="NanumGothic"/>
                 <a:cs typeface="NanumGothic"/>
               </a:rPr>
-              <a:t>공식 가격 확인: 2026-09-20</a:t>
+              <a:t>비용 시나리오</a:t>
             </a:r>
           </a:p>
         </p:txBody>
@@ -5307,7 +5292,7 @@
                 <a:ea typeface="NanumGothic"/>
                 <a:cs typeface="NanumGothic"/>
               </a:rPr>
-              <a:t>요금은 모델 ID와 단가를 함께 본다</a:t>
+              <a:t>캐시를 깨는 한 줄</a:t>
             </a:r>
           </a:p>
         </p:txBody>
@@ -5343,7 +5328,7 @@
                 <a:ea typeface="NanumGothic"/>
                 <a:cs typeface="NanumGothic"/>
               </a:rPr>
-              <a:t>$0.25 / $1.50</a:t>
+              <a:t>$10.05 (17.5% 더 지출)</a:t>
             </a:r>
           </a:p>
         </p:txBody>
@@ -5379,7 +5364,7 @@
                 <a:ea typeface="NanumGothic"/>
                 <a:cs typeface="NanumGothic"/>
               </a:rPr>
-              <a:t>Gemini 3.1 Flash-Lite · Standard text · USD / 1M tokens</a:t>
+              <a:t>맨 앞의 타임스탬프·요청 ID는 매번 미스로 만든다</a:t>
             </a:r>
           </a:p>
         </p:txBody>
@@ -5415,7 +5400,7 @@
                 <a:ea typeface="NanumGothic"/>
                 <a:cs typeface="NanumGothic"/>
               </a:rPr>
-              <a:t>출력에는 thoughtsTokenCount + candidatesTokenCount를 포함한다.</a:t>
+              <a:t>변하는 값은 반드시 뒤로 보낸다</a:t>
             </a:r>
           </a:p>
         </p:txBody>
@@ -5451,21 +5436,21 @@
                 <a:ea typeface="NanumGothic"/>
                 <a:cs typeface="NanumGothic"/>
               </a:rPr>
-              <a:t>기존 $1.25/$10은 발표 환산 가정으로 보존한다. Flash-Lite 공식 과거 가격이라는 뜻은 아니다.</a:t>
-            </a:r>
-          </a:p>
-        </p:txBody>
-      </p:sp>
-      <p:sp>
-        <p:nvSpPr>
-          <p:cNvPr id="10" name="audit:body-3"/>
+              <a:t>미스 상태의 캐싱은 안 쓰느니만 못하다</a:t>
+            </a:r>
+          </a:p>
+        </p:txBody>
+      </p:sp>
+      <p:sp>
+        <p:nvSpPr>
+          <p:cNvPr id="10" name="audit:source"/>
           <p:cNvSpPr txBox="1"/>
           <p:nvPr/>
         </p:nvSpPr>
         <p:spPr>
           <a:xfrm>
-            <a:off x="777240" y="4782312"/>
-            <a:ext cx="10652760" cy="612648"/>
+            <a:off x="640080" y="6080760"/>
+            <a:ext cx="10972800" cy="274320"/>
           </a:xfrm>
           <a:prstGeom prst="rect">
             <a:avLst/>
@@ -5479,58 +5464,22 @@
           <a:lstStyle/>
           <a:p>
             <a:r>
-              <a:rPr sz="1750" b="0">
-                <a:solidFill>
-                  <a:srgbClr val="ECF1F6"/>
+              <a:rPr sz="1000" b="0">
+                <a:solidFill>
+                  <a:srgbClr val="93A4B5"/>
                 </a:solidFill>
                 <a:latin typeface="NanumGothic"/>
                 <a:ea typeface="NanumGothic"/>
                 <a:cs typeface="NanumGothic"/>
               </a:rPr>
-              <a:t>usage × 리스트 단가는 청구서가 아니다. 무료 티어·계약·세금·도구료는 별도.</a:t>
-            </a:r>
-          </a:p>
-        </p:txBody>
-      </p:sp>
-      <p:sp>
-        <p:nvSpPr>
-          <p:cNvPr id="11" name="audit:source"/>
-          <p:cNvSpPr txBox="1"/>
-          <p:nvPr/>
-        </p:nvSpPr>
-        <p:spPr>
-          <a:xfrm>
-            <a:off x="640080" y="6080760"/>
-            <a:ext cx="10972800" cy="274320"/>
-          </a:xfrm>
-          <a:prstGeom prst="rect">
-            <a:avLst/>
-          </a:prstGeom>
-          <a:noFill/>
-        </p:spPr>
-        <p:txBody>
-          <a:bodyPr wrap="square" lIns="0" rIns="0" tIns="0" bIns="0">
-            <a:spAutoFit/>
-          </a:bodyPr>
-          <a:lstStyle/>
-          <a:p>
-            <a:r>
-              <a:rPr sz="1000" b="0">
-                <a:solidFill>
-                  <a:srgbClr val="93A4B5"/>
-                </a:solidFill>
-                <a:latin typeface="NanumGothic"/>
-                <a:ea typeface="NanumGothic"/>
-                <a:cs typeface="NanumGothic"/>
-              </a:rPr>
-              <a:t>ai.google.dev/gemini-api/docs/pricing · lab/pricing.py</a:t>
-            </a:r>
-          </a:p>
-        </p:txBody>
-      </p:sp>
-      <p:sp>
-        <p:nvSpPr>
-          <p:cNvPr id="12" name="audit:footer"/>
+              <a:t>experiments/exp03_prompt_caching.py</a:t>
+            </a:r>
+          </a:p>
+        </p:txBody>
+      </p:sp>
+      <p:sp>
+        <p:nvSpPr>
+          <p:cNvPr id="11" name="audit:footer"/>
           <p:cNvSpPr txBox="1"/>
           <p:nvPr/>
         </p:nvSpPr>
@@ -5700,7 +5649,7 @@
                 <a:ea typeface="NanumGothic"/>
                 <a:cs typeface="NanumGothic"/>
               </a:rPr>
-              <a:t>같은 가정의 2×2 비용 비교</a:t>
+              <a:t>비용 시나리오</a:t>
             </a:r>
           </a:p>
         </p:txBody>
@@ -5736,7 +5685,7 @@
                 <a:ea typeface="NanumGothic"/>
                 <a:cs typeface="NanumGothic"/>
               </a:rPr>
-              <a:t>압축과 캐싱은 대체재만이 아니다</a:t>
+              <a:t>압축과 캐싱은 대체재가 아니다</a:t>
             </a:r>
           </a:p>
         </p:txBody>
@@ -5772,7 +5721,7 @@
                 <a:ea typeface="NanumGothic"/>
                 <a:cs typeface="NanumGothic"/>
               </a:rPr>
-              <a:t>$0.4014 → $0.2007</a:t>
+              <a:t>$0.4014 → $0.2007 (94% 절감)</a:t>
             </a:r>
           </a:p>
         </p:txBody>
@@ -5808,7 +5757,7 @@
                 <a:ea typeface="NanumGothic"/>
                 <a:cs typeface="NanumGothic"/>
               </a:rPr>
-              <a:t>Sonnet 단가, 프리픽스 12,000, 100회: 첫 쓰기 + 이후 99회 캐시 읽기.</a:t>
+              <a:t>그냥 캐싱 $0.4014 vs 절반 요약 $1.8000</a:t>
             </a:r>
           </a:p>
         </p:txBody>
@@ -5844,7 +5793,7 @@
                 <a:ea typeface="NanumGothic"/>
                 <a:cs typeface="NanumGothic"/>
               </a:rPr>
-              <a:t>원문 캐시 $0.4014 / 절반 압축 + 캐시 $0.2007.</a:t>
+              <a:t>지울 수 있는 반복은 지우고, 지울 수 없는 반복은 고정해 캐시에 태운다</a:t>
             </a:r>
           </a:p>
         </p:txBody>
@@ -5880,7 +5829,7 @@
                 <a:ea typeface="NanumGothic"/>
                 <a:cs typeface="NanumGothic"/>
               </a:rPr>
-              <a:t>압축 비용·품질·최소 길이·TTL 조건을 만족해야 한다. 요약 생성 비용은 이 표 밖이다.</a:t>
+              <a:t>압축률이 높을수록 조합의 이득도 커진다</a:t>
             </a:r>
           </a:p>
         </p:txBody>
@@ -5916,7 +5865,7 @@
                 <a:ea typeface="NanumGothic"/>
                 <a:cs typeface="NanumGothic"/>
               </a:rPr>
-              <a:t>experiments/exp09_dry.py §B</a:t>
+              <a:t>experiments/exp09_dry.py</a:t>
             </a:r>
           </a:p>
         </p:txBody>
@@ -6093,7 +6042,7 @@
                 <a:ea typeface="NanumGothic"/>
                 <a:cs typeface="NanumGothic"/>
               </a:rPr>
-              <a:t>공식 조건 + 경계값 회귀 테스트</a:t>
+              <a:t>비용 시나리오</a:t>
             </a:r>
           </a:p>
         </p:txBody>
@@ -6129,7 +6078,7 @@
                 <a:ea typeface="NanumGothic"/>
                 <a:cs typeface="NanumGothic"/>
               </a:rPr>
-              <a:t>캐시 적격성은 모델별로 다르다</a:t>
+              <a:t>긴 세션은 컴팩션으로 접는다</a:t>
             </a:r>
           </a:p>
         </p:txBody>
@@ -6165,7 +6114,7 @@
                 <a:ea typeface="NanumGothic"/>
                 <a:cs typeface="NanumGothic"/>
               </a:rPr>
-              <a:t>Haiku 4.5: 최소 4,096 토큰</a:t>
+              <a:t>$2.32 → $0.93 (60% 절감)</a:t>
             </a:r>
           </a:p>
         </p:txBody>
@@ -6201,7 +6150,7 @@
                 <a:ea typeface="NanumGothic"/>
                 <a:cs typeface="NanumGothic"/>
               </a:rPr>
-              <a:t>Sonnet 4.6: 1,024 / Opus 4.6: 4,096 (공식 문서 확인일 2026-09-20)</a:t>
+              <a:t>10턴마다 접으면 $1.23 (47% 절감)</a:t>
             </a:r>
           </a:p>
         </p:txBody>
@@ -6237,7 +6186,7 @@
                 <a:ea typeface="NanumGothic"/>
                 <a:cs typeface="NanumGothic"/>
               </a:rPr>
-              <a:t>짧은 프리픽스를 1K 공통 규칙으로 할인하지 않는다. 미확인 기준은 ‘미확인’으로 둔다.</a:t>
+              <a:t>너무 자주 접으면 요약 호출이 이득을 먹는다</a:t>
             </a:r>
           </a:p>
         </p:txBody>
@@ -6273,7 +6222,7 @@
                 <a:ea typeface="NanumGothic"/>
                 <a:cs typeface="NanumGothic"/>
               </a:rPr>
-              <a:t>적격성 충족은 히트 보장이 아니다. 실제 cache usage·TTL·쓰기/저장료를 본다.</a:t>
+              <a:t>최적 주기는 세션 길이와 요약 비용으로 정해진다</a:t>
             </a:r>
           </a:p>
         </p:txBody>
@@ -6309,7 +6258,7 @@
                 <a:ea typeface="NanumGothic"/>
                 <a:cs typeface="NanumGothic"/>
               </a:rPr>
-              <a:t>platform.claude.com/docs/en/build-with-claude/prompt-caching</a:t>
+              <a:t>experiments/exp04_agent_loop_sdd.py</a:t>
             </a:r>
           </a:p>
         </p:txBody>
@@ -6486,7 +6435,7 @@
                 <a:ea typeface="NanumGothic"/>
                 <a:cs typeface="NanumGothic"/>
               </a:rPr>
-              <a:t>첫 쓰기 비용 포함 시나리오</a:t>
+              <a:t>전체 시스템 비용 시나리오</a:t>
             </a:r>
           </a:p>
         </p:txBody>
@@ -6522,7 +6471,7 @@
                 <a:ea typeface="NanumGothic"/>
                 <a:cs typeface="NanumGothic"/>
               </a:rPr>
-              <a:t>캐싱의 손익은 조건으로 재현한다</a:t>
+              <a:t>툴 출력과 서브에이전트는 전체 비용으로 본다</a:t>
             </a:r>
           </a:p>
         </p:txBody>
@@ -6558,7 +6507,7 @@
                 <a:ea typeface="NanumGothic"/>
                 <a:cs typeface="NanumGothic"/>
               </a:rPr>
-              <a:t>기본 시나리오 62.35% 절감</a:t>
+              <a:t>$5.6010 → $2.7360</a:t>
             </a:r>
           </a:p>
         </p:txBody>
@@ -6594,7 +6543,7 @@
                 <a:ea typeface="NanumGothic"/>
                 <a:cs typeface="NanumGothic"/>
               </a:rPr>
-              <a:t>고정 20,000 + 가변 1,000, 출력 1,500, 100회, Sonnet: $8.550 → $3.219</a:t>
+              <a:t>툴 읽기 누적 전송 1,680,000 토큰 (20턴)</a:t>
             </a:r>
           </a:p>
         </p:txBody>
@@ -6630,7 +6579,7 @@
                 <a:ea typeface="NanumGothic"/>
                 <a:cs typeface="NanumGothic"/>
               </a:rPr>
-              <a:t>히트 0, 매번 쓰기 가정은 $10.050. 캐시 없음보다 비쌀 수 있다.</a:t>
+              <a:t>컴팩션 $3.4425 · 서브에이전트 $2.736</a:t>
             </a:r>
           </a:p>
         </p:txBody>
@@ -6666,7 +6615,7 @@
                 <a:ea typeface="NanumGothic"/>
                 <a:cs typeface="NanumGothic"/>
               </a:rPr>
-              <a:t>‘캐싱 90%’는 캐시 읽기 단가 할인이다. 전체 세션 절감률과 다르다.</a:t>
+              <a:t>자식 호출·요약 비용까지 포함해 비교한다</a:t>
             </a:r>
           </a:p>
         </p:txBody>
@@ -6702,7 +6651,7 @@
                 <a:ea typeface="NanumGothic"/>
                 <a:cs typeface="NanumGothic"/>
               </a:rPr>
-              <a:t>experiments/exp03_prompt_caching.py</a:t>
+              <a:t>experiments/exp11_tool_output_bloat.py</a:t>
             </a:r>
           </a:p>
         </p:txBody>
@@ -6879,7 +6828,7 @@
                 <a:ea typeface="NanumGothic"/>
                 <a:cs typeface="NanumGothic"/>
               </a:rPr>
-              <a:t>SDD 비용 시나리오</a:t>
+              <a:t>시나리오 (10,000콜)</a:t>
             </a:r>
           </a:p>
         </p:txBody>
@@ -6915,7 +6864,7 @@
                 <a:ea typeface="NanumGothic"/>
                 <a:cs typeface="NanumGothic"/>
               </a:rPr>
-              <a:t>SDD 절감은 ‘턴 감소’ 가정에 달린다</a:t>
+              <a:t>모델 라우팅 · 쉬운 요청에 비싼 모델을 쓰지 않는다</a:t>
             </a:r>
           </a:p>
         </p:txBody>
@@ -6951,7 +6900,7 @@
                 <a:ea typeface="NanumGothic"/>
                 <a:cs typeface="NanumGothic"/>
               </a:rPr>
-              <a:t>기존 71.0% / cold-cache 68.7%</a:t>
+              <a:t>전부 강 $350 → 절반 $184</a:t>
             </a:r>
           </a:p>
         </p:txBody>
@@ -6987,7 +6936,7 @@
                 <a:ea typeface="NanumGothic"/>
                 <a:cs typeface="NanumGothic"/>
               </a:rPr>
-              <a:t>40턴 → 12턴은 모델의 입력 가정. 스펙이 실제 이만큼 줄였다는 관측은 없다.</a:t>
+              <a:t>절반만 라우팅해도 47% 절감</a:t>
             </a:r>
           </a:p>
         </p:txBody>
@@ -7023,7 +6972,7 @@
                 <a:ea typeface="NanumGothic"/>
                 <a:cs typeface="NanumGothic"/>
               </a:rPr>
-              <a:t>스펙 작성: 입력 3,000 + 출력 4,000 비용을 이미 포함한다.</a:t>
+              <a:t>공격적 라우팅은 $35.17 (90% 절감)</a:t>
             </a:r>
           </a:p>
         </p:txBody>
@@ -7059,21 +7008,21 @@
                 <a:ea typeface="NanumGothic"/>
                 <a:cs typeface="NanumGothic"/>
               </a:rPr>
-              <a:t>기존 약 71%는 캐시 예열 비용 제외. 기본은 사이클별 첫 쓰기까지 포함한다.</a:t>
-            </a:r>
-          </a:p>
-        </p:txBody>
-      </p:sp>
-      <p:sp>
-        <p:nvSpPr>
-          <p:cNvPr id="10" name="audit:body-3"/>
+              <a:t>품질 측정 도구가 먼저다 — 임계값은 주기적으로 재보정</a:t>
+            </a:r>
+          </a:p>
+        </p:txBody>
+      </p:sp>
+      <p:sp>
+        <p:nvSpPr>
+          <p:cNvPr id="10" name="audit:source"/>
           <p:cNvSpPr txBox="1"/>
           <p:nvPr/>
         </p:nvSpPr>
         <p:spPr>
           <a:xfrm>
-            <a:off x="777240" y="4782312"/>
-            <a:ext cx="10652760" cy="612648"/>
+            <a:off x="640080" y="6080760"/>
+            <a:ext cx="10972800" cy="274320"/>
           </a:xfrm>
           <a:prstGeom prst="rect">
             <a:avLst/>
@@ -7087,58 +7036,22 @@
           <a:lstStyle/>
           <a:p>
             <a:r>
-              <a:rPr sz="1750" b="0">
-                <a:solidFill>
-                  <a:srgbClr val="ECF1F6"/>
+              <a:rPr sz="1000" b="0">
+                <a:solidFill>
+                  <a:srgbClr val="93A4B5"/>
                 </a:solidFill>
                 <a:latin typeface="NanumGothic"/>
                 <a:ea typeface="NanumGothic"/>
                 <a:cs typeface="NanumGothic"/>
               </a:rPr>
-              <a:t>주장 유지: 짧고 결정적인 스펙을 우선 시도하되 재작업·품질·총비용으로 검증한다.</a:t>
-            </a:r>
-          </a:p>
-        </p:txBody>
-      </p:sp>
-      <p:sp>
-        <p:nvSpPr>
-          <p:cNvPr id="11" name="audit:source"/>
-          <p:cNvSpPr txBox="1"/>
-          <p:nvPr/>
-        </p:nvSpPr>
-        <p:spPr>
-          <a:xfrm>
-            <a:off x="640080" y="6080760"/>
-            <a:ext cx="10972800" cy="274320"/>
-          </a:xfrm>
-          <a:prstGeom prst="rect">
-            <a:avLst/>
-          </a:prstGeom>
-          <a:noFill/>
-        </p:spPr>
-        <p:txBody>
-          <a:bodyPr wrap="square" lIns="0" rIns="0" tIns="0" bIns="0">
-            <a:spAutoFit/>
-          </a:bodyPr>
-          <a:lstStyle/>
-          <a:p>
-            <a:r>
-              <a:rPr sz="1000" b="0">
-                <a:solidFill>
-                  <a:srgbClr val="93A4B5"/>
-                </a:solidFill>
-                <a:latin typeface="NanumGothic"/>
-                <a:ea typeface="NanumGothic"/>
-                <a:cs typeface="NanumGothic"/>
-              </a:rPr>
-              <a:t>experiments/exp04_agent_loop_sdd.py (--warm-cache = legacy)</a:t>
-            </a:r>
-          </a:p>
-        </p:txBody>
-      </p:sp>
-      <p:sp>
-        <p:nvSpPr>
-          <p:cNvPr id="12" name="audit:footer"/>
+              <a:t>experiments/exp06_other_levers.py</a:t>
+            </a:r>
+          </a:p>
+        </p:txBody>
+      </p:sp>
+      <p:sp>
+        <p:nvSpPr>
+          <p:cNvPr id="11" name="audit:footer"/>
           <p:cNvSpPr txBox="1"/>
           <p:nvPr/>
         </p:nvSpPr>
@@ -7308,7 +7221,7 @@
                 <a:ea typeface="NanumGothic"/>
                 <a:cs typeface="NanumGothic"/>
               </a:rPr>
-              <a:t>순차 잔여비용 시나리오</a:t>
+              <a:t>가격표 + 시나리오</a:t>
             </a:r>
           </a:p>
         </p:txBody>
@@ -7344,7 +7257,7 @@
                 <a:ea typeface="NanumGothic"/>
                 <a:cs typeface="NanumGothic"/>
               </a:rPr>
-              <a:t>절감률을 쌓을 때도 가정을 드러낸다</a:t>
+              <a:t>배치 API · 지연을 할인으로 바꾼다</a:t>
             </a:r>
           </a:p>
         </p:txBody>
@@ -7380,7 +7293,7 @@
                 <a:ea typeface="NanumGothic"/>
                 <a:cs typeface="NanumGothic"/>
               </a:rPr>
-              <a:t>85.825%</a:t>
+              <a:t>50,000건 $675 → $337.50</a:t>
             </a:r>
           </a:p>
         </p:txBody>
@@ -7416,7 +7329,7 @@
                 <a:ea typeface="NanumGothic"/>
                 <a:cs typeface="NanumGothic"/>
               </a:rPr>
-              <a:t>잔여비용에 30%, 40%, 50%, 25%, 10%를 순차 적용한 산술 결과.</a:t>
+              <a:t>입력·출력 모두 50% 할인</a:t>
             </a:r>
           </a:p>
         </p:txBody>
@@ -7452,7 +7365,7 @@
                 <a:ea typeface="NanumGothic"/>
                 <a:cs typeface="NanumGothic"/>
               </a:rPr>
-              <a:t>85.825%는 60–80% 범위 밖이다. ‘일치한다’는 표현은 삭제한다.</a:t>
+              <a:t>24시간 안에 끝나면 되는 잡만</a:t>
             </a:r>
           </a:p>
         </p:txBody>
@@ -7488,7 +7401,7 @@
                 <a:ea typeface="NanumGothic"/>
                 <a:cs typeface="NanumGothic"/>
               </a:rPr>
-              <a:t>레버의 중복·상호작용·추가 비용을 검증하지 않았다. 경험적 상한도 아니다.</a:t>
+              <a:t>야간 평가 · 대량 분류 · 리포트 생성 · 레포 전체 분석</a:t>
             </a:r>
           </a:p>
         </p:txBody>
@@ -7524,7 +7437,7 @@
                 <a:ea typeface="NanumGothic"/>
                 <a:cs typeface="NanumGothic"/>
               </a:rPr>
-              <a:t>experiments/exp06_other_levers.py §E</a:t>
+              <a:t>experiments/exp06_other_levers.py</a:t>
             </a:r>
           </a:p>
         </p:txBody>
@@ -7701,7 +7614,7 @@
                 <a:ea typeface="NanumGothic"/>
                 <a:cs typeface="NanumGothic"/>
               </a:rPr>
-              <a:t>전체 시스템 비용 시나리오</a:t>
+              <a:t>순차 시나리오</a:t>
             </a:r>
           </a:p>
         </p:txBody>
@@ -7737,7 +7650,7 @@
                 <a:ea typeface="NanumGothic"/>
                 <a:cs typeface="NanumGothic"/>
               </a:rPr>
-              <a:t>서브에이전트는 전체 비용으로 비교한다</a:t>
+              <a:t>레버는 곱해진다</a:t>
             </a:r>
           </a:p>
         </p:txBody>
@@ -7773,7 +7686,7 @@
                 <a:ea typeface="NanumGothic"/>
                 <a:cs typeface="NanumGothic"/>
               </a:rPr>
-              <a:t>메인 + 자식 + 요약 비용</a:t>
+              <a:t>85.825% (잔여 14%)</a:t>
             </a:r>
           </a:p>
         </p:txBody>
@@ -7809,7 +7722,7 @@
                 <a:ea typeface="NanumGothic"/>
                 <a:cs typeface="NanumGothic"/>
               </a:rPr>
-              <a:t>동일 툴 작업 가정: naive $5.6010, compact $3.4425, subagent $2.7360</a:t>
+              <a:t>시맨틱 캐시 → 라우팅 → 캐싱 → verbosity/effort → 배치</a:t>
             </a:r>
           </a:p>
         </p:txBody>
@@ -7845,7 +7758,7 @@
                 <a:ea typeface="NanumGothic"/>
                 <a:cs typeface="NanumGothic"/>
               </a:rPr>
-              <a:t>20턴, 매 턴 툴 8,000, 초기 5,000, 출력 300, 요약 1,500, 같은 Sonnet 단가.</a:t>
+              <a:t>잔여 비용에 순차 적용한 산술 결과</a:t>
             </a:r>
           </a:p>
         </p:txBody>
@@ -7881,21 +7794,21 @@
                 <a:ea typeface="NanumGothic"/>
                 <a:cs typeface="NanumGothic"/>
               </a:rPr>
-              <a:t>기존 -87%는 자식·요약 비용이 빠진 메인 컨텍스트 계산이었다.</a:t>
-            </a:r>
-          </a:p>
-        </p:txBody>
-      </p:sp>
-      <p:sp>
-        <p:nvSpPr>
-          <p:cNvPr id="10" name="audit:body-3"/>
+              <a:t>레버 간 중복·상호작용은 검증하지 않았다</a:t>
+            </a:r>
+          </a:p>
+        </p:txBody>
+      </p:sp>
+      <p:sp>
+        <p:nvSpPr>
+          <p:cNvPr id="10" name="audit:source"/>
           <p:cNvSpPr txBox="1"/>
           <p:nvPr/>
         </p:nvSpPr>
         <p:spPr>
           <a:xfrm>
-            <a:off x="777240" y="4782312"/>
-            <a:ext cx="10652760" cy="612648"/>
+            <a:off x="640080" y="6080760"/>
+            <a:ext cx="10972800" cy="274320"/>
           </a:xfrm>
           <a:prstGeom prst="rect">
             <a:avLst/>
@@ -7909,58 +7822,22 @@
           <a:lstStyle/>
           <a:p>
             <a:r>
-              <a:rPr sz="1750" b="0">
-                <a:solidFill>
-                  <a:srgbClr val="ECF1F6"/>
+              <a:rPr sz="1000" b="0">
+                <a:solidFill>
+                  <a:srgbClr val="93A4B5"/>
                 </a:solidFill>
                 <a:latin typeface="NanumGothic"/>
                 <a:ea typeface="NanumGothic"/>
                 <a:cs typeface="NanumGothic"/>
               </a:rPr>
-              <a:t>동일 작업량 가정이어도 요약 품질·실패·재시도까지 같다고 검증한 것은 아니다.</a:t>
-            </a:r>
-          </a:p>
-        </p:txBody>
-      </p:sp>
-      <p:sp>
-        <p:nvSpPr>
-          <p:cNvPr id="11" name="audit:source"/>
-          <p:cNvSpPr txBox="1"/>
-          <p:nvPr/>
-        </p:nvSpPr>
-        <p:spPr>
-          <a:xfrm>
-            <a:off x="640080" y="6080760"/>
-            <a:ext cx="10972800" cy="274320"/>
-          </a:xfrm>
-          <a:prstGeom prst="rect">
-            <a:avLst/>
-          </a:prstGeom>
-          <a:noFill/>
-        </p:spPr>
-        <p:txBody>
-          <a:bodyPr wrap="square" lIns="0" rIns="0" tIns="0" bIns="0">
-            <a:spAutoFit/>
-          </a:bodyPr>
-          <a:lstStyle/>
-          <a:p>
-            <a:r>
-              <a:rPr sz="1000" b="0">
-                <a:solidFill>
-                  <a:srgbClr val="93A4B5"/>
-                </a:solidFill>
-                <a:latin typeface="NanumGothic"/>
-                <a:ea typeface="NanumGothic"/>
-                <a:cs typeface="NanumGothic"/>
-              </a:rPr>
-              <a:t>experiments/exp11_tool_output_bloat.py §A</a:t>
-            </a:r>
-          </a:p>
-        </p:txBody>
-      </p:sp>
-      <p:sp>
-        <p:nvSpPr>
-          <p:cNvPr id="12" name="audit:footer"/>
+              <a:t>experiments/exp06_other_levers.py</a:t>
+            </a:r>
+          </a:p>
+        </p:txBody>
+      </p:sp>
+      <p:sp>
+        <p:nvSpPr>
+          <p:cNvPr id="11" name="audit:footer"/>
           <p:cNvSpPr txBox="1"/>
           <p:nvPr/>
         </p:nvSpPr>
@@ -8130,7 +8007,7 @@
                 <a:ea typeface="NanumGothic"/>
                 <a:cs typeface="NanumGothic"/>
               </a:rPr>
-              <a:t>정책 시뮬레이션 / 소프트웨어 테스트</a:t>
+              <a:t>운영 주의</a:t>
             </a:r>
           </a:p>
         </p:txBody>
@@ -8166,7 +8043,7 @@
                 <a:ea typeface="NanumGothic"/>
                 <a:cs typeface="NanumGothic"/>
               </a:rPr>
-              <a:t>사다리 재생은 정책 A/B 실측이 아니다</a:t>
+              <a:t>캐싱과 개인정보</a:t>
             </a:r>
           </a:p>
         </p:txBody>
@@ -8202,7 +8079,7 @@
                 <a:ea typeface="NanumGothic"/>
                 <a:cs typeface="NanumGothic"/>
               </a:rPr>
-              <a:t>리플레이는 유용하다. 명칭을 바꾼다.</a:t>
+              <a:t>개인화 · 실시간 응답은 캐싱 금지</a:t>
             </a:r>
           </a:p>
         </p:txBody>
@@ -8238,7 +8115,7 @@
                 <a:ea typeface="NanumGothic"/>
                 <a:cs typeface="NanumGothic"/>
               </a:rPr>
-              <a:t>기존 3.06배는 고정 발화를 다른 정책으로 처리한다는 비용 재생이었다.</a:t>
+              <a:t>멀티턴은 캐시 키에 컨텍스트를 포함</a:t>
             </a:r>
           </a:p>
         </p:txBody>
@@ -8274,7 +8151,7 @@
                 <a:ea typeface="NanumGothic"/>
                 <a:cs typeface="NanumGothic"/>
               </a:rPr>
-              <a:t>지금은 respec의 무료 중단과 실행 비용을 분리하고, 총 입력 증가분을 한 번만 더한다.</a:t>
+              <a:t>시맨틱 캐시 임계값이 느슨하면 '비슷하지만 틀린 답'을 준다</a:t>
             </a:r>
           </a:p>
         </p:txBody>
@@ -8310,21 +8187,21 @@
                 <a:ea typeface="NanumGothic"/>
                 <a:cs typeface="NanumGothic"/>
               </a:rPr>
-              <a:t>A·오케스트레이터는 범위·리셋·출력 상한·진단 후 적용 비용을 공통 함수로 계산.</a:t>
-            </a:r>
-          </a:p>
-        </p:txBody>
-      </p:sp>
-      <p:sp>
-        <p:nvSpPr>
-          <p:cNvPr id="10" name="audit:body-3"/>
+              <a:t>삭제·TTL 정책을 프롬프트 설계와 함께 정한다</a:t>
+            </a:r>
+          </a:p>
+        </p:txBody>
+      </p:sp>
+      <p:sp>
+        <p:nvSpPr>
+          <p:cNvPr id="10" name="audit:source"/>
           <p:cNvSpPr txBox="1"/>
           <p:nvPr/>
         </p:nvSpPr>
         <p:spPr>
           <a:xfrm>
-            <a:off x="777240" y="4782312"/>
-            <a:ext cx="10652760" cy="612648"/>
+            <a:off x="640080" y="6080760"/>
+            <a:ext cx="10972800" cy="274320"/>
           </a:xfrm>
           <a:prstGeom prst="rect">
             <a:avLst/>
@@ -8338,58 +8215,22 @@
           <a:lstStyle/>
           <a:p>
             <a:r>
-              <a:rPr sz="1750" b="0">
-                <a:solidFill>
-                  <a:srgbClr val="ECF1F6"/>
+              <a:rPr sz="1000" b="0">
+                <a:solidFill>
+                  <a:srgbClr val="93A4B5"/>
                 </a:solidFill>
                 <a:latin typeface="NanumGothic"/>
                 <a:ea typeface="NanumGothic"/>
                 <a:cs typeface="NanumGothic"/>
               </a:rPr>
-              <a:t>새 task_id의 의도 이력을 분리해 앞 작업의 재작업 상태가 새 작업으로 새지 않게 한다.</a:t>
-            </a:r>
-          </a:p>
-        </p:txBody>
-      </p:sp>
-      <p:sp>
-        <p:nvSpPr>
-          <p:cNvPr id="11" name="audit:source"/>
-          <p:cNvSpPr txBox="1"/>
-          <p:nvPr/>
-        </p:nvSpPr>
-        <p:spPr>
-          <a:xfrm>
-            <a:off x="640080" y="6080760"/>
-            <a:ext cx="10972800" cy="274320"/>
-          </a:xfrm>
-          <a:prstGeom prst="rect">
-            <a:avLst/>
-          </a:prstGeom>
-          <a:noFill/>
-        </p:spPr>
-        <p:txBody>
-          <a:bodyPr wrap="square" lIns="0" rIns="0" tIns="0" bIns="0">
-            <a:spAutoFit/>
-          </a:bodyPr>
-          <a:lstStyle/>
-          <a:p>
-            <a:r>
-              <a:rPr sz="1000" b="0">
-                <a:solidFill>
-                  <a:srgbClr val="93A4B5"/>
-                </a:solidFill>
-                <a:latin typeface="NanumGothic"/>
-                <a:ea typeface="NanumGothic"/>
-                <a:cs typeface="NanumGothic"/>
-              </a:rPr>
-              <a:t>analysis/lean_vs_full.py · agent_setup/orchestrator.py</a:t>
-            </a:r>
-          </a:p>
-        </p:txBody>
-      </p:sp>
-      <p:sp>
-        <p:nvSpPr>
-          <p:cNvPr id="12" name="audit:footer"/>
+              <a:t>experiments/exp06_other_levers.py</a:t>
+            </a:r>
+          </a:p>
+        </p:txBody>
+      </p:sp>
+      <p:sp>
+        <p:nvSpPr>
+          <p:cNvPr id="11" name="audit:footer"/>
           <p:cNvSpPr txBox="1"/>
           <p:nvPr/>
         </p:nvSpPr>

--- a/presentation/token_cost_bonus.pptx
+++ b/presentation/token_cost_bonus.pptx
@@ -15,6 +15,10 @@
     <p:sldId id="263" r:id="rId15"/>
     <p:sldId id="264" r:id="rId16"/>
     <p:sldId id="265" r:id="rId17"/>
+    <p:sldId id="266" r:id="rId18"/>
+    <p:sldId id="267" r:id="rId19"/>
+    <p:sldId id="268" r:id="rId20"/>
+    <p:sldId id="269" r:id="rId21"/>
   </p:sldIdLst>
   <p:sldSz cx="12191695" cy="6858000" type="screen4x3"/>
   <p:notesSz cx="6858000" cy="9144000"/>
@@ -601,6 +605,366 @@
           <a:lstStyle/>
           <a:p>
             <a:r>
+              <a:t>각 레버의 절감률을 순서대로 곱한 값이다. 실제 도입에서는 서로 겹치는 부분이 생긴다.</a:t>
+            </a:r>
+          </a:p>
+          <a:p>
+            <a:r>
+              <a:t>검증된 상한도 아니다. 자기 데이터로 A/B를 돌려 확정해야 한다.</a:t>
+            </a:r>
+          </a:p>
+          <a:p>
+            <a:r>
+              <a:t>레버별 적용 조건(히트율·라우팅 임계값·배치 가능성)이 다르다.</a:t>
+            </a:r>
+          </a:p>
+          <a:p>
+            <a:r>
+              <a:t>근거: experiments/exp06_other_levers.py</a:t>
+            </a:r>
+          </a:p>
+          <a:p>
+            <a:r>
+              <a:t>증거 범위: 순차 시나리오</a:t>
+            </a:r>
+          </a:p>
+        </p:txBody>
+      </p:sp>
+      <p:sp>
+        <p:nvSpPr>
+          <p:cNvPr id="4" name="Slide Number Placeholder 3"/>
+          <p:cNvSpPr>
+            <a:spLocks noGrp="1"/>
+          </p:cNvSpPr>
+          <p:nvPr>
+            <p:ph type="sldNum" idx="5" sz="quarter"/>
+          </p:nvPr>
+        </p:nvSpPr>
+        <p:spPr/>
+      </p:sp>
+    </p:spTree>
+  </p:cSld>
+  <p:clrMapOvr>
+    <a:masterClrMapping/>
+  </p:clrMapOvr>
+</p:notes>
+</file>
+
+<file path=ppt/notesSlides/notesSlide11.xml><?xml version="1.0" encoding="utf-8"?>
+<p:notes xmlns:a="http://schemas.openxmlformats.org/drawingml/2006/main" xmlns:p="http://schemas.openxmlformats.org/presentationml/2006/main" xmlns:r="http://schemas.openxmlformats.org/officeDocument/2006/relationships">
+  <p:cSld>
+    <p:spTree>
+      <p:nvGrpSpPr>
+        <p:cNvPr id="1" name=""/>
+        <p:cNvGrpSpPr/>
+        <p:nvPr/>
+      </p:nvGrpSpPr>
+      <p:grpSpPr>
+        <a:xfrm>
+          <a:off x="0" y="0"/>
+          <a:ext cx="0" cy="0"/>
+          <a:chOff x="0" y="0"/>
+          <a:chExt cx="0" cy="0"/>
+        </a:xfrm>
+      </p:grpSpPr>
+      <p:sp>
+        <p:nvSpPr>
+          <p:cNvPr id="2" name="Slide Image Placeholder 1"/>
+          <p:cNvSpPr>
+            <a:spLocks noGrp="1"/>
+          </p:cNvSpPr>
+          <p:nvPr>
+            <p:ph type="sldImg" idx="2"/>
+          </p:nvPr>
+        </p:nvSpPr>
+        <p:spPr/>
+      </p:sp>
+      <p:sp>
+        <p:nvSpPr>
+          <p:cNvPr id="3" name="Notes Placeholder 2"/>
+          <p:cNvSpPr>
+            <a:spLocks noGrp="1"/>
+          </p:cNvSpPr>
+          <p:nvPr>
+            <p:ph type="body" idx="3" sz="quarter"/>
+          </p:nvPr>
+        </p:nvSpPr>
+        <p:spPr/>
+        <p:txBody>
+          <a:bodyPr/>
+          <a:lstStyle/>
+          <a:p>
+            <a:r>
+              <a:t>비교는 자동(-1) 대 미지정이다. 명시적 0과 섞으면 결론이 달라진다.</a:t>
+            </a:r>
+          </a:p>
+          <a:p>
+            <a:r>
+              <a:t>±$0.05 허용오차 통과는 미지정 6/6 · 명시적 0은 5/6이다. 정확한 숫자 채점으로는 3/6이 된다 — 동등성 증명이 아니다.</a:t>
+            </a:r>
+          </a:p>
+          <a:p>
+            <a:r>
+              <a:t>구모델의 thinkingBudget 로그는 역사적 관측으로 보존한다. 현재 API는 thinkingLevel을 쓴다.</a:t>
+            </a:r>
+          </a:p>
+          <a:p>
+            <a:r>
+              <a:t>근거: results/thinking_sweep.jsonl (30 rows)</a:t>
+            </a:r>
+          </a:p>
+          <a:p>
+            <a:r>
+              <a:t>증거 범위: 저장 API 로그 재계산</a:t>
+            </a:r>
+          </a:p>
+        </p:txBody>
+      </p:sp>
+      <p:sp>
+        <p:nvSpPr>
+          <p:cNvPr id="4" name="Slide Number Placeholder 3"/>
+          <p:cNvSpPr>
+            <a:spLocks noGrp="1"/>
+          </p:cNvSpPr>
+          <p:nvPr>
+            <p:ph type="sldNum" idx="5" sz="quarter"/>
+          </p:nvPr>
+        </p:nvSpPr>
+        <p:spPr/>
+      </p:sp>
+    </p:spTree>
+  </p:cSld>
+  <p:clrMapOvr>
+    <a:masterClrMapping/>
+  </p:clrMapOvr>
+</p:notes>
+</file>
+
+<file path=ppt/notesSlides/notesSlide12.xml><?xml version="1.0" encoding="utf-8"?>
+<p:notes xmlns:a="http://schemas.openxmlformats.org/drawingml/2006/main" xmlns:p="http://schemas.openxmlformats.org/presentationml/2006/main" xmlns:r="http://schemas.openxmlformats.org/officeDocument/2006/relationships">
+  <p:cSld>
+    <p:spTree>
+      <p:nvGrpSpPr>
+        <p:cNvPr id="1" name=""/>
+        <p:cNvGrpSpPr/>
+        <p:nvPr/>
+      </p:nvGrpSpPr>
+      <p:grpSpPr>
+        <a:xfrm>
+          <a:off x="0" y="0"/>
+          <a:ext cx="0" cy="0"/>
+          <a:chOff x="0" y="0"/>
+          <a:chExt cx="0" cy="0"/>
+        </a:xfrm>
+      </p:grpSpPr>
+      <p:sp>
+        <p:nvSpPr>
+          <p:cNvPr id="2" name="Slide Image Placeholder 1"/>
+          <p:cNvSpPr>
+            <a:spLocks noGrp="1"/>
+          </p:cNvSpPr>
+          <p:nvPr>
+            <p:ph type="sldImg" idx="2"/>
+          </p:nvPr>
+        </p:nvSpPr>
+        <p:spPr/>
+      </p:sp>
+      <p:sp>
+        <p:nvSpPr>
+          <p:cNvPr id="3" name="Notes Placeholder 2"/>
+          <p:cNvSpPr>
+            <a:spLocks noGrp="1"/>
+          </p:cNvSpPr>
+          <p:nvPr>
+            <p:ph type="body" idx="3" sz="quarter"/>
+          </p:nvPr>
+        </p:nvSpPr>
+        <p:spPr/>
+        <p:txBody>
+          <a:bodyPr/>
+          <a:lstStyle/>
+          <a:p>
+            <a:r>
+              <a:t>호출당 비용과 문자당 비용은 다른 질문에 대한 답이다. 하나로 다른 것을 대신하지 않는다.</a:t>
+            </a:r>
+          </a:p>
+          <a:p>
+            <a:r>
+              <a:t>'한국어가 일을 덜 했다'거나 '싸 보이는 착시'로 해석하지 않는다.</a:t>
+            </a:r>
+          </a:p>
+          <a:p>
+            <a:r>
+              <a:t>검정은 Welch로 계산했고 네 비교 모두 유의하다. 다만 반복 호출의 조건부 검정이며 의미량·정확도 검정이 아니다.</a:t>
+            </a:r>
+          </a:p>
+          <a:p>
+            <a:r>
+              <a:t>근거: tools/stats_test.py · storage logs</a:t>
+            </a:r>
+          </a:p>
+          <a:p>
+            <a:r>
+              <a:t>증거 범위: 저장 로그 80행 재계산</a:t>
+            </a:r>
+          </a:p>
+        </p:txBody>
+      </p:sp>
+      <p:sp>
+        <p:nvSpPr>
+          <p:cNvPr id="4" name="Slide Number Placeholder 3"/>
+          <p:cNvSpPr>
+            <a:spLocks noGrp="1"/>
+          </p:cNvSpPr>
+          <p:nvPr>
+            <p:ph type="sldNum" idx="5" sz="quarter"/>
+          </p:nvPr>
+        </p:nvSpPr>
+        <p:spPr/>
+      </p:sp>
+    </p:spTree>
+  </p:cSld>
+  <p:clrMapOvr>
+    <a:masterClrMapping/>
+  </p:clrMapOvr>
+</p:notes>
+</file>
+
+<file path=ppt/notesSlides/notesSlide13.xml><?xml version="1.0" encoding="utf-8"?>
+<p:notes xmlns:a="http://schemas.openxmlformats.org/drawingml/2006/main" xmlns:p="http://schemas.openxmlformats.org/presentationml/2006/main" xmlns:r="http://schemas.openxmlformats.org/officeDocument/2006/relationships">
+  <p:cSld>
+    <p:spTree>
+      <p:nvGrpSpPr>
+        <p:cNvPr id="1" name=""/>
+        <p:cNvGrpSpPr/>
+        <p:nvPr/>
+      </p:nvGrpSpPr>
+      <p:grpSpPr>
+        <a:xfrm>
+          <a:off x="0" y="0"/>
+          <a:ext cx="0" cy="0"/>
+          <a:chOff x="0" y="0"/>
+          <a:chExt cx="0" cy="0"/>
+        </a:xfrm>
+      </p:grpSpPr>
+      <p:sp>
+        <p:nvSpPr>
+          <p:cNvPr id="2" name="Slide Image Placeholder 1"/>
+          <p:cNvSpPr>
+            <a:spLocks noGrp="1"/>
+          </p:cNvSpPr>
+          <p:nvPr>
+            <p:ph type="sldImg" idx="2"/>
+          </p:nvPr>
+        </p:nvSpPr>
+        <p:spPr/>
+      </p:sp>
+      <p:sp>
+        <p:nvSpPr>
+          <p:cNvPr id="3" name="Notes Placeholder 2"/>
+          <p:cNvSpPr>
+            <a:spLocks noGrp="1"/>
+          </p:cNvSpPr>
+          <p:nvPr>
+            <p:ph type="body" idx="3" sz="quarter"/>
+          </p:nvPr>
+        </p:nvSpPr>
+        <p:spPr/>
+        <p:txBody>
+          <a:bodyPr/>
+          <a:lstStyle/>
+          <a:p>
+            <a:r>
+              <a:t>캐시는 비용 레버이면서 데이터 보존 문제다. 개인정보가 섞인 접두부는 캐싱 대상에서 뺀다.</a:t>
+            </a:r>
+          </a:p>
+          <a:p>
+            <a:r>
+              <a:t>시맨틱 캐시는 질의가 비슷할 때 호출 자체를 제거한다. 히트율보다 오답 위험이 먼저다.</a:t>
+            </a:r>
+          </a:p>
+          <a:p>
+            <a:r>
+              <a:t>TTL과 삭제 시점을 벤더 문서 기준으로 확인하고 기록해 둔다.</a:t>
+            </a:r>
+          </a:p>
+          <a:p>
+            <a:r>
+              <a:t>근거: experiments/exp06_other_levers.py</a:t>
+            </a:r>
+          </a:p>
+          <a:p>
+            <a:r>
+              <a:t>증거 범위: 운영 주의</a:t>
+            </a:r>
+          </a:p>
+        </p:txBody>
+      </p:sp>
+      <p:sp>
+        <p:nvSpPr>
+          <p:cNvPr id="4" name="Slide Number Placeholder 3"/>
+          <p:cNvSpPr>
+            <a:spLocks noGrp="1"/>
+          </p:cNvSpPr>
+          <p:nvPr>
+            <p:ph type="sldNum" idx="5" sz="quarter"/>
+          </p:nvPr>
+        </p:nvSpPr>
+        <p:spPr/>
+      </p:sp>
+    </p:spTree>
+  </p:cSld>
+  <p:clrMapOvr>
+    <a:masterClrMapping/>
+  </p:clrMapOvr>
+</p:notes>
+</file>
+
+<file path=ppt/notesSlides/notesSlide14.xml><?xml version="1.0" encoding="utf-8"?>
+<p:notes xmlns:a="http://schemas.openxmlformats.org/drawingml/2006/main" xmlns:p="http://schemas.openxmlformats.org/presentationml/2006/main" xmlns:r="http://schemas.openxmlformats.org/officeDocument/2006/relationships">
+  <p:cSld>
+    <p:spTree>
+      <p:nvGrpSpPr>
+        <p:cNvPr id="1" name=""/>
+        <p:cNvGrpSpPr/>
+        <p:nvPr/>
+      </p:nvGrpSpPr>
+      <p:grpSpPr>
+        <a:xfrm>
+          <a:off x="0" y="0"/>
+          <a:ext cx="0" cy="0"/>
+          <a:chOff x="0" y="0"/>
+          <a:chExt cx="0" cy="0"/>
+        </a:xfrm>
+      </p:grpSpPr>
+      <p:sp>
+        <p:nvSpPr>
+          <p:cNvPr id="2" name="Slide Image Placeholder 1"/>
+          <p:cNvSpPr>
+            <a:spLocks noGrp="1"/>
+          </p:cNvSpPr>
+          <p:nvPr>
+            <p:ph type="sldImg" idx="2"/>
+          </p:nvPr>
+        </p:nvSpPr>
+        <p:spPr/>
+      </p:sp>
+      <p:sp>
+        <p:nvSpPr>
+          <p:cNvPr id="3" name="Notes Placeholder 2"/>
+          <p:cNvSpPr>
+            <a:spLocks noGrp="1"/>
+          </p:cNvSpPr>
+          <p:nvPr>
+            <p:ph type="body" idx="3" sz="quarter"/>
+          </p:nvPr>
+        </p:nvSpPr>
+        <p:spPr/>
+        <p:txBody>
+          <a:bodyPr/>
+          <a:lstStyle/>
+          <a:p>
+            <a:r>
               <a:t>오늘 배운 것을 다 적용하지 말고 되돌리기 쉬운 것 하나만 켜고 재측정한다.</a:t>
             </a:r>
           </a:p>
@@ -691,17 +1055,17 @@
           <a:lstStyle/>
           <a:p>
             <a:r>
-              <a:t>캐시는 프리픽스를 단위로 매칭한다. 앞부분이 한 글자만 달라도 전액을 다시 낸다.</a:t>
-            </a:r>
-          </a:p>
-          <a:p>
-            <a:r>
-              <a:t>히트율 0%에서는 쓰기 프리미엄만 계속 물어 캐시 없음($8.55)보다 비싸진다($10.05).</a:t>
-            </a:r>
-          </a:p>
-          <a:p>
-            <a:r>
-              <a:t>반대로 히트율이 40%만 넘어도 이미 이득이다. 그래서 '켜고, 적중률을 본다'가 순서다.</a:t>
+              <a:t>고정 20,000 + 가변 1,000 + 출력 1,500, Sonnet 단가, 100콜 조건의 계산이다.</a:t>
+            </a:r>
+          </a:p>
+          <a:p>
+            <a:r>
+              <a:t>히트율은 가정값이다. 실제 값은 자기 usage의 cache_read 필드로 측정해야 한다.</a:t>
+            </a:r>
+          </a:p>
+          <a:p>
+            <a:r>
+              <a:t>저장료·TTL·최소 길이는 모델별로 다르다. 미확인 기준은 할인 가정을 하지 않는다.</a:t>
             </a:r>
           </a:p>
           <a:p>
@@ -711,7 +1075,7 @@
           </a:p>
           <a:p>
             <a:r>
-              <a:t>증거 범위: 비용 시나리오</a:t>
+              <a:t>증거 범위: 비용 시나리오 (100콜)</a:t>
             </a:r>
           </a:p>
         </p:txBody>
@@ -781,27 +1145,22 @@
           <a:lstStyle/>
           <a:p>
             <a:r>
-              <a:t>같은 12,000토큰을 매번 보내던 세션을 절반으로 줄이고 캐시까지 걸었을 때의 산술이다.</a:t>
-            </a:r>
-          </a:p>
-          <a:p>
-            <a:r>
-              <a:t>압축률과 정확도는 작업별로 다르다. 지시·수용 기준을 지우면 요구사항이 바뀐다.</a:t>
-            </a:r>
-          </a:p>
-          <a:p>
-            <a:r>
-              <a:t>압축기 실행 비용과 지연도 손익에 포함해야 한다. 짧은 프롬프트는 압축이 손해일 수 있다.</a:t>
-            </a:r>
-          </a:p>
-          <a:p>
-            <a:r>
-              <a:t>압축 자체의 지연·품질 손실은 이 계산 밖이다.</a:t>
-            </a:r>
-          </a:p>
-          <a:p>
-            <a:r>
-              <a:t>근거: experiments/exp09_dry.py</a:t>
+              <a:t>캐시는 프리픽스를 단위로 매칭한다. 앞부분이 한 글자만 달라도 전액을 다시 낸다.</a:t>
+            </a:r>
+          </a:p>
+          <a:p>
+            <a:r>
+              <a:t>히트율 0%에서는 쓰기 프리미엄만 계속 물어 캐시 없음($8.55)보다 비싸진다($10.05).</a:t>
+            </a:r>
+          </a:p>
+          <a:p>
+            <a:r>
+              <a:t>반대로 히트율이 40%만 넘어도 이미 이득이다. 그래서 '켜고, 적중률을 본다'가 순서다.</a:t>
+            </a:r>
+          </a:p>
+          <a:p>
+            <a:r>
+              <a:t>근거: experiments/exp03_prompt_caching.py</a:t>
             </a:r>
           </a:p>
           <a:p>
@@ -876,27 +1235,27 @@
           <a:lstStyle/>
           <a:p>
             <a:r>
-              <a:t>20턴 세션에 캐싱만 걸면 $1.91(+17%) — 이력 누적은 그대로 남기 때문이다.</a:t>
-            </a:r>
-          </a:p>
-          <a:p>
-            <a:r>
-              <a:t>요약은 품질에 영향을 준다. 압축 과정에서 잃는 정보가 재작업을 만들면 절감이 상쇄된다.</a:t>
-            </a:r>
-          </a:p>
-          <a:p>
-            <a:r>
-              <a:t>주기를 바꿔 가며 재작업률과 총비용을 함께 측정할 것을 권한다.</a:t>
-            </a:r>
-          </a:p>
-          <a:p>
-            <a:r>
-              <a:t>근거: experiments/exp04_agent_loop_sdd.py</a:t>
-            </a:r>
-          </a:p>
-          <a:p>
-            <a:r>
-              <a:t>증거 범위: 비용 시나리오</a:t>
+              <a:t>고정 20,000 + 가변 1,000 + 출력 1,500, Sonnet 단가, 100콜 조건의 계산이다.</a:t>
+            </a:r>
+          </a:p>
+          <a:p>
+            <a:r>
+              <a:t>히트율은 가정값이다. 실제 값은 자기 usage의 cache_read 필드로 측정한다.</a:t>
+            </a:r>
+          </a:p>
+          <a:p>
+            <a:r>
+              <a:t>저장료·TTL·최소 길이는 모델별로 다르다. 미확인 기준은 할인 가정을 하지 않는다.</a:t>
+            </a:r>
+          </a:p>
+          <a:p>
+            <a:r>
+              <a:t>근거: experiments/exp03_prompt_caching.py</a:t>
+            </a:r>
+          </a:p>
+          <a:p>
+            <a:r>
+              <a:t>증거 범위: 비용 시나리오 (100콜)</a:t>
             </a:r>
           </a:p>
         </p:txBody>
@@ -966,27 +1325,32 @@
           <a:lstStyle/>
           <a:p>
             <a:r>
-              <a:t>같은 툴 작업량을 가정하고 메인·자식·요약 비용을 모두 합산한 값이다.</a:t>
-            </a:r>
-          </a:p>
-          <a:p>
-            <a:r>
-              <a:t>서브에이전트는 요약 품질과 실패·재시도 특성이 다르다. 비용만으로 우열을 단정하지 않는다.</a:t>
-            </a:r>
-          </a:p>
-          <a:p>
-            <a:r>
-              <a:t>과거의 -87%는 자식·요약을 빼고 계산한 값이어서 전체 절감으로 쓰지 않는다.</a:t>
-            </a:r>
-          </a:p>
-          <a:p>
-            <a:r>
-              <a:t>근거: experiments/exp11_tool_output_bloat.py</a:t>
-            </a:r>
-          </a:p>
-          <a:p>
-            <a:r>
-              <a:t>증거 범위: 전체 시스템 비용 시나리오</a:t>
+              <a:t>같은 12,000토큰을 매번 보내던 세션을 절반으로 줄이고 캐시까지 걸었을 때의 산술이다.</a:t>
+            </a:r>
+          </a:p>
+          <a:p>
+            <a:r>
+              <a:t>압축률과 정확도는 작업별로 다르다. 지시·수용 기준을 지우면 요구사항이 바뀐다.</a:t>
+            </a:r>
+          </a:p>
+          <a:p>
+            <a:r>
+              <a:t>압축기 실행 비용과 지연도 손익에 포함해야 한다. 짧은 프롬프트는 압축이 손해일 수 있다.</a:t>
+            </a:r>
+          </a:p>
+          <a:p>
+            <a:r>
+              <a:t>압축 자체의 지연·품질 손실은 이 계산 밖이다.</a:t>
+            </a:r>
+          </a:p>
+          <a:p>
+            <a:r>
+              <a:t>근거: experiments/exp09_dry.py</a:t>
+            </a:r>
+          </a:p>
+          <a:p>
+            <a:r>
+              <a:t>증거 범위: 비용 시나리오</a:t>
             </a:r>
           </a:p>
         </p:txBody>
@@ -1056,27 +1420,27 @@
           <a:lstStyle/>
           <a:p>
             <a:r>
-              <a:t>벤치마크에서 잡은 임계값을 그대로 프로덕션에 쓰면 절감이 과대 추정된다.</a:t>
-            </a:r>
-          </a:p>
-          <a:p>
-            <a:r>
-              <a:t>저볼륨에서는 라우팅 오버헤드가 절감을 상쇄한다. 반복률과 볼륨을 먼저 본다.</a:t>
-            </a:r>
-          </a:p>
-          <a:p>
-            <a:r>
-              <a:t>라우터 오류율·검출률은 이 저장소에서 측정하지 않았다. 참조 구현의 회귀 테스트만 있다.</a:t>
-            </a:r>
-          </a:p>
-          <a:p>
-            <a:r>
-              <a:t>근거: experiments/exp06_other_levers.py</a:t>
-            </a:r>
-          </a:p>
-          <a:p>
-            <a:r>
-              <a:t>증거 범위: 시나리오 (10,000콜)</a:t>
+              <a:t>20턴 세션에 캐싱만 걸면 $1.91(+17%) — 이력 누적은 그대로 남기 때문이다.</a:t>
+            </a:r>
+          </a:p>
+          <a:p>
+            <a:r>
+              <a:t>요약은 품질에 영향을 준다. 압축 과정에서 잃는 정보가 재작업을 만들면 절감이 상쇄된다.</a:t>
+            </a:r>
+          </a:p>
+          <a:p>
+            <a:r>
+              <a:t>주기를 바꿔 가며 재작업률과 총비용을 함께 측정할 것을 권한다.</a:t>
+            </a:r>
+          </a:p>
+          <a:p>
+            <a:r>
+              <a:t>근거: experiments/exp04_agent_loop_sdd.py</a:t>
+            </a:r>
+          </a:p>
+          <a:p>
+            <a:r>
+              <a:t>증거 범위: 비용 시나리오</a:t>
             </a:r>
           </a:p>
         </p:txBody>
@@ -1146,27 +1510,27 @@
           <a:lstStyle/>
           <a:p>
             <a:r>
-              <a:t>토큰 수는 그대로이고 지원 서비스에서 가격을 줄이는 레버다.</a:t>
-            </a:r>
-          </a:p>
-          <a:p>
-            <a:r>
-              <a:t>실시간 UI, 대화형 코딩 에이전트처럼 대기 화면이 있는 작업에는 쓸 수 없다.</a:t>
-            </a:r>
-          </a:p>
-          <a:p>
-            <a:r>
-              <a:t>지연·실패 처리·지원 조건(요청 수 상한, 결과 보관 기간)을 확인해야 한다.</a:t>
-            </a:r>
-          </a:p>
-          <a:p>
-            <a:r>
-              <a:t>근거: experiments/exp06_other_levers.py</a:t>
-            </a:r>
-          </a:p>
-          <a:p>
-            <a:r>
-              <a:t>증거 범위: 가격표 + 시나리오</a:t>
+              <a:t>같은 툴 작업량을 가정하고 메인·자식·요약 비용을 모두 합산한 값이다.</a:t>
+            </a:r>
+          </a:p>
+          <a:p>
+            <a:r>
+              <a:t>서브에이전트는 요약 품질과 실패·재시도 특성이 다르다. 비용만으로 우열을 단정하지 않는다.</a:t>
+            </a:r>
+          </a:p>
+          <a:p>
+            <a:r>
+              <a:t>과거의 -87%는 자식·요약을 빼고 계산한 값이어서 전체 절감으로 쓰지 않는다.</a:t>
+            </a:r>
+          </a:p>
+          <a:p>
+            <a:r>
+              <a:t>근거: experiments/exp11_tool_output_bloat.py</a:t>
+            </a:r>
+          </a:p>
+          <a:p>
+            <a:r>
+              <a:t>증거 범위: 전체 시스템 비용 시나리오</a:t>
             </a:r>
           </a:p>
         </p:txBody>
@@ -1236,17 +1600,17 @@
           <a:lstStyle/>
           <a:p>
             <a:r>
-              <a:t>각 레버의 절감률을 순서대로 곱한 값이다. 실제 도입에서는 서로 겹치는 부분이 생긴다.</a:t>
-            </a:r>
-          </a:p>
-          <a:p>
-            <a:r>
-              <a:t>검증된 상한도 아니다. 자기 데이터로 A/B를 돌려 확정해야 한다.</a:t>
-            </a:r>
-          </a:p>
-          <a:p>
-            <a:r>
-              <a:t>발표에서는 '이론적 상한'이라는 표현보다 '순차 가정의 산술'이라고 말한다.</a:t>
+              <a:t>벤치마크에서 잡은 임계값을 그대로 프로덕션에 쓰면 절감이 과대 추정된다.</a:t>
+            </a:r>
+          </a:p>
+          <a:p>
+            <a:r>
+              <a:t>저볼륨에서는 라우팅 오버헤드가 절감을 상쇄한다. 반복률과 볼륨을 먼저 본다.</a:t>
+            </a:r>
+          </a:p>
+          <a:p>
+            <a:r>
+              <a:t>라우터 오류율·검출률은 이 저장소에서 측정하지 않았다. 참조 구현의 회귀 테스트만 있다.</a:t>
             </a:r>
           </a:p>
           <a:p>
@@ -1256,7 +1620,7 @@
           </a:p>
           <a:p>
             <a:r>
-              <a:t>증거 범위: 순차 시나리오</a:t>
+              <a:t>증거 범위: 시나리오 (10,000콜)</a:t>
             </a:r>
           </a:p>
         </p:txBody>
@@ -1326,17 +1690,17 @@
           <a:lstStyle/>
           <a:p>
             <a:r>
-              <a:t>캐시는 비용 레버이면서 데이터 보존 문제다. 개인정보가 섞인 접두부는 캐싱 대상에서 뺀다.</a:t>
-            </a:r>
-          </a:p>
-          <a:p>
-            <a:r>
-              <a:t>시맨틱 캐시는 질의가 비슷할 때 호출 자체를 제거한다. 히트율보다 오답 위험이 먼저다.</a:t>
-            </a:r>
-          </a:p>
-          <a:p>
-            <a:r>
-              <a:t>TTL과 삭제 시점을 벤더 문서 기준으로 확인하고 기록해 둔다.</a:t>
+              <a:t>토큰 수는 그대로이고 지원 서비스에서 가격을 줄이는 레버다.</a:t>
+            </a:r>
+          </a:p>
+          <a:p>
+            <a:r>
+              <a:t>실시간 UI, 대화형 코딩 에이전트처럼 대기 화면이 있는 작업에는 쓸 수 없다.</a:t>
+            </a:r>
+          </a:p>
+          <a:p>
+            <a:r>
+              <a:t>지연·실패 처리·지원 조건(요청 수 상한, 결과 보관 기간)을 확인해야 한다.</a:t>
             </a:r>
           </a:p>
           <a:p>
@@ -1346,7 +1710,7 @@
           </a:p>
           <a:p>
             <a:r>
-              <a:t>증거 범위: 운영 주의</a:t>
+              <a:t>증거 범위: 가격표 + 시나리오</a:t>
             </a:r>
           </a:p>
         </p:txBody>
@@ -4863,6 +5227,1602 @@
                 <a:ea typeface="NanumGothic"/>
                 <a:cs typeface="NanumGothic"/>
               </a:rPr>
+              <a:t>순차 시나리오</a:t>
+            </a:r>
+          </a:p>
+        </p:txBody>
+      </p:sp>
+      <p:sp>
+        <p:nvSpPr>
+          <p:cNvPr id="5" name="audit:title"/>
+          <p:cNvSpPr txBox="1"/>
+          <p:nvPr/>
+        </p:nvSpPr>
+        <p:spPr>
+          <a:xfrm>
+            <a:off x="640080" y="566928"/>
+            <a:ext cx="10881360" cy="822960"/>
+          </a:xfrm>
+          <a:prstGeom prst="rect">
+            <a:avLst/>
+          </a:prstGeom>
+          <a:noFill/>
+        </p:spPr>
+        <p:txBody>
+          <a:bodyPr wrap="square" lIns="0" rIns="0" tIns="0" bIns="0">
+            <a:spAutoFit/>
+          </a:bodyPr>
+          <a:lstStyle/>
+          <a:p>
+            <a:r>
+              <a:rPr sz="2900" b="1">
+                <a:solidFill>
+                  <a:srgbClr val="ECF1F6"/>
+                </a:solidFill>
+                <a:latin typeface="NanumGothic"/>
+                <a:ea typeface="NanumGothic"/>
+                <a:cs typeface="NanumGothic"/>
+              </a:rPr>
+              <a:t>다섯 레버를 겹치면</a:t>
+            </a:r>
+          </a:p>
+        </p:txBody>
+      </p:sp>
+      <p:sp>
+        <p:nvSpPr>
+          <p:cNvPr id="6" name="audit:hero"/>
+          <p:cNvSpPr txBox="1"/>
+          <p:nvPr/>
+        </p:nvSpPr>
+        <p:spPr>
+          <a:xfrm>
+            <a:off x="640080" y="1261872"/>
+            <a:ext cx="10881360" cy="777240"/>
+          </a:xfrm>
+          <a:prstGeom prst="rect">
+            <a:avLst/>
+          </a:prstGeom>
+          <a:noFill/>
+        </p:spPr>
+        <p:txBody>
+          <a:bodyPr wrap="square" lIns="0" rIns="0" tIns="0" bIns="0">
+            <a:spAutoFit/>
+          </a:bodyPr>
+          <a:lstStyle/>
+          <a:p>
+            <a:r>
+              <a:rPr sz="2900" b="1">
+                <a:solidFill>
+                  <a:srgbClr val="36D399"/>
+                </a:solidFill>
+                <a:latin typeface="NanumGothic"/>
+                <a:ea typeface="NanumGothic"/>
+                <a:cs typeface="NanumGothic"/>
+              </a:rPr>
+              <a:t>잔여 14.18%</a:t>
+            </a:r>
+          </a:p>
+        </p:txBody>
+      </p:sp>
+      <p:sp>
+        <p:nvSpPr>
+          <p:cNvPr id="7" name="audit:body-0"/>
+          <p:cNvSpPr txBox="1"/>
+          <p:nvPr/>
+        </p:nvSpPr>
+        <p:spPr>
+          <a:xfrm>
+            <a:off x="777240" y="2029968"/>
+            <a:ext cx="10652760" cy="612648"/>
+          </a:xfrm>
+          <a:prstGeom prst="rect">
+            <a:avLst/>
+          </a:prstGeom>
+          <a:noFill/>
+        </p:spPr>
+        <p:txBody>
+          <a:bodyPr wrap="square" lIns="0" rIns="0" tIns="0" bIns="0">
+            <a:spAutoFit/>
+          </a:bodyPr>
+          <a:lstStyle/>
+          <a:p>
+            <a:r>
+              <a:rPr sz="1750" b="0">
+                <a:solidFill>
+                  <a:srgbClr val="ECF1F6"/>
+                </a:solidFill>
+                <a:latin typeface="NanumGothic"/>
+                <a:ea typeface="NanumGothic"/>
+                <a:cs typeface="NanumGothic"/>
+              </a:rPr>
+              <a:t>시맨틱 캐시 → 라우팅 → 캐싱 → effort → 배치</a:t>
+            </a:r>
+          </a:p>
+        </p:txBody>
+      </p:sp>
+      <p:sp>
+        <p:nvSpPr>
+          <p:cNvPr id="8" name="audit:body-1"/>
+          <p:cNvSpPr txBox="1"/>
+          <p:nvPr/>
+        </p:nvSpPr>
+        <p:spPr>
+          <a:xfrm>
+            <a:off x="777240" y="2542032"/>
+            <a:ext cx="10652760" cy="612648"/>
+          </a:xfrm>
+          <a:prstGeom prst="rect">
+            <a:avLst/>
+          </a:prstGeom>
+          <a:noFill/>
+        </p:spPr>
+        <p:txBody>
+          <a:bodyPr wrap="square" lIns="0" rIns="0" tIns="0" bIns="0">
+            <a:spAutoFit/>
+          </a:bodyPr>
+          <a:lstStyle/>
+          <a:p>
+            <a:r>
+              <a:rPr sz="1750" b="0">
+                <a:solidFill>
+                  <a:srgbClr val="ECF1F6"/>
+                </a:solidFill>
+                <a:latin typeface="NanumGothic"/>
+                <a:ea typeface="NanumGothic"/>
+                <a:cs typeface="NanumGothic"/>
+              </a:rPr>
+              <a:t>각 레버가 자기 조건을 만족할 때의 순차 산술</a:t>
+            </a:r>
+          </a:p>
+        </p:txBody>
+      </p:sp>
+      <p:pic>
+        <p:nvPicPr>
+          <p:cNvPr id="9" name="Picture 8" descr="stack.png"/>
+          <p:cNvPicPr>
+            <a:picLocks noChangeAspect="1"/>
+          </p:cNvPicPr>
+          <p:nvPr/>
+        </p:nvPicPr>
+        <p:blipFill>
+          <a:blip r:embed="rId2"/>
+          <a:stretch>
+            <a:fillRect/>
+          </a:stretch>
+        </p:blipFill>
+        <p:spPr>
+          <a:xfrm>
+            <a:off x="777240" y="3101593"/>
+            <a:ext cx="10652760" cy="2959100"/>
+          </a:xfrm>
+          <a:prstGeom prst="rect">
+            <a:avLst/>
+          </a:prstGeom>
+        </p:spPr>
+      </p:pic>
+      <p:sp>
+        <p:nvSpPr>
+          <p:cNvPr id="10" name="audit:chart-caption"/>
+          <p:cNvSpPr txBox="1"/>
+          <p:nvPr/>
+        </p:nvSpPr>
+        <p:spPr>
+          <a:xfrm>
+            <a:off x="777240" y="6135624"/>
+            <a:ext cx="10652760" cy="237744"/>
+          </a:xfrm>
+          <a:prstGeom prst="rect">
+            <a:avLst/>
+          </a:prstGeom>
+          <a:noFill/>
+        </p:spPr>
+        <p:txBody>
+          <a:bodyPr wrap="square" lIns="0" rIns="0" tIns="0" bIns="0">
+            <a:spAutoFit/>
+          </a:bodyPr>
+          <a:lstStyle/>
+          <a:p>
+            <a:r>
+              <a:rPr sz="950" b="0">
+                <a:solidFill>
+                  <a:srgbClr val="93A4B5"/>
+                </a:solidFill>
+                <a:latin typeface="NanumGothic"/>
+                <a:ea typeface="NanumGothic"/>
+                <a:cs typeface="NanumGothic"/>
+              </a:rPr>
+              <a:t>그래프 · 남은 비율 (%) · stack.png</a:t>
+            </a:r>
+          </a:p>
+        </p:txBody>
+      </p:sp>
+      <p:sp>
+        <p:nvSpPr>
+          <p:cNvPr id="11" name="audit:source"/>
+          <p:cNvSpPr txBox="1"/>
+          <p:nvPr/>
+        </p:nvSpPr>
+        <p:spPr>
+          <a:xfrm>
+            <a:off x="777240" y="6382512"/>
+            <a:ext cx="10972800" cy="274320"/>
+          </a:xfrm>
+          <a:prstGeom prst="rect">
+            <a:avLst/>
+          </a:prstGeom>
+          <a:noFill/>
+        </p:spPr>
+        <p:txBody>
+          <a:bodyPr wrap="square" lIns="0" rIns="0" tIns="0" bIns="0">
+            <a:spAutoFit/>
+          </a:bodyPr>
+          <a:lstStyle/>
+          <a:p>
+            <a:r>
+              <a:rPr sz="1000" b="0">
+                <a:solidFill>
+                  <a:srgbClr val="93A4B5"/>
+                </a:solidFill>
+                <a:latin typeface="NanumGothic"/>
+                <a:ea typeface="NanumGothic"/>
+                <a:cs typeface="NanumGothic"/>
+              </a:rPr>
+              <a:t>experiments/exp06_other_levers.py</a:t>
+            </a:r>
+          </a:p>
+        </p:txBody>
+      </p:sp>
+      <p:sp>
+        <p:nvSpPr>
+          <p:cNvPr id="12" name="audit:footer"/>
+          <p:cNvSpPr txBox="1"/>
+          <p:nvPr/>
+        </p:nvSpPr>
+        <p:spPr>
+          <a:xfrm>
+            <a:off x="777240" y="6583680"/>
+            <a:ext cx="10972800" cy="256032"/>
+          </a:xfrm>
+          <a:prstGeom prst="rect">
+            <a:avLst/>
+          </a:prstGeom>
+          <a:noFill/>
+        </p:spPr>
+        <p:txBody>
+          <a:bodyPr wrap="square" lIns="0" rIns="0" tIns="0" bIns="0">
+            <a:spAutoFit/>
+          </a:bodyPr>
+          <a:lstStyle/>
+          <a:p>
+            <a:r>
+              <a:rPr sz="1000" b="0">
+                <a:solidFill>
+                  <a:srgbClr val="93A4B5"/>
+                </a:solidFill>
+                <a:latin typeface="NanumGothic"/>
+                <a:ea typeface="NanumGothic"/>
+                <a:cs typeface="NanumGothic"/>
+              </a:rPr>
+              <a:t>2026-09-20  ·  근거와 조건을 함께 인용</a:t>
+            </a:r>
+          </a:p>
+        </p:txBody>
+      </p:sp>
+    </p:spTree>
+  </p:cSld>
+  <p:clrMapOvr>
+    <a:masterClrMapping/>
+  </p:clrMapOvr>
+</p:sld>
+</file>
+
+<file path=ppt/slides/slide11.xml><?xml version="1.0" encoding="utf-8"?>
+<p:sld xmlns:a="http://schemas.openxmlformats.org/drawingml/2006/main" xmlns:p="http://schemas.openxmlformats.org/presentationml/2006/main" xmlns:r="http://schemas.openxmlformats.org/officeDocument/2006/relationships">
+  <p:cSld>
+    <p:bg>
+      <p:bgPr>
+        <a:solidFill>
+          <a:srgbClr val="0E141B"/>
+        </a:solidFill>
+        <a:effectLst/>
+      </p:bgPr>
+    </p:bg>
+    <p:spTree>
+      <p:nvGrpSpPr>
+        <p:cNvPr id="1" name=""/>
+        <p:cNvGrpSpPr/>
+        <p:nvPr/>
+      </p:nvGrpSpPr>
+      <p:grpSpPr/>
+      <p:sp>
+        <p:nvSpPr>
+          <p:cNvPr id="2" name="Rectangle 1"/>
+          <p:cNvSpPr/>
+          <p:nvPr/>
+        </p:nvSpPr>
+        <p:spPr>
+          <a:xfrm>
+            <a:off x="0" y="0"/>
+            <a:ext cx="100584" cy="6858000"/>
+          </a:xfrm>
+          <a:prstGeom prst="rect">
+            <a:avLst/>
+          </a:prstGeom>
+          <a:solidFill>
+            <a:srgbClr val="36D399"/>
+          </a:solidFill>
+          <a:ln>
+            <a:noFill/>
+          </a:ln>
+        </p:spPr>
+        <p:style>
+          <a:lnRef idx="1">
+            <a:schemeClr val="accent1"/>
+          </a:lnRef>
+          <a:fillRef idx="3">
+            <a:schemeClr val="accent1"/>
+          </a:fillRef>
+          <a:effectRef idx="2">
+            <a:schemeClr val="accent1"/>
+          </a:effectRef>
+          <a:fontRef idx="minor">
+            <a:schemeClr val="lt1"/>
+          </a:fontRef>
+        </p:style>
+        <p:txBody>
+          <a:bodyPr rtlCol="0" anchor="ctr"/>
+          <a:lstStyle/>
+          <a:p>
+            <a:pPr algn="ctr"/>
+          </a:p>
+        </p:txBody>
+      </p:sp>
+      <p:sp>
+        <p:nvSpPr>
+          <p:cNvPr id="3" name="audit:index"/>
+          <p:cNvSpPr txBox="1"/>
+          <p:nvPr/>
+        </p:nvSpPr>
+        <p:spPr>
+          <a:xfrm>
+            <a:off x="640080" y="274320"/>
+            <a:ext cx="4572000" cy="274320"/>
+          </a:xfrm>
+          <a:prstGeom prst="rect">
+            <a:avLst/>
+          </a:prstGeom>
+          <a:noFill/>
+        </p:spPr>
+        <p:txBody>
+          <a:bodyPr wrap="square" lIns="0" rIns="0" tIns="0" bIns="0">
+            <a:spAutoFit/>
+          </a:bodyPr>
+          <a:lstStyle/>
+          <a:p>
+            <a:r>
+              <a:rPr sz="1100" b="0">
+                <a:solidFill>
+                  <a:srgbClr val="93A4B5"/>
+                </a:solidFill>
+                <a:latin typeface="NanumGothic"/>
+                <a:ea typeface="NanumGothic"/>
+                <a:cs typeface="NanumGothic"/>
+              </a:rPr>
+              <a:t>TOKEN COST LAB  /  11</a:t>
+            </a:r>
+          </a:p>
+        </p:txBody>
+      </p:sp>
+      <p:sp>
+        <p:nvSpPr>
+          <p:cNvPr id="4" name="audit:scope"/>
+          <p:cNvSpPr txBox="1"/>
+          <p:nvPr/>
+        </p:nvSpPr>
+        <p:spPr>
+          <a:xfrm>
+            <a:off x="5760720" y="274320"/>
+            <a:ext cx="5760720" cy="274320"/>
+          </a:xfrm>
+          <a:prstGeom prst="rect">
+            <a:avLst/>
+          </a:prstGeom>
+          <a:noFill/>
+        </p:spPr>
+        <p:txBody>
+          <a:bodyPr wrap="square" lIns="0" rIns="0" tIns="0" bIns="0">
+            <a:spAutoFit/>
+          </a:bodyPr>
+          <a:lstStyle/>
+          <a:p>
+            <a:r>
+              <a:rPr sz="1100" b="0">
+                <a:solidFill>
+                  <a:srgbClr val="36D399"/>
+                </a:solidFill>
+                <a:latin typeface="NanumGothic"/>
+                <a:ea typeface="NanumGothic"/>
+                <a:cs typeface="NanumGothic"/>
+              </a:rPr>
+              <a:t>저장 API 로그 재계산</a:t>
+            </a:r>
+          </a:p>
+        </p:txBody>
+      </p:sp>
+      <p:sp>
+        <p:nvSpPr>
+          <p:cNvPr id="5" name="audit:title"/>
+          <p:cNvSpPr txBox="1"/>
+          <p:nvPr/>
+        </p:nvSpPr>
+        <p:spPr>
+          <a:xfrm>
+            <a:off x="640080" y="822960"/>
+            <a:ext cx="10881360" cy="822960"/>
+          </a:xfrm>
+          <a:prstGeom prst="rect">
+            <a:avLst/>
+          </a:prstGeom>
+          <a:noFill/>
+        </p:spPr>
+        <p:txBody>
+          <a:bodyPr wrap="square" lIns="0" rIns="0" tIns="0" bIns="0">
+            <a:spAutoFit/>
+          </a:bodyPr>
+          <a:lstStyle/>
+          <a:p>
+            <a:r>
+              <a:rPr sz="2900" b="1">
+                <a:solidFill>
+                  <a:srgbClr val="ECF1F6"/>
+                </a:solidFill>
+                <a:latin typeface="NanumGothic"/>
+                <a:ea typeface="NanumGothic"/>
+                <a:cs typeface="NanumGothic"/>
+              </a:rPr>
+              <a:t>안 보이는 사고 토큰</a:t>
+            </a:r>
+          </a:p>
+        </p:txBody>
+      </p:sp>
+      <p:sp>
+        <p:nvSpPr>
+          <p:cNvPr id="6" name="audit:hero"/>
+          <p:cNvSpPr txBox="1"/>
+          <p:nvPr/>
+        </p:nvSpPr>
+        <p:spPr>
+          <a:xfrm>
+            <a:off x="640080" y="1783080"/>
+            <a:ext cx="10881360" cy="777240"/>
+          </a:xfrm>
+          <a:prstGeom prst="rect">
+            <a:avLst/>
+          </a:prstGeom>
+          <a:noFill/>
+        </p:spPr>
+        <p:txBody>
+          <a:bodyPr wrap="square" lIns="0" rIns="0" tIns="0" bIns="0">
+            <a:spAutoFit/>
+          </a:bodyPr>
+          <a:lstStyle/>
+          <a:p>
+            <a:r>
+              <a:rPr sz="2900" b="1">
+                <a:solidFill>
+                  <a:srgbClr val="36D399"/>
+                </a:solidFill>
+                <a:latin typeface="NanumGothic"/>
+                <a:ea typeface="NanumGothic"/>
+                <a:cs typeface="NanumGothic"/>
+              </a:rPr>
+              <a:t>199.47배 (기존 환산 240.02배)</a:t>
+            </a:r>
+          </a:p>
+        </p:txBody>
+      </p:sp>
+      <p:sp>
+        <p:nvSpPr>
+          <p:cNvPr id="7" name="audit:body-0"/>
+          <p:cNvSpPr txBox="1"/>
+          <p:nvPr/>
+        </p:nvSpPr>
+        <p:spPr>
+          <a:xfrm>
+            <a:off x="777240" y="2862072"/>
+            <a:ext cx="10652760" cy="612648"/>
+          </a:xfrm>
+          <a:prstGeom prst="rect">
+            <a:avLst/>
+          </a:prstGeom>
+          <a:noFill/>
+        </p:spPr>
+        <p:txBody>
+          <a:bodyPr wrap="square" lIns="0" rIns="0" tIns="0" bIns="0">
+            <a:spAutoFit/>
+          </a:bodyPr>
+          <a:lstStyle/>
+          <a:p>
+            <a:r>
+              <a:rPr sz="1750" b="0">
+                <a:solidFill>
+                  <a:srgbClr val="ECF1F6"/>
+                </a:solidFill>
+                <a:latin typeface="NanumGothic"/>
+                <a:ea typeface="NanumGothic"/>
+                <a:cs typeface="NanumGothic"/>
+              </a:rPr>
+              <a:t>같은 문제를 조건당 6회 실행한 저장 로그 30행</a:t>
+            </a:r>
+          </a:p>
+        </p:txBody>
+      </p:sp>
+      <p:sp>
+        <p:nvSpPr>
+          <p:cNvPr id="8" name="audit:body-1"/>
+          <p:cNvSpPr txBox="1"/>
+          <p:nvPr/>
+        </p:nvSpPr>
+        <p:spPr>
+          <a:xfrm>
+            <a:off x="777240" y="3502152"/>
+            <a:ext cx="10652760" cy="612648"/>
+          </a:xfrm>
+          <a:prstGeom prst="rect">
+            <a:avLst/>
+          </a:prstGeom>
+          <a:noFill/>
+        </p:spPr>
+        <p:txBody>
+          <a:bodyPr wrap="square" lIns="0" rIns="0" tIns="0" bIns="0">
+            <a:spAutoFit/>
+          </a:bodyPr>
+          <a:lstStyle/>
+          <a:p>
+            <a:r>
+              <a:rPr sz="1750" b="0">
+                <a:solidFill>
+                  <a:srgbClr val="ECF1F6"/>
+                </a:solidFill>
+                <a:latin typeface="NanumGothic"/>
+                <a:ea typeface="NanumGothic"/>
+                <a:cs typeface="NanumGothic"/>
+              </a:rPr>
+              <a:t>사고가 난 호출에서 사고 토큰 비중 99.625%</a:t>
+            </a:r>
+          </a:p>
+        </p:txBody>
+      </p:sp>
+      <p:sp>
+        <p:nvSpPr>
+          <p:cNvPr id="9" name="audit:body-2"/>
+          <p:cNvSpPr txBox="1"/>
+          <p:nvPr/>
+        </p:nvSpPr>
+        <p:spPr>
+          <a:xfrm>
+            <a:off x="777240" y="4142231"/>
+            <a:ext cx="10652760" cy="612648"/>
+          </a:xfrm>
+          <a:prstGeom prst="rect">
+            <a:avLst/>
+          </a:prstGeom>
+          <a:noFill/>
+        </p:spPr>
+        <p:txBody>
+          <a:bodyPr wrap="square" lIns="0" rIns="0" tIns="0" bIns="0">
+            <a:spAutoFit/>
+          </a:bodyPr>
+          <a:lstStyle/>
+          <a:p>
+            <a:r>
+              <a:rPr sz="1750" b="0">
+                <a:solidFill>
+                  <a:srgbClr val="ECF1F6"/>
+                </a:solidFill>
+                <a:latin typeface="NanumGothic"/>
+                <a:ea typeface="NanumGothic"/>
+                <a:cs typeface="NanumGothic"/>
+              </a:rPr>
+              <a:t>예산을 지정하지 않으면 사실상 '무제한' — 명시적으로 정한다</a:t>
+            </a:r>
+          </a:p>
+        </p:txBody>
+      </p:sp>
+      <p:sp>
+        <p:nvSpPr>
+          <p:cNvPr id="10" name="audit:source"/>
+          <p:cNvSpPr txBox="1"/>
+          <p:nvPr/>
+        </p:nvSpPr>
+        <p:spPr>
+          <a:xfrm>
+            <a:off x="640080" y="6080760"/>
+            <a:ext cx="10972800" cy="274320"/>
+          </a:xfrm>
+          <a:prstGeom prst="rect">
+            <a:avLst/>
+          </a:prstGeom>
+          <a:noFill/>
+        </p:spPr>
+        <p:txBody>
+          <a:bodyPr wrap="square" lIns="0" rIns="0" tIns="0" bIns="0">
+            <a:spAutoFit/>
+          </a:bodyPr>
+          <a:lstStyle/>
+          <a:p>
+            <a:r>
+              <a:rPr sz="1000" b="0">
+                <a:solidFill>
+                  <a:srgbClr val="93A4B5"/>
+                </a:solidFill>
+                <a:latin typeface="NanumGothic"/>
+                <a:ea typeface="NanumGothic"/>
+                <a:cs typeface="NanumGothic"/>
+              </a:rPr>
+              <a:t>results/thinking_sweep.jsonl (30 rows)</a:t>
+            </a:r>
+          </a:p>
+        </p:txBody>
+      </p:sp>
+      <p:sp>
+        <p:nvSpPr>
+          <p:cNvPr id="11" name="audit:footer"/>
+          <p:cNvSpPr txBox="1"/>
+          <p:nvPr/>
+        </p:nvSpPr>
+        <p:spPr>
+          <a:xfrm>
+            <a:off x="640080" y="6419088"/>
+            <a:ext cx="10972800" cy="256032"/>
+          </a:xfrm>
+          <a:prstGeom prst="rect">
+            <a:avLst/>
+          </a:prstGeom>
+          <a:noFill/>
+        </p:spPr>
+        <p:txBody>
+          <a:bodyPr wrap="square" lIns="0" rIns="0" tIns="0" bIns="0">
+            <a:spAutoFit/>
+          </a:bodyPr>
+          <a:lstStyle/>
+          <a:p>
+            <a:r>
+              <a:rPr sz="1000" b="0">
+                <a:solidFill>
+                  <a:srgbClr val="93A4B5"/>
+                </a:solidFill>
+                <a:latin typeface="NanumGothic"/>
+                <a:ea typeface="NanumGothic"/>
+                <a:cs typeface="NanumGothic"/>
+              </a:rPr>
+              <a:t>2026-09-20  ·  근거와 조건을 함께 인용</a:t>
+            </a:r>
+          </a:p>
+        </p:txBody>
+      </p:sp>
+    </p:spTree>
+  </p:cSld>
+  <p:clrMapOvr>
+    <a:masterClrMapping/>
+  </p:clrMapOvr>
+</p:sld>
+</file>
+
+<file path=ppt/slides/slide12.xml><?xml version="1.0" encoding="utf-8"?>
+<p:sld xmlns:a="http://schemas.openxmlformats.org/drawingml/2006/main" xmlns:p="http://schemas.openxmlformats.org/presentationml/2006/main" xmlns:r="http://schemas.openxmlformats.org/officeDocument/2006/relationships">
+  <p:cSld>
+    <p:bg>
+      <p:bgPr>
+        <a:solidFill>
+          <a:srgbClr val="0E141B"/>
+        </a:solidFill>
+        <a:effectLst/>
+      </p:bgPr>
+    </p:bg>
+    <p:spTree>
+      <p:nvGrpSpPr>
+        <p:cNvPr id="1" name=""/>
+        <p:cNvGrpSpPr/>
+        <p:nvPr/>
+      </p:nvGrpSpPr>
+      <p:grpSpPr/>
+      <p:sp>
+        <p:nvSpPr>
+          <p:cNvPr id="2" name="Rectangle 1"/>
+          <p:cNvSpPr/>
+          <p:nvPr/>
+        </p:nvSpPr>
+        <p:spPr>
+          <a:xfrm>
+            <a:off x="0" y="0"/>
+            <a:ext cx="100584" cy="6858000"/>
+          </a:xfrm>
+          <a:prstGeom prst="rect">
+            <a:avLst/>
+          </a:prstGeom>
+          <a:solidFill>
+            <a:srgbClr val="36D399"/>
+          </a:solidFill>
+          <a:ln>
+            <a:noFill/>
+          </a:ln>
+        </p:spPr>
+        <p:style>
+          <a:lnRef idx="1">
+            <a:schemeClr val="accent1"/>
+          </a:lnRef>
+          <a:fillRef idx="3">
+            <a:schemeClr val="accent1"/>
+          </a:fillRef>
+          <a:effectRef idx="2">
+            <a:schemeClr val="accent1"/>
+          </a:effectRef>
+          <a:fontRef idx="minor">
+            <a:schemeClr val="lt1"/>
+          </a:fontRef>
+        </p:style>
+        <p:txBody>
+          <a:bodyPr rtlCol="0" anchor="ctr"/>
+          <a:lstStyle/>
+          <a:p>
+            <a:pPr algn="ctr"/>
+          </a:p>
+        </p:txBody>
+      </p:sp>
+      <p:sp>
+        <p:nvSpPr>
+          <p:cNvPr id="3" name="audit:index"/>
+          <p:cNvSpPr txBox="1"/>
+          <p:nvPr/>
+        </p:nvSpPr>
+        <p:spPr>
+          <a:xfrm>
+            <a:off x="640080" y="274320"/>
+            <a:ext cx="4572000" cy="274320"/>
+          </a:xfrm>
+          <a:prstGeom prst="rect">
+            <a:avLst/>
+          </a:prstGeom>
+          <a:noFill/>
+        </p:spPr>
+        <p:txBody>
+          <a:bodyPr wrap="square" lIns="0" rIns="0" tIns="0" bIns="0">
+            <a:spAutoFit/>
+          </a:bodyPr>
+          <a:lstStyle/>
+          <a:p>
+            <a:r>
+              <a:rPr sz="1100" b="0">
+                <a:solidFill>
+                  <a:srgbClr val="93A4B5"/>
+                </a:solidFill>
+                <a:latin typeface="NanumGothic"/>
+                <a:ea typeface="NanumGothic"/>
+                <a:cs typeface="NanumGothic"/>
+              </a:rPr>
+              <a:t>TOKEN COST LAB  /  12</a:t>
+            </a:r>
+          </a:p>
+        </p:txBody>
+      </p:sp>
+      <p:sp>
+        <p:nvSpPr>
+          <p:cNvPr id="4" name="audit:scope"/>
+          <p:cNvSpPr txBox="1"/>
+          <p:nvPr/>
+        </p:nvSpPr>
+        <p:spPr>
+          <a:xfrm>
+            <a:off x="5760720" y="274320"/>
+            <a:ext cx="5760720" cy="274320"/>
+          </a:xfrm>
+          <a:prstGeom prst="rect">
+            <a:avLst/>
+          </a:prstGeom>
+          <a:noFill/>
+        </p:spPr>
+        <p:txBody>
+          <a:bodyPr wrap="square" lIns="0" rIns="0" tIns="0" bIns="0">
+            <a:spAutoFit/>
+          </a:bodyPr>
+          <a:lstStyle/>
+          <a:p>
+            <a:r>
+              <a:rPr sz="1100" b="0">
+                <a:solidFill>
+                  <a:srgbClr val="36D399"/>
+                </a:solidFill>
+                <a:latin typeface="NanumGothic"/>
+                <a:ea typeface="NanumGothic"/>
+                <a:cs typeface="NanumGothic"/>
+              </a:rPr>
+              <a:t>저장 로그 80행 재계산</a:t>
+            </a:r>
+          </a:p>
+        </p:txBody>
+      </p:sp>
+      <p:sp>
+        <p:nvSpPr>
+          <p:cNvPr id="5" name="audit:title"/>
+          <p:cNvSpPr txBox="1"/>
+          <p:nvPr/>
+        </p:nvSpPr>
+        <p:spPr>
+          <a:xfrm>
+            <a:off x="640080" y="822960"/>
+            <a:ext cx="10881360" cy="822960"/>
+          </a:xfrm>
+          <a:prstGeom prst="rect">
+            <a:avLst/>
+          </a:prstGeom>
+          <a:noFill/>
+        </p:spPr>
+        <p:txBody>
+          <a:bodyPr wrap="square" lIns="0" rIns="0" tIns="0" bIns="0">
+            <a:spAutoFit/>
+          </a:bodyPr>
+          <a:lstStyle/>
+          <a:p>
+            <a:r>
+              <a:rPr sz="2900" b="1">
+                <a:solidFill>
+                  <a:srgbClr val="ECF1F6"/>
+                </a:solidFill>
+                <a:latin typeface="NanumGothic"/>
+                <a:ea typeface="NanumGothic"/>
+                <a:cs typeface="NanumGothic"/>
+              </a:rPr>
+              <a:t>언어별 비용은 지표마다 다르다</a:t>
+            </a:r>
+          </a:p>
+        </p:txBody>
+      </p:sp>
+      <p:sp>
+        <p:nvSpPr>
+          <p:cNvPr id="6" name="audit:hero"/>
+          <p:cNvSpPr txBox="1"/>
+          <p:nvPr/>
+        </p:nvSpPr>
+        <p:spPr>
+          <a:xfrm>
+            <a:off x="640080" y="1783080"/>
+            <a:ext cx="10881360" cy="777240"/>
+          </a:xfrm>
+          <a:prstGeom prst="rect">
+            <a:avLst/>
+          </a:prstGeom>
+          <a:noFill/>
+        </p:spPr>
+        <p:txBody>
+          <a:bodyPr wrap="square" lIns="0" rIns="0" tIns="0" bIns="0">
+            <a:spAutoFit/>
+          </a:bodyPr>
+          <a:lstStyle/>
+          <a:p>
+            <a:r>
+              <a:rPr sz="2900" b="1">
+                <a:solidFill>
+                  <a:srgbClr val="36D399"/>
+                </a:solidFill>
+                <a:latin typeface="NanumGothic"/>
+                <a:ea typeface="NanumGothic"/>
+                <a:cs typeface="NanumGothic"/>
+              </a:rPr>
+              <a:t>호출당 1.364배 · 0.729배</a:t>
+            </a:r>
+          </a:p>
+        </p:txBody>
+      </p:sp>
+      <p:sp>
+        <p:nvSpPr>
+          <p:cNvPr id="7" name="audit:body-0"/>
+          <p:cNvSpPr txBox="1"/>
+          <p:nvPr/>
+        </p:nvSpPr>
+        <p:spPr>
+          <a:xfrm>
+            <a:off x="777240" y="2862072"/>
+            <a:ext cx="10652760" cy="612648"/>
+          </a:xfrm>
+          <a:prstGeom prst="rect">
+            <a:avLst/>
+          </a:prstGeom>
+          <a:noFill/>
+        </p:spPr>
+        <p:txBody>
+          <a:bodyPr wrap="square" lIns="0" rIns="0" tIns="0" bIns="0">
+            <a:spAutoFit/>
+          </a:bodyPr>
+          <a:lstStyle/>
+          <a:p>
+            <a:r>
+              <a:rPr sz="1750" b="0">
+                <a:solidFill>
+                  <a:srgbClr val="ECF1F6"/>
+                </a:solidFill>
+                <a:latin typeface="NanumGothic"/>
+                <a:ea typeface="NanumGothic"/>
+                <a:cs typeface="NanumGothic"/>
+              </a:rPr>
+              <a:t>문자당(기존 환산 단가) 3.027배 · 1.363배</a:t>
+            </a:r>
+          </a:p>
+        </p:txBody>
+      </p:sp>
+      <p:sp>
+        <p:nvSpPr>
+          <p:cNvPr id="8" name="audit:body-1"/>
+          <p:cNvSpPr txBox="1"/>
+          <p:nvPr/>
+        </p:nvSpPr>
+        <p:spPr>
+          <a:xfrm>
+            <a:off x="777240" y="3502152"/>
+            <a:ext cx="10652760" cy="612648"/>
+          </a:xfrm>
+          <a:prstGeom prst="rect">
+            <a:avLst/>
+          </a:prstGeom>
+          <a:noFill/>
+        </p:spPr>
+        <p:txBody>
+          <a:bodyPr wrap="square" lIns="0" rIns="0" tIns="0" bIns="0">
+            <a:spAutoFit/>
+          </a:bodyPr>
+          <a:lstStyle/>
+          <a:p>
+            <a:r>
+              <a:rPr sz="1750" b="0">
+                <a:solidFill>
+                  <a:srgbClr val="ECF1F6"/>
+                </a:solidFill>
+                <a:latin typeface="NanumGothic"/>
+                <a:ea typeface="NanumGothic"/>
+                <a:cs typeface="NanumGothic"/>
+              </a:rPr>
+              <a:t>같은 과제라도 언어에 따라 생성 길이가 달라진다</a:t>
+            </a:r>
+          </a:p>
+        </p:txBody>
+      </p:sp>
+      <p:sp>
+        <p:nvSpPr>
+          <p:cNvPr id="9" name="audit:body-2"/>
+          <p:cNvSpPr txBox="1"/>
+          <p:nvPr/>
+        </p:nvSpPr>
+        <p:spPr>
+          <a:xfrm>
+            <a:off x="777240" y="4142231"/>
+            <a:ext cx="10652760" cy="612648"/>
+          </a:xfrm>
+          <a:prstGeom prst="rect">
+            <a:avLst/>
+          </a:prstGeom>
+          <a:noFill/>
+        </p:spPr>
+        <p:txBody>
+          <a:bodyPr wrap="square" lIns="0" rIns="0" tIns="0" bIns="0">
+            <a:spAutoFit/>
+          </a:bodyPr>
+          <a:lstStyle/>
+          <a:p>
+            <a:r>
+              <a:rPr sz="1750" b="0">
+                <a:solidFill>
+                  <a:srgbClr val="ECF1F6"/>
+                </a:solidFill>
+                <a:latin typeface="NanumGothic"/>
+                <a:ea typeface="NanumGothic"/>
+                <a:cs typeface="NanumGothic"/>
+              </a:rPr>
+              <a:t>지표를 섞으면 결론이 뒤집힌다</a:t>
+            </a:r>
+          </a:p>
+        </p:txBody>
+      </p:sp>
+      <p:sp>
+        <p:nvSpPr>
+          <p:cNvPr id="10" name="audit:source"/>
+          <p:cNvSpPr txBox="1"/>
+          <p:nvPr/>
+        </p:nvSpPr>
+        <p:spPr>
+          <a:xfrm>
+            <a:off x="640080" y="6080760"/>
+            <a:ext cx="10972800" cy="274320"/>
+          </a:xfrm>
+          <a:prstGeom prst="rect">
+            <a:avLst/>
+          </a:prstGeom>
+          <a:noFill/>
+        </p:spPr>
+        <p:txBody>
+          <a:bodyPr wrap="square" lIns="0" rIns="0" tIns="0" bIns="0">
+            <a:spAutoFit/>
+          </a:bodyPr>
+          <a:lstStyle/>
+          <a:p>
+            <a:r>
+              <a:rPr sz="1000" b="0">
+                <a:solidFill>
+                  <a:srgbClr val="93A4B5"/>
+                </a:solidFill>
+                <a:latin typeface="NanumGothic"/>
+                <a:ea typeface="NanumGothic"/>
+                <a:cs typeface="NanumGothic"/>
+              </a:rPr>
+              <a:t>tools/stats_test.py · storage logs</a:t>
+            </a:r>
+          </a:p>
+        </p:txBody>
+      </p:sp>
+      <p:sp>
+        <p:nvSpPr>
+          <p:cNvPr id="11" name="audit:footer"/>
+          <p:cNvSpPr txBox="1"/>
+          <p:nvPr/>
+        </p:nvSpPr>
+        <p:spPr>
+          <a:xfrm>
+            <a:off x="640080" y="6419088"/>
+            <a:ext cx="10972800" cy="256032"/>
+          </a:xfrm>
+          <a:prstGeom prst="rect">
+            <a:avLst/>
+          </a:prstGeom>
+          <a:noFill/>
+        </p:spPr>
+        <p:txBody>
+          <a:bodyPr wrap="square" lIns="0" rIns="0" tIns="0" bIns="0">
+            <a:spAutoFit/>
+          </a:bodyPr>
+          <a:lstStyle/>
+          <a:p>
+            <a:r>
+              <a:rPr sz="1000" b="0">
+                <a:solidFill>
+                  <a:srgbClr val="93A4B5"/>
+                </a:solidFill>
+                <a:latin typeface="NanumGothic"/>
+                <a:ea typeface="NanumGothic"/>
+                <a:cs typeface="NanumGothic"/>
+              </a:rPr>
+              <a:t>2026-09-20  ·  근거와 조건을 함께 인용</a:t>
+            </a:r>
+          </a:p>
+        </p:txBody>
+      </p:sp>
+    </p:spTree>
+  </p:cSld>
+  <p:clrMapOvr>
+    <a:masterClrMapping/>
+  </p:clrMapOvr>
+</p:sld>
+</file>
+
+<file path=ppt/slides/slide13.xml><?xml version="1.0" encoding="utf-8"?>
+<p:sld xmlns:a="http://schemas.openxmlformats.org/drawingml/2006/main" xmlns:p="http://schemas.openxmlformats.org/presentationml/2006/main" xmlns:r="http://schemas.openxmlformats.org/officeDocument/2006/relationships">
+  <p:cSld>
+    <p:bg>
+      <p:bgPr>
+        <a:solidFill>
+          <a:srgbClr val="0E141B"/>
+        </a:solidFill>
+        <a:effectLst/>
+      </p:bgPr>
+    </p:bg>
+    <p:spTree>
+      <p:nvGrpSpPr>
+        <p:cNvPr id="1" name=""/>
+        <p:cNvGrpSpPr/>
+        <p:nvPr/>
+      </p:nvGrpSpPr>
+      <p:grpSpPr/>
+      <p:sp>
+        <p:nvSpPr>
+          <p:cNvPr id="2" name="Rectangle 1"/>
+          <p:cNvSpPr/>
+          <p:nvPr/>
+        </p:nvSpPr>
+        <p:spPr>
+          <a:xfrm>
+            <a:off x="0" y="0"/>
+            <a:ext cx="100584" cy="6858000"/>
+          </a:xfrm>
+          <a:prstGeom prst="rect">
+            <a:avLst/>
+          </a:prstGeom>
+          <a:solidFill>
+            <a:srgbClr val="36D399"/>
+          </a:solidFill>
+          <a:ln>
+            <a:noFill/>
+          </a:ln>
+        </p:spPr>
+        <p:style>
+          <a:lnRef idx="1">
+            <a:schemeClr val="accent1"/>
+          </a:lnRef>
+          <a:fillRef idx="3">
+            <a:schemeClr val="accent1"/>
+          </a:fillRef>
+          <a:effectRef idx="2">
+            <a:schemeClr val="accent1"/>
+          </a:effectRef>
+          <a:fontRef idx="minor">
+            <a:schemeClr val="lt1"/>
+          </a:fontRef>
+        </p:style>
+        <p:txBody>
+          <a:bodyPr rtlCol="0" anchor="ctr"/>
+          <a:lstStyle/>
+          <a:p>
+            <a:pPr algn="ctr"/>
+          </a:p>
+        </p:txBody>
+      </p:sp>
+      <p:sp>
+        <p:nvSpPr>
+          <p:cNvPr id="3" name="audit:index"/>
+          <p:cNvSpPr txBox="1"/>
+          <p:nvPr/>
+        </p:nvSpPr>
+        <p:spPr>
+          <a:xfrm>
+            <a:off x="640080" y="274320"/>
+            <a:ext cx="4572000" cy="274320"/>
+          </a:xfrm>
+          <a:prstGeom prst="rect">
+            <a:avLst/>
+          </a:prstGeom>
+          <a:noFill/>
+        </p:spPr>
+        <p:txBody>
+          <a:bodyPr wrap="square" lIns="0" rIns="0" tIns="0" bIns="0">
+            <a:spAutoFit/>
+          </a:bodyPr>
+          <a:lstStyle/>
+          <a:p>
+            <a:r>
+              <a:rPr sz="1100" b="0">
+                <a:solidFill>
+                  <a:srgbClr val="93A4B5"/>
+                </a:solidFill>
+                <a:latin typeface="NanumGothic"/>
+                <a:ea typeface="NanumGothic"/>
+                <a:cs typeface="NanumGothic"/>
+              </a:rPr>
+              <a:t>TOKEN COST LAB  /  13</a:t>
+            </a:r>
+          </a:p>
+        </p:txBody>
+      </p:sp>
+      <p:sp>
+        <p:nvSpPr>
+          <p:cNvPr id="4" name="audit:scope"/>
+          <p:cNvSpPr txBox="1"/>
+          <p:nvPr/>
+        </p:nvSpPr>
+        <p:spPr>
+          <a:xfrm>
+            <a:off x="5760720" y="274320"/>
+            <a:ext cx="5760720" cy="274320"/>
+          </a:xfrm>
+          <a:prstGeom prst="rect">
+            <a:avLst/>
+          </a:prstGeom>
+          <a:noFill/>
+        </p:spPr>
+        <p:txBody>
+          <a:bodyPr wrap="square" lIns="0" rIns="0" tIns="0" bIns="0">
+            <a:spAutoFit/>
+          </a:bodyPr>
+          <a:lstStyle/>
+          <a:p>
+            <a:r>
+              <a:rPr sz="1100" b="0">
+                <a:solidFill>
+                  <a:srgbClr val="36D399"/>
+                </a:solidFill>
+                <a:latin typeface="NanumGothic"/>
+                <a:ea typeface="NanumGothic"/>
+                <a:cs typeface="NanumGothic"/>
+              </a:rPr>
+              <a:t>운영 주의</a:t>
+            </a:r>
+          </a:p>
+        </p:txBody>
+      </p:sp>
+      <p:sp>
+        <p:nvSpPr>
+          <p:cNvPr id="5" name="audit:title"/>
+          <p:cNvSpPr txBox="1"/>
+          <p:nvPr/>
+        </p:nvSpPr>
+        <p:spPr>
+          <a:xfrm>
+            <a:off x="640080" y="822960"/>
+            <a:ext cx="10881360" cy="822960"/>
+          </a:xfrm>
+          <a:prstGeom prst="rect">
+            <a:avLst/>
+          </a:prstGeom>
+          <a:noFill/>
+        </p:spPr>
+        <p:txBody>
+          <a:bodyPr wrap="square" lIns="0" rIns="0" tIns="0" bIns="0">
+            <a:spAutoFit/>
+          </a:bodyPr>
+          <a:lstStyle/>
+          <a:p>
+            <a:r>
+              <a:rPr sz="2900" b="1">
+                <a:solidFill>
+                  <a:srgbClr val="ECF1F6"/>
+                </a:solidFill>
+                <a:latin typeface="NanumGothic"/>
+                <a:ea typeface="NanumGothic"/>
+                <a:cs typeface="NanumGothic"/>
+              </a:rPr>
+              <a:t>캐싱과 개인정보</a:t>
+            </a:r>
+          </a:p>
+        </p:txBody>
+      </p:sp>
+      <p:sp>
+        <p:nvSpPr>
+          <p:cNvPr id="6" name="audit:hero"/>
+          <p:cNvSpPr txBox="1"/>
+          <p:nvPr/>
+        </p:nvSpPr>
+        <p:spPr>
+          <a:xfrm>
+            <a:off x="640080" y="1783080"/>
+            <a:ext cx="10881360" cy="777240"/>
+          </a:xfrm>
+          <a:prstGeom prst="rect">
+            <a:avLst/>
+          </a:prstGeom>
+          <a:noFill/>
+        </p:spPr>
+        <p:txBody>
+          <a:bodyPr wrap="square" lIns="0" rIns="0" tIns="0" bIns="0">
+            <a:spAutoFit/>
+          </a:bodyPr>
+          <a:lstStyle/>
+          <a:p>
+            <a:r>
+              <a:rPr sz="2900" b="1">
+                <a:solidFill>
+                  <a:srgbClr val="36D399"/>
+                </a:solidFill>
+                <a:latin typeface="NanumGothic"/>
+                <a:ea typeface="NanumGothic"/>
+                <a:cs typeface="NanumGothic"/>
+              </a:rPr>
+              <a:t>개인화 · 실시간 응답은 캐싱 금지</a:t>
+            </a:r>
+          </a:p>
+        </p:txBody>
+      </p:sp>
+      <p:sp>
+        <p:nvSpPr>
+          <p:cNvPr id="7" name="audit:body-0"/>
+          <p:cNvSpPr txBox="1"/>
+          <p:nvPr/>
+        </p:nvSpPr>
+        <p:spPr>
+          <a:xfrm>
+            <a:off x="777240" y="2862072"/>
+            <a:ext cx="10652760" cy="612648"/>
+          </a:xfrm>
+          <a:prstGeom prst="rect">
+            <a:avLst/>
+          </a:prstGeom>
+          <a:noFill/>
+        </p:spPr>
+        <p:txBody>
+          <a:bodyPr wrap="square" lIns="0" rIns="0" tIns="0" bIns="0">
+            <a:spAutoFit/>
+          </a:bodyPr>
+          <a:lstStyle/>
+          <a:p>
+            <a:r>
+              <a:rPr sz="1750" b="0">
+                <a:solidFill>
+                  <a:srgbClr val="ECF1F6"/>
+                </a:solidFill>
+                <a:latin typeface="NanumGothic"/>
+                <a:ea typeface="NanumGothic"/>
+                <a:cs typeface="NanumGothic"/>
+              </a:rPr>
+              <a:t>멀티턴은 캐시 키에 컨텍스트를 포함</a:t>
+            </a:r>
+          </a:p>
+        </p:txBody>
+      </p:sp>
+      <p:sp>
+        <p:nvSpPr>
+          <p:cNvPr id="8" name="audit:body-1"/>
+          <p:cNvSpPr txBox="1"/>
+          <p:nvPr/>
+        </p:nvSpPr>
+        <p:spPr>
+          <a:xfrm>
+            <a:off x="777240" y="3502152"/>
+            <a:ext cx="10652760" cy="612648"/>
+          </a:xfrm>
+          <a:prstGeom prst="rect">
+            <a:avLst/>
+          </a:prstGeom>
+          <a:noFill/>
+        </p:spPr>
+        <p:txBody>
+          <a:bodyPr wrap="square" lIns="0" rIns="0" tIns="0" bIns="0">
+            <a:spAutoFit/>
+          </a:bodyPr>
+          <a:lstStyle/>
+          <a:p>
+            <a:r>
+              <a:rPr sz="1750" b="0">
+                <a:solidFill>
+                  <a:srgbClr val="ECF1F6"/>
+                </a:solidFill>
+                <a:latin typeface="NanumGothic"/>
+                <a:ea typeface="NanumGothic"/>
+                <a:cs typeface="NanumGothic"/>
+              </a:rPr>
+              <a:t>시맨틱 캐시 임계값이 느슨하면 '비슷하지만 틀린 답'을 준다</a:t>
+            </a:r>
+          </a:p>
+        </p:txBody>
+      </p:sp>
+      <p:sp>
+        <p:nvSpPr>
+          <p:cNvPr id="9" name="audit:body-2"/>
+          <p:cNvSpPr txBox="1"/>
+          <p:nvPr/>
+        </p:nvSpPr>
+        <p:spPr>
+          <a:xfrm>
+            <a:off x="777240" y="4142231"/>
+            <a:ext cx="10652760" cy="612648"/>
+          </a:xfrm>
+          <a:prstGeom prst="rect">
+            <a:avLst/>
+          </a:prstGeom>
+          <a:noFill/>
+        </p:spPr>
+        <p:txBody>
+          <a:bodyPr wrap="square" lIns="0" rIns="0" tIns="0" bIns="0">
+            <a:spAutoFit/>
+          </a:bodyPr>
+          <a:lstStyle/>
+          <a:p>
+            <a:r>
+              <a:rPr sz="1750" b="0">
+                <a:solidFill>
+                  <a:srgbClr val="ECF1F6"/>
+                </a:solidFill>
+                <a:latin typeface="NanumGothic"/>
+                <a:ea typeface="NanumGothic"/>
+                <a:cs typeface="NanumGothic"/>
+              </a:rPr>
+              <a:t>삭제·TTL 정책을 프롬프트 설계와 함께 정한다</a:t>
+            </a:r>
+          </a:p>
+        </p:txBody>
+      </p:sp>
+      <p:sp>
+        <p:nvSpPr>
+          <p:cNvPr id="10" name="audit:source"/>
+          <p:cNvSpPr txBox="1"/>
+          <p:nvPr/>
+        </p:nvSpPr>
+        <p:spPr>
+          <a:xfrm>
+            <a:off x="640080" y="6080760"/>
+            <a:ext cx="10972800" cy="274320"/>
+          </a:xfrm>
+          <a:prstGeom prst="rect">
+            <a:avLst/>
+          </a:prstGeom>
+          <a:noFill/>
+        </p:spPr>
+        <p:txBody>
+          <a:bodyPr wrap="square" lIns="0" rIns="0" tIns="0" bIns="0">
+            <a:spAutoFit/>
+          </a:bodyPr>
+          <a:lstStyle/>
+          <a:p>
+            <a:r>
+              <a:rPr sz="1000" b="0">
+                <a:solidFill>
+                  <a:srgbClr val="93A4B5"/>
+                </a:solidFill>
+                <a:latin typeface="NanumGothic"/>
+                <a:ea typeface="NanumGothic"/>
+                <a:cs typeface="NanumGothic"/>
+              </a:rPr>
+              <a:t>experiments/exp06_other_levers.py</a:t>
+            </a:r>
+          </a:p>
+        </p:txBody>
+      </p:sp>
+      <p:sp>
+        <p:nvSpPr>
+          <p:cNvPr id="11" name="audit:footer"/>
+          <p:cNvSpPr txBox="1"/>
+          <p:nvPr/>
+        </p:nvSpPr>
+        <p:spPr>
+          <a:xfrm>
+            <a:off x="640080" y="6419088"/>
+            <a:ext cx="10972800" cy="256032"/>
+          </a:xfrm>
+          <a:prstGeom prst="rect">
+            <a:avLst/>
+          </a:prstGeom>
+          <a:noFill/>
+        </p:spPr>
+        <p:txBody>
+          <a:bodyPr wrap="square" lIns="0" rIns="0" tIns="0" bIns="0">
+            <a:spAutoFit/>
+          </a:bodyPr>
+          <a:lstStyle/>
+          <a:p>
+            <a:r>
+              <a:rPr sz="1000" b="0">
+                <a:solidFill>
+                  <a:srgbClr val="93A4B5"/>
+                </a:solidFill>
+                <a:latin typeface="NanumGothic"/>
+                <a:ea typeface="NanumGothic"/>
+                <a:cs typeface="NanumGothic"/>
+              </a:rPr>
+              <a:t>2026-09-20  ·  근거와 조건을 함께 인용</a:t>
+            </a:r>
+          </a:p>
+        </p:txBody>
+      </p:sp>
+    </p:spTree>
+  </p:cSld>
+  <p:clrMapOvr>
+    <a:masterClrMapping/>
+  </p:clrMapOvr>
+</p:sld>
+</file>
+
+<file path=ppt/slides/slide14.xml><?xml version="1.0" encoding="utf-8"?>
+<p:sld xmlns:a="http://schemas.openxmlformats.org/drawingml/2006/main" xmlns:p="http://schemas.openxmlformats.org/presentationml/2006/main" xmlns:r="http://schemas.openxmlformats.org/officeDocument/2006/relationships">
+  <p:cSld>
+    <p:bg>
+      <p:bgPr>
+        <a:solidFill>
+          <a:srgbClr val="0E141B"/>
+        </a:solidFill>
+        <a:effectLst/>
+      </p:bgPr>
+    </p:bg>
+    <p:spTree>
+      <p:nvGrpSpPr>
+        <p:cNvPr id="1" name=""/>
+        <p:cNvGrpSpPr/>
+        <p:nvPr/>
+      </p:nvGrpSpPr>
+      <p:grpSpPr/>
+      <p:sp>
+        <p:nvSpPr>
+          <p:cNvPr id="2" name="Rectangle 1"/>
+          <p:cNvSpPr/>
+          <p:nvPr/>
+        </p:nvSpPr>
+        <p:spPr>
+          <a:xfrm>
+            <a:off x="0" y="0"/>
+            <a:ext cx="100584" cy="6858000"/>
+          </a:xfrm>
+          <a:prstGeom prst="rect">
+            <a:avLst/>
+          </a:prstGeom>
+          <a:solidFill>
+            <a:srgbClr val="36D399"/>
+          </a:solidFill>
+          <a:ln>
+            <a:noFill/>
+          </a:ln>
+        </p:spPr>
+        <p:style>
+          <a:lnRef idx="1">
+            <a:schemeClr val="accent1"/>
+          </a:lnRef>
+          <a:fillRef idx="3">
+            <a:schemeClr val="accent1"/>
+          </a:fillRef>
+          <a:effectRef idx="2">
+            <a:schemeClr val="accent1"/>
+          </a:effectRef>
+          <a:fontRef idx="minor">
+            <a:schemeClr val="lt1"/>
+          </a:fontRef>
+        </p:style>
+        <p:txBody>
+          <a:bodyPr rtlCol="0" anchor="ctr"/>
+          <a:lstStyle/>
+          <a:p>
+            <a:pPr algn="ctr"/>
+          </a:p>
+        </p:txBody>
+      </p:sp>
+      <p:sp>
+        <p:nvSpPr>
+          <p:cNvPr id="3" name="audit:index"/>
+          <p:cNvSpPr txBox="1"/>
+          <p:nvPr/>
+        </p:nvSpPr>
+        <p:spPr>
+          <a:xfrm>
+            <a:off x="640080" y="274320"/>
+            <a:ext cx="4572000" cy="274320"/>
+          </a:xfrm>
+          <a:prstGeom prst="rect">
+            <a:avLst/>
+          </a:prstGeom>
+          <a:noFill/>
+        </p:spPr>
+        <p:txBody>
+          <a:bodyPr wrap="square" lIns="0" rIns="0" tIns="0" bIns="0">
+            <a:spAutoFit/>
+          </a:bodyPr>
+          <a:lstStyle/>
+          <a:p>
+            <a:r>
+              <a:rPr sz="1100" b="0">
+                <a:solidFill>
+                  <a:srgbClr val="93A4B5"/>
+                </a:solidFill>
+                <a:latin typeface="NanumGothic"/>
+                <a:ea typeface="NanumGothic"/>
+                <a:cs typeface="NanumGothic"/>
+              </a:rPr>
+              <a:t>TOKEN COST LAB  /  14</a:t>
+            </a:r>
+          </a:p>
+        </p:txBody>
+      </p:sp>
+      <p:sp>
+        <p:nvSpPr>
+          <p:cNvPr id="4" name="audit:scope"/>
+          <p:cNvSpPr txBox="1"/>
+          <p:nvPr/>
+        </p:nvSpPr>
+        <p:spPr>
+          <a:xfrm>
+            <a:off x="5760720" y="274320"/>
+            <a:ext cx="5760720" cy="274320"/>
+          </a:xfrm>
+          <a:prstGeom prst="rect">
+            <a:avLst/>
+          </a:prstGeom>
+          <a:noFill/>
+        </p:spPr>
+        <p:txBody>
+          <a:bodyPr wrap="square" lIns="0" rIns="0" tIns="0" bIns="0">
+            <a:spAutoFit/>
+          </a:bodyPr>
+          <a:lstStyle/>
+          <a:p>
+            <a:r>
+              <a:rPr sz="1100" b="0">
+                <a:solidFill>
+                  <a:srgbClr val="36D399"/>
+                </a:solidFill>
+                <a:latin typeface="NanumGothic"/>
+                <a:ea typeface="NanumGothic"/>
+                <a:cs typeface="NanumGothic"/>
+              </a:rPr>
               <a:t>마무리</a:t>
             </a:r>
           </a:p>
@@ -5256,7 +7216,7 @@
                 <a:ea typeface="NanumGothic"/>
                 <a:cs typeface="NanumGothic"/>
               </a:rPr>
-              <a:t>비용 시나리오</a:t>
+              <a:t>비용 시나리오 (100콜)</a:t>
             </a:r>
           </a:p>
         </p:txBody>
@@ -5292,7 +7252,7 @@
                 <a:ea typeface="NanumGothic"/>
                 <a:cs typeface="NanumGothic"/>
               </a:rPr>
-              <a:t>캐시를 깨는 한 줄</a:t>
+              <a:t>캐싱 · 오늘 바로 켤 수 있는 레버</a:t>
             </a:r>
           </a:p>
         </p:txBody>
@@ -5328,7 +7288,7 @@
                 <a:ea typeface="NanumGothic"/>
                 <a:cs typeface="NanumGothic"/>
               </a:rPr>
-              <a:t>$10.05 (17.5% 더 지출)</a:t>
+              <a:t>$8.55 → $3.22 (62.4% 절감)</a:t>
             </a:r>
           </a:p>
         </p:txBody>
@@ -5364,7 +7324,7 @@
                 <a:ea typeface="NanumGothic"/>
                 <a:cs typeface="NanumGothic"/>
               </a:rPr>
-              <a:t>맨 앞의 타임스탬프·요청 ID는 매번 미스로 만든다</a:t>
+              <a:t>쓰기 프리미엄은 두 번째 호출에서 회수된다</a:t>
             </a:r>
           </a:p>
         </p:txBody>
@@ -5400,7 +7360,7 @@
                 <a:ea typeface="NanumGothic"/>
                 <a:cs typeface="NanumGothic"/>
               </a:rPr>
-              <a:t>변하는 값은 반드시 뒤로 보낸다</a:t>
+              <a:t>고정 블록(시스템 · 툴 정의 · 규약)을 맨 앞으로 모은다</a:t>
             </a:r>
           </a:p>
         </p:txBody>
@@ -5436,7 +7396,7 @@
                 <a:ea typeface="NanumGothic"/>
                 <a:cs typeface="NanumGothic"/>
               </a:rPr>
-              <a:t>미스 상태의 캐싱은 안 쓰느니만 못하다</a:t>
+              <a:t>최소 길이를 확인한다 — Haiku 4.5는 4,096토큰</a:t>
             </a:r>
           </a:p>
         </p:txBody>
@@ -5685,7 +7645,7 @@
                 <a:ea typeface="NanumGothic"/>
                 <a:cs typeface="NanumGothic"/>
               </a:rPr>
-              <a:t>압축과 캐싱은 대체재가 아니다</a:t>
+              <a:t>캐시를 깨는 한 줄</a:t>
             </a:r>
           </a:p>
         </p:txBody>
@@ -5721,7 +7681,7 @@
                 <a:ea typeface="NanumGothic"/>
                 <a:cs typeface="NanumGothic"/>
               </a:rPr>
-              <a:t>$0.4014 → $0.2007 (94% 절감)</a:t>
+              <a:t>$10.05 (17.5% 더 지출)</a:t>
             </a:r>
           </a:p>
         </p:txBody>
@@ -5757,7 +7717,7 @@
                 <a:ea typeface="NanumGothic"/>
                 <a:cs typeface="NanumGothic"/>
               </a:rPr>
-              <a:t>그냥 캐싱 $0.4014 vs 절반 요약 $1.8000</a:t>
+              <a:t>맨 앞의 타임스탬프·요청 ID는 매번 미스로 만든다</a:t>
             </a:r>
           </a:p>
         </p:txBody>
@@ -5793,7 +7753,7 @@
                 <a:ea typeface="NanumGothic"/>
                 <a:cs typeface="NanumGothic"/>
               </a:rPr>
-              <a:t>지울 수 있는 반복은 지우고, 지울 수 없는 반복은 고정해 캐시에 태운다</a:t>
+              <a:t>변하는 값은 반드시 뒤로 보낸다</a:t>
             </a:r>
           </a:p>
         </p:txBody>
@@ -5829,7 +7789,7 @@
                 <a:ea typeface="NanumGothic"/>
                 <a:cs typeface="NanumGothic"/>
               </a:rPr>
-              <a:t>압축률이 높을수록 조합의 이득도 커진다</a:t>
+              <a:t>미스 상태의 캐싱은 안 쓰느니만 못하다</a:t>
             </a:r>
           </a:p>
         </p:txBody>
@@ -5865,7 +7825,7 @@
                 <a:ea typeface="NanumGothic"/>
                 <a:cs typeface="NanumGothic"/>
               </a:rPr>
-              <a:t>experiments/exp09_dry.py</a:t>
+              <a:t>experiments/exp03_prompt_caching.py</a:t>
             </a:r>
           </a:p>
         </p:txBody>
@@ -6042,7 +8002,7 @@
                 <a:ea typeface="NanumGothic"/>
                 <a:cs typeface="NanumGothic"/>
               </a:rPr>
-              <a:t>비용 시나리오</a:t>
+              <a:t>비용 시나리오 (100콜)</a:t>
             </a:r>
           </a:p>
         </p:txBody>
@@ -6055,7 +8015,7 @@
         </p:nvSpPr>
         <p:spPr>
           <a:xfrm>
-            <a:off x="640080" y="822960"/>
+            <a:off x="640080" y="566928"/>
             <a:ext cx="10881360" cy="822960"/>
           </a:xfrm>
           <a:prstGeom prst="rect">
@@ -6078,7 +8038,7 @@
                 <a:ea typeface="NanumGothic"/>
                 <a:cs typeface="NanumGothic"/>
               </a:rPr>
-              <a:t>긴 세션은 컴팩션으로 접는다</a:t>
+              <a:t>캐시는 조건이 맞을 때만 이득</a:t>
             </a:r>
           </a:p>
         </p:txBody>
@@ -6091,7 +8051,7 @@
         </p:nvSpPr>
         <p:spPr>
           <a:xfrm>
-            <a:off x="640080" y="1783080"/>
+            <a:off x="640080" y="1261872"/>
             <a:ext cx="10881360" cy="777240"/>
           </a:xfrm>
           <a:prstGeom prst="rect">
@@ -6114,7 +8074,7 @@
                 <a:ea typeface="NanumGothic"/>
                 <a:cs typeface="NanumGothic"/>
               </a:rPr>
-              <a:t>$2.32 → $0.93 (60% 절감)</a:t>
+              <a:t>$8.55 → $3.219 (-62%)</a:t>
             </a:r>
           </a:p>
         </p:txBody>
@@ -6127,7 +8087,7 @@
         </p:nvSpPr>
         <p:spPr>
           <a:xfrm>
-            <a:off x="777240" y="2862072"/>
+            <a:off x="777240" y="2029968"/>
             <a:ext cx="10652760" cy="612648"/>
           </a:xfrm>
           <a:prstGeom prst="rect">
@@ -6150,7 +8110,7 @@
                 <a:ea typeface="NanumGothic"/>
                 <a:cs typeface="NanumGothic"/>
               </a:rPr>
-              <a:t>10턴마다 접으면 $1.23 (47% 절감)</a:t>
+              <a:t>프리픽스를 매번 바꾸면 $10.05 (+17.5%)</a:t>
             </a:r>
           </a:p>
         </p:txBody>
@@ -6163,7 +8123,7 @@
         </p:nvSpPr>
         <p:spPr>
           <a:xfrm>
-            <a:off x="777240" y="3502152"/>
+            <a:off x="777240" y="2542032"/>
             <a:ext cx="10652760" cy="612648"/>
           </a:xfrm>
           <a:prstGeom prst="rect">
@@ -6186,56 +8146,80 @@
                 <a:ea typeface="NanumGothic"/>
                 <a:cs typeface="NanumGothic"/>
               </a:rPr>
-              <a:t>너무 자주 접으면 요약 호출이 이득을 먹는다</a:t>
-            </a:r>
-          </a:p>
-        </p:txBody>
-      </p:sp>
-      <p:sp>
-        <p:nvSpPr>
-          <p:cNvPr id="9" name="audit:body-2"/>
-          <p:cNvSpPr txBox="1"/>
-          <p:nvPr/>
-        </p:nvSpPr>
-        <p:spPr>
-          <a:xfrm>
-            <a:off x="777240" y="4142231"/>
-            <a:ext cx="10652760" cy="612648"/>
-          </a:xfrm>
-          <a:prstGeom prst="rect">
-            <a:avLst/>
-          </a:prstGeom>
-          <a:noFill/>
-        </p:spPr>
-        <p:txBody>
-          <a:bodyPr wrap="square" lIns="0" rIns="0" tIns="0" bIns="0">
-            <a:spAutoFit/>
-          </a:bodyPr>
-          <a:lstStyle/>
-          <a:p>
-            <a:r>
-              <a:rPr sz="1750" b="0">
-                <a:solidFill>
-                  <a:srgbClr val="ECF1F6"/>
-                </a:solidFill>
-                <a:latin typeface="NanumGothic"/>
-                <a:ea typeface="NanumGothic"/>
-                <a:cs typeface="NanumGothic"/>
-              </a:rPr>
-              <a:t>최적 주기는 세션 길이와 요약 비용으로 정해진다</a:t>
-            </a:r>
-          </a:p>
-        </p:txBody>
-      </p:sp>
-      <p:sp>
-        <p:nvSpPr>
-          <p:cNvPr id="10" name="audit:source"/>
-          <p:cNvSpPr txBox="1"/>
-          <p:nvPr/>
-        </p:nvSpPr>
-        <p:spPr>
-          <a:xfrm>
-            <a:off x="640080" y="6080760"/>
+              <a:t>고정 블록을 앞으로 모아 적중률을 올린다</a:t>
+            </a:r>
+          </a:p>
+        </p:txBody>
+      </p:sp>
+      <p:pic>
+        <p:nvPicPr>
+          <p:cNvPr id="9" name="Picture 8" descr="cache.png"/>
+          <p:cNvPicPr>
+            <a:picLocks noChangeAspect="1"/>
+          </p:cNvPicPr>
+          <p:nvPr/>
+        </p:nvPicPr>
+        <p:blipFill>
+          <a:blip r:embed="rId2"/>
+          <a:stretch>
+            <a:fillRect/>
+          </a:stretch>
+        </p:blipFill>
+        <p:spPr>
+          <a:xfrm>
+            <a:off x="777240" y="3101593"/>
+            <a:ext cx="10652760" cy="2959100"/>
+          </a:xfrm>
+          <a:prstGeom prst="rect">
+            <a:avLst/>
+          </a:prstGeom>
+        </p:spPr>
+      </p:pic>
+      <p:sp>
+        <p:nvSpPr>
+          <p:cNvPr id="10" name="audit:chart-caption"/>
+          <p:cNvSpPr txBox="1"/>
+          <p:nvPr/>
+        </p:nvSpPr>
+        <p:spPr>
+          <a:xfrm>
+            <a:off x="777240" y="6135624"/>
+            <a:ext cx="10652760" cy="237744"/>
+          </a:xfrm>
+          <a:prstGeom prst="rect">
+            <a:avLst/>
+          </a:prstGeom>
+          <a:noFill/>
+        </p:spPr>
+        <p:txBody>
+          <a:bodyPr wrap="square" lIns="0" rIns="0" tIns="0" bIns="0">
+            <a:spAutoFit/>
+          </a:bodyPr>
+          <a:lstStyle/>
+          <a:p>
+            <a:r>
+              <a:rPr sz="950" b="0">
+                <a:solidFill>
+                  <a:srgbClr val="93A4B5"/>
+                </a:solidFill>
+                <a:latin typeface="NanumGothic"/>
+                <a:ea typeface="NanumGothic"/>
+                <a:cs typeface="NanumGothic"/>
+              </a:rPr>
+              <a:t>그래프 · 100콜 비용 (USD) · cache.png</a:t>
+            </a:r>
+          </a:p>
+        </p:txBody>
+      </p:sp>
+      <p:sp>
+        <p:nvSpPr>
+          <p:cNvPr id="11" name="audit:source"/>
+          <p:cNvSpPr txBox="1"/>
+          <p:nvPr/>
+        </p:nvSpPr>
+        <p:spPr>
+          <a:xfrm>
+            <a:off x="777240" y="6382512"/>
             <a:ext cx="10972800" cy="274320"/>
           </a:xfrm>
           <a:prstGeom prst="rect">
@@ -6258,20 +8242,20 @@
                 <a:ea typeface="NanumGothic"/>
                 <a:cs typeface="NanumGothic"/>
               </a:rPr>
-              <a:t>experiments/exp04_agent_loop_sdd.py</a:t>
-            </a:r>
-          </a:p>
-        </p:txBody>
-      </p:sp>
-      <p:sp>
-        <p:nvSpPr>
-          <p:cNvPr id="11" name="audit:footer"/>
-          <p:cNvSpPr txBox="1"/>
-          <p:nvPr/>
-        </p:nvSpPr>
-        <p:spPr>
-          <a:xfrm>
-            <a:off x="640080" y="6419088"/>
+              <a:t>experiments/exp03_prompt_caching.py</a:t>
+            </a:r>
+          </a:p>
+        </p:txBody>
+      </p:sp>
+      <p:sp>
+        <p:nvSpPr>
+          <p:cNvPr id="12" name="audit:footer"/>
+          <p:cNvSpPr txBox="1"/>
+          <p:nvPr/>
+        </p:nvSpPr>
+        <p:spPr>
+          <a:xfrm>
+            <a:off x="777240" y="6583680"/>
             <a:ext cx="10972800" cy="256032"/>
           </a:xfrm>
           <a:prstGeom prst="rect">
@@ -6435,7 +8419,7 @@
                 <a:ea typeface="NanumGothic"/>
                 <a:cs typeface="NanumGothic"/>
               </a:rPr>
-              <a:t>전체 시스템 비용 시나리오</a:t>
+              <a:t>비용 시나리오</a:t>
             </a:r>
           </a:p>
         </p:txBody>
@@ -6471,7 +8455,7 @@
                 <a:ea typeface="NanumGothic"/>
                 <a:cs typeface="NanumGothic"/>
               </a:rPr>
-              <a:t>툴 출력과 서브에이전트는 전체 비용으로 본다</a:t>
+              <a:t>압축과 캐싱은 대체재가 아니다</a:t>
             </a:r>
           </a:p>
         </p:txBody>
@@ -6507,7 +8491,7 @@
                 <a:ea typeface="NanumGothic"/>
                 <a:cs typeface="NanumGothic"/>
               </a:rPr>
-              <a:t>$5.6010 → $2.7360</a:t>
+              <a:t>$0.4014 → $0.2007 (94% 절감)</a:t>
             </a:r>
           </a:p>
         </p:txBody>
@@ -6543,7 +8527,7 @@
                 <a:ea typeface="NanumGothic"/>
                 <a:cs typeface="NanumGothic"/>
               </a:rPr>
-              <a:t>툴 읽기 누적 전송 1,680,000 토큰 (20턴)</a:t>
+              <a:t>그냥 캐싱 $0.4014 vs 절반 요약 $1.8000</a:t>
             </a:r>
           </a:p>
         </p:txBody>
@@ -6579,7 +8563,7 @@
                 <a:ea typeface="NanumGothic"/>
                 <a:cs typeface="NanumGothic"/>
               </a:rPr>
-              <a:t>컴팩션 $3.4425 · 서브에이전트 $2.736</a:t>
+              <a:t>지울 수 있는 반복은 지우고, 지울 수 없는 반복은 고정해 캐시에 태운다</a:t>
             </a:r>
           </a:p>
         </p:txBody>
@@ -6615,7 +8599,7 @@
                 <a:ea typeface="NanumGothic"/>
                 <a:cs typeface="NanumGothic"/>
               </a:rPr>
-              <a:t>자식 호출·요약 비용까지 포함해 비교한다</a:t>
+              <a:t>압축률이 높을수록 조합의 이득도 커진다</a:t>
             </a:r>
           </a:p>
         </p:txBody>
@@ -6651,7 +8635,7 @@
                 <a:ea typeface="NanumGothic"/>
                 <a:cs typeface="NanumGothic"/>
               </a:rPr>
-              <a:t>experiments/exp11_tool_output_bloat.py</a:t>
+              <a:t>experiments/exp09_dry.py</a:t>
             </a:r>
           </a:p>
         </p:txBody>
@@ -6828,7 +8812,7 @@
                 <a:ea typeface="NanumGothic"/>
                 <a:cs typeface="NanumGothic"/>
               </a:rPr>
-              <a:t>시나리오 (10,000콜)</a:t>
+              <a:t>비용 시나리오</a:t>
             </a:r>
           </a:p>
         </p:txBody>
@@ -6864,7 +8848,7 @@
                 <a:ea typeface="NanumGothic"/>
                 <a:cs typeface="NanumGothic"/>
               </a:rPr>
-              <a:t>모델 라우팅 · 쉬운 요청에 비싼 모델을 쓰지 않는다</a:t>
+              <a:t>긴 세션은 컴팩션으로 접는다</a:t>
             </a:r>
           </a:p>
         </p:txBody>
@@ -6900,7 +8884,7 @@
                 <a:ea typeface="NanumGothic"/>
                 <a:cs typeface="NanumGothic"/>
               </a:rPr>
-              <a:t>전부 강 $350 → 절반 $184</a:t>
+              <a:t>$2.32 → $0.93 (60% 절감)</a:t>
             </a:r>
           </a:p>
         </p:txBody>
@@ -6936,7 +8920,7 @@
                 <a:ea typeface="NanumGothic"/>
                 <a:cs typeface="NanumGothic"/>
               </a:rPr>
-              <a:t>절반만 라우팅해도 47% 절감</a:t>
+              <a:t>10턴마다 접으면 $1.23 (47% 절감)</a:t>
             </a:r>
           </a:p>
         </p:txBody>
@@ -6972,7 +8956,7 @@
                 <a:ea typeface="NanumGothic"/>
                 <a:cs typeface="NanumGothic"/>
               </a:rPr>
-              <a:t>공격적 라우팅은 $35.17 (90% 절감)</a:t>
+              <a:t>너무 자주 접으면 요약 호출이 이득을 먹는다</a:t>
             </a:r>
           </a:p>
         </p:txBody>
@@ -7008,7 +8992,7 @@
                 <a:ea typeface="NanumGothic"/>
                 <a:cs typeface="NanumGothic"/>
               </a:rPr>
-              <a:t>품질 측정 도구가 먼저다 — 임계값은 주기적으로 재보정</a:t>
+              <a:t>최적 주기는 세션 길이와 요약 비용으로 정해진다</a:t>
             </a:r>
           </a:p>
         </p:txBody>
@@ -7044,7 +9028,7 @@
                 <a:ea typeface="NanumGothic"/>
                 <a:cs typeface="NanumGothic"/>
               </a:rPr>
-              <a:t>experiments/exp06_other_levers.py</a:t>
+              <a:t>experiments/exp04_agent_loop_sdd.py</a:t>
             </a:r>
           </a:p>
         </p:txBody>
@@ -7221,7 +9205,7 @@
                 <a:ea typeface="NanumGothic"/>
                 <a:cs typeface="NanumGothic"/>
               </a:rPr>
-              <a:t>가격표 + 시나리오</a:t>
+              <a:t>전체 시스템 비용 시나리오</a:t>
             </a:r>
           </a:p>
         </p:txBody>
@@ -7257,7 +9241,7 @@
                 <a:ea typeface="NanumGothic"/>
                 <a:cs typeface="NanumGothic"/>
               </a:rPr>
-              <a:t>배치 API · 지연을 할인으로 바꾼다</a:t>
+              <a:t>툴 출력과 서브에이전트는 전체 비용으로 본다</a:t>
             </a:r>
           </a:p>
         </p:txBody>
@@ -7293,7 +9277,7 @@
                 <a:ea typeface="NanumGothic"/>
                 <a:cs typeface="NanumGothic"/>
               </a:rPr>
-              <a:t>50,000건 $675 → $337.50</a:t>
+              <a:t>$5.6010 → $2.7360</a:t>
             </a:r>
           </a:p>
         </p:txBody>
@@ -7329,7 +9313,7 @@
                 <a:ea typeface="NanumGothic"/>
                 <a:cs typeface="NanumGothic"/>
               </a:rPr>
-              <a:t>입력·출력 모두 50% 할인</a:t>
+              <a:t>툴 읽기 누적 전송 1,680,000 토큰 (20턴)</a:t>
             </a:r>
           </a:p>
         </p:txBody>
@@ -7365,7 +9349,7 @@
                 <a:ea typeface="NanumGothic"/>
                 <a:cs typeface="NanumGothic"/>
               </a:rPr>
-              <a:t>24시간 안에 끝나면 되는 잡만</a:t>
+              <a:t>컴팩션 $3.4425 · 서브에이전트 $2.736</a:t>
             </a:r>
           </a:p>
         </p:txBody>
@@ -7401,7 +9385,7 @@
                 <a:ea typeface="NanumGothic"/>
                 <a:cs typeface="NanumGothic"/>
               </a:rPr>
-              <a:t>야간 평가 · 대량 분류 · 리포트 생성 · 레포 전체 분석</a:t>
+              <a:t>자식 호출·요약 비용까지 포함해 비교한다</a:t>
             </a:r>
           </a:p>
         </p:txBody>
@@ -7437,7 +9421,7 @@
                 <a:ea typeface="NanumGothic"/>
                 <a:cs typeface="NanumGothic"/>
               </a:rPr>
-              <a:t>experiments/exp06_other_levers.py</a:t>
+              <a:t>experiments/exp11_tool_output_bloat.py</a:t>
             </a:r>
           </a:p>
         </p:txBody>
@@ -7614,7 +9598,7 @@
                 <a:ea typeface="NanumGothic"/>
                 <a:cs typeface="NanumGothic"/>
               </a:rPr>
-              <a:t>순차 시나리오</a:t>
+              <a:t>시나리오 (10,000콜)</a:t>
             </a:r>
           </a:p>
         </p:txBody>
@@ -7650,7 +9634,7 @@
                 <a:ea typeface="NanumGothic"/>
                 <a:cs typeface="NanumGothic"/>
               </a:rPr>
-              <a:t>레버는 곱해진다</a:t>
+              <a:t>모델 라우팅 · 쉬운 요청에 비싼 모델을 쓰지 않는다</a:t>
             </a:r>
           </a:p>
         </p:txBody>
@@ -7686,7 +9670,7 @@
                 <a:ea typeface="NanumGothic"/>
                 <a:cs typeface="NanumGothic"/>
               </a:rPr>
-              <a:t>85.825% (잔여 14%)</a:t>
+              <a:t>전부 강 $350 → 절반 $184</a:t>
             </a:r>
           </a:p>
         </p:txBody>
@@ -7722,7 +9706,7 @@
                 <a:ea typeface="NanumGothic"/>
                 <a:cs typeface="NanumGothic"/>
               </a:rPr>
-              <a:t>시맨틱 캐시 → 라우팅 → 캐싱 → verbosity/effort → 배치</a:t>
+              <a:t>절반만 라우팅해도 47% 절감</a:t>
             </a:r>
           </a:p>
         </p:txBody>
@@ -7758,7 +9742,7 @@
                 <a:ea typeface="NanumGothic"/>
                 <a:cs typeface="NanumGothic"/>
               </a:rPr>
-              <a:t>잔여 비용에 순차 적용한 산술 결과</a:t>
+              <a:t>공격적 라우팅은 $35.17 (90% 절감)</a:t>
             </a:r>
           </a:p>
         </p:txBody>
@@ -7794,7 +9778,7 @@
                 <a:ea typeface="NanumGothic"/>
                 <a:cs typeface="NanumGothic"/>
               </a:rPr>
-              <a:t>레버 간 중복·상호작용은 검증하지 않았다</a:t>
+              <a:t>품질 측정 도구가 먼저다 — 임계값은 주기적으로 재보정</a:t>
             </a:r>
           </a:p>
         </p:txBody>
@@ -8007,7 +9991,7 @@
                 <a:ea typeface="NanumGothic"/>
                 <a:cs typeface="NanumGothic"/>
               </a:rPr>
-              <a:t>운영 주의</a:t>
+              <a:t>가격표 + 시나리오</a:t>
             </a:r>
           </a:p>
         </p:txBody>
@@ -8043,7 +10027,7 @@
                 <a:ea typeface="NanumGothic"/>
                 <a:cs typeface="NanumGothic"/>
               </a:rPr>
-              <a:t>캐싱과 개인정보</a:t>
+              <a:t>배치 API · 지연을 할인으로 바꾼다</a:t>
             </a:r>
           </a:p>
         </p:txBody>
@@ -8079,7 +10063,7 @@
                 <a:ea typeface="NanumGothic"/>
                 <a:cs typeface="NanumGothic"/>
               </a:rPr>
-              <a:t>개인화 · 실시간 응답은 캐싱 금지</a:t>
+              <a:t>50,000건 $675 → $337.50</a:t>
             </a:r>
           </a:p>
         </p:txBody>
@@ -8115,7 +10099,7 @@
                 <a:ea typeface="NanumGothic"/>
                 <a:cs typeface="NanumGothic"/>
               </a:rPr>
-              <a:t>멀티턴은 캐시 키에 컨텍스트를 포함</a:t>
+              <a:t>입력·출력 모두 50% 할인</a:t>
             </a:r>
           </a:p>
         </p:txBody>
@@ -8151,7 +10135,7 @@
                 <a:ea typeface="NanumGothic"/>
                 <a:cs typeface="NanumGothic"/>
               </a:rPr>
-              <a:t>시맨틱 캐시 임계값이 느슨하면 '비슷하지만 틀린 답'을 준다</a:t>
+              <a:t>24시간 안에 끝나면 되는 잡만</a:t>
             </a:r>
           </a:p>
         </p:txBody>
@@ -8187,7 +10171,7 @@
                 <a:ea typeface="NanumGothic"/>
                 <a:cs typeface="NanumGothic"/>
               </a:rPr>
-              <a:t>삭제·TTL 정책을 프롬프트 설계와 함께 정한다</a:t>
+              <a:t>야간 평가 · 대량 분류 · 리포트 생성 · 레포 전체 분석</a:t>
             </a:r>
           </a:p>
         </p:txBody>

--- a/presentation/token_cost_bonus.pptx
+++ b/presentation/token_cost_bonus.pptx
@@ -19,6 +19,8 @@
     <p:sldId id="267" r:id="rId19"/>
     <p:sldId id="268" r:id="rId20"/>
     <p:sldId id="269" r:id="rId21"/>
+    <p:sldId id="270" r:id="rId22"/>
+    <p:sldId id="271" r:id="rId23"/>
   </p:sldIdLst>
   <p:sldSz cx="12191695" cy="6858000" type="screen4x3"/>
   <p:notesSz cx="6858000" cy="9144000"/>
@@ -515,17 +517,12 @@
           <a:lstStyle/>
           <a:p>
             <a:r>
-              <a:t>본편에서 다 못 다룬 레버를 심화한다. 각 레버는 '켜는 조건'과 '깨지는 조건'이 한 쌍이다.</a:t>
-            </a:r>
-          </a:p>
-          <a:p>
-            <a:r>
-              <a:t>심화 세션이므로 숫자의 가정(모델 단가·토큰 수)을 슬라이드마다 확인한다.</a:t>
-            </a:r>
-          </a:p>
-          <a:p>
-            <a:r>
-              <a:t>마지막에 우선순위와 보안 주의로 정리한다.</a:t>
+              <a:t>심화 세션이므로 각 레버의 적용 조건과 함정을 함께 말한다.</a:t>
+            </a:r>
+          </a:p>
+          <a:p>
+            <a:r>
+              <a:t>숫자는 모두 시나리오·로그 재계산이며 실제 A/B가 아니다.</a:t>
             </a:r>
           </a:p>
           <a:p>
@@ -535,7 +532,7 @@
           </a:p>
           <a:p>
             <a:r>
-              <a:t>증거 범위: 심화 세션</a:t>
+              <a:t>증거 범위: 구간 표지</a:t>
             </a:r>
           </a:p>
         </p:txBody>
@@ -605,17 +602,17 @@
           <a:lstStyle/>
           <a:p>
             <a:r>
-              <a:t>각 레버의 절감률을 순서대로 곱한 값이다. 실제 도입에서는 서로 겹치는 부분이 생긴다.</a:t>
-            </a:r>
-          </a:p>
-          <a:p>
-            <a:r>
-              <a:t>검증된 상한도 아니다. 자기 데이터로 A/B를 돌려 확정해야 한다.</a:t>
-            </a:r>
-          </a:p>
-          <a:p>
-            <a:r>
-              <a:t>레버별 적용 조건(히트율·라우팅 임계값·배치 가능성)이 다르다.</a:t>
+              <a:t>토큰 수는 그대로이고 지원 서비스에서 가격을 줄이는 레버다.</a:t>
+            </a:r>
+          </a:p>
+          <a:p>
+            <a:r>
+              <a:t>실시간 UI, 대화형 코딩 에이전트처럼 대기 화면이 있는 작업에는 쓸 수 없다.</a:t>
+            </a:r>
+          </a:p>
+          <a:p>
+            <a:r>
+              <a:t>지연·실패 처리·지원 조건(요청 수 상한, 결과 보관 기간)을 확인해야 한다.</a:t>
             </a:r>
           </a:p>
           <a:p>
@@ -625,7 +622,7 @@
           </a:p>
           <a:p>
             <a:r>
-              <a:t>증거 범위: 순차 시나리오</a:t>
+              <a:t>증거 범위: 가격표 + 시나리오</a:t>
             </a:r>
           </a:p>
         </p:txBody>
@@ -695,27 +692,32 @@
           <a:lstStyle/>
           <a:p>
             <a:r>
-              <a:t>비교는 자동(-1) 대 미지정이다. 명시적 0과 섞으면 결론이 달라진다.</a:t>
-            </a:r>
-          </a:p>
-          <a:p>
-            <a:r>
-              <a:t>±$0.05 허용오차 통과는 미지정 6/6 · 명시적 0은 5/6이다. 정확한 숫자 채점으로는 3/6이 된다 — 동등성 증명이 아니다.</a:t>
-            </a:r>
-          </a:p>
-          <a:p>
-            <a:r>
-              <a:t>구모델의 thinkingBudget 로그는 역사적 관측으로 보존한다. 현재 API는 thinkingLevel을 쓴다.</a:t>
-            </a:r>
-          </a:p>
-          <a:p>
-            <a:r>
-              <a:t>근거: results/thinking_sweep.jsonl (30 rows)</a:t>
-            </a:r>
-          </a:p>
-          <a:p>
-            <a:r>
-              <a:t>증거 범위: 저장 API 로그 재계산</a:t>
+              <a:t>고정 발화를 두 정책으로 처리했을 때의 지출 차이다. 실제 A/B 실측이 아니다.</a:t>
+            </a:r>
+          </a:p>
+          <a:p>
+            <a:r>
+              <a:t>'12배' 같은 큰 수치는 대조군을 최상위 모델로 잡았을 때만 나온다 — 그 조건을 말하지 않으면 과장이 된다.</a:t>
+            </a:r>
+          </a:p>
+          <a:p>
+            <a:r>
+              <a:t>1턴·2턴처럼 짧은 리워크에서도 이득이 나는지가 도입 판단의 핵심이다.</a:t>
+            </a:r>
+          </a:p>
+          <a:p>
+            <a:r>
+              <a:t>이 값은 정책 지출 모형의 재생값이다. respec 경로는 실행을 하지 않으므로 지출이 늘지 않는다.</a:t>
+            </a:r>
+          </a:p>
+          <a:p>
+            <a:r>
+              <a:t>근거: analysis/lean_vs_full.py</a:t>
+            </a:r>
+          </a:p>
+          <a:p>
+            <a:r>
+              <a:t>증거 범위: 정책 시나리오 재생</a:t>
             </a:r>
           </a:p>
         </p:txBody>
@@ -785,27 +787,27 @@
           <a:lstStyle/>
           <a:p>
             <a:r>
-              <a:t>호출당 비용과 문자당 비용은 다른 질문에 대한 답이다. 하나로 다른 것을 대신하지 않는다.</a:t>
-            </a:r>
-          </a:p>
-          <a:p>
-            <a:r>
-              <a:t>'한국어가 일을 덜 했다'거나 '싸 보이는 착시'로 해석하지 않는다.</a:t>
-            </a:r>
-          </a:p>
-          <a:p>
-            <a:r>
-              <a:t>검정은 Welch로 계산했고 네 비교 모두 유의하다. 다만 반복 호출의 조건부 검정이며 의미량·정확도 검정이 아니다.</a:t>
-            </a:r>
-          </a:p>
-          <a:p>
-            <a:r>
-              <a:t>근거: tools/stats_test.py · storage logs</a:t>
-            </a:r>
-          </a:p>
-          <a:p>
-            <a:r>
-              <a:t>증거 범위: 저장 로그 80행 재계산</a:t>
+              <a:t>각 레버의 절감률을 순서대로 곱한 값이다. 실제 도입에서는 서로 겹치는 부분이 생긴다.</a:t>
+            </a:r>
+          </a:p>
+          <a:p>
+            <a:r>
+              <a:t>검증된 상한도 아니다. 자기 데이터로 A/B를 돌려 확정해야 한다.</a:t>
+            </a:r>
+          </a:p>
+          <a:p>
+            <a:r>
+              <a:t>레버별 적용 조건(히트율·라우팅 임계값·배치 가능성)이 다르다.</a:t>
+            </a:r>
+          </a:p>
+          <a:p>
+            <a:r>
+              <a:t>근거: experiments/exp06_other_levers.py</a:t>
+            </a:r>
+          </a:p>
+          <a:p>
+            <a:r>
+              <a:t>증거 범위: 순차 시나리오</a:t>
             </a:r>
           </a:p>
         </p:txBody>
@@ -875,27 +877,27 @@
           <a:lstStyle/>
           <a:p>
             <a:r>
-              <a:t>캐시는 비용 레버이면서 데이터 보존 문제다. 개인정보가 섞인 접두부는 캐싱 대상에서 뺀다.</a:t>
-            </a:r>
-          </a:p>
-          <a:p>
-            <a:r>
-              <a:t>시맨틱 캐시는 질의가 비슷할 때 호출 자체를 제거한다. 히트율보다 오답 위험이 먼저다.</a:t>
-            </a:r>
-          </a:p>
-          <a:p>
-            <a:r>
-              <a:t>TTL과 삭제 시점을 벤더 문서 기준으로 확인하고 기록해 둔다.</a:t>
-            </a:r>
-          </a:p>
-          <a:p>
-            <a:r>
-              <a:t>근거: experiments/exp06_other_levers.py</a:t>
-            </a:r>
-          </a:p>
-          <a:p>
-            <a:r>
-              <a:t>증거 범위: 운영 주의</a:t>
+              <a:t>비교는 자동(-1) 대 미지정이다. 명시적 0과 섞으면 결론이 달라진다.</a:t>
+            </a:r>
+          </a:p>
+          <a:p>
+            <a:r>
+              <a:t>±$0.05 허용오차 통과는 미지정 6/6 · 명시적 0은 5/6이다. 정확한 숫자 채점으로는 3/6이 된다 — 동등성 증명이 아니다.</a:t>
+            </a:r>
+          </a:p>
+          <a:p>
+            <a:r>
+              <a:t>구모델의 thinkingBudget 로그는 역사적 관측으로 보존한다. 현재 API는 thinkingLevel을 쓴다.</a:t>
+            </a:r>
+          </a:p>
+          <a:p>
+            <a:r>
+              <a:t>근거: results/thinking_sweep.jsonl (30 rows)</a:t>
+            </a:r>
+          </a:p>
+          <a:p>
+            <a:r>
+              <a:t>증거 범위: 저장 API 로그 재계산</a:t>
             </a:r>
           </a:p>
         </p:txBody>
@@ -965,6 +967,186 @@
           <a:lstStyle/>
           <a:p>
             <a:r>
+              <a:t>호출당 비용과 문자당 비용은 다른 질문에 대한 답이다. 하나로 다른 것을 대신하지 않는다.</a:t>
+            </a:r>
+          </a:p>
+          <a:p>
+            <a:r>
+              <a:t>'한국어가 일을 덜 했다'거나 '싸 보이는 착시'로 해석하지 않는다.</a:t>
+            </a:r>
+          </a:p>
+          <a:p>
+            <a:r>
+              <a:t>검정은 Welch로 계산했고 네 비교 모두 유의하다. 다만 반복 호출의 조건부 검정이며 의미량·정확도 검정이 아니다.</a:t>
+            </a:r>
+          </a:p>
+          <a:p>
+            <a:r>
+              <a:t>근거: tools/stats_test.py · storage logs</a:t>
+            </a:r>
+          </a:p>
+          <a:p>
+            <a:r>
+              <a:t>증거 범위: 저장 로그 80행 재계산</a:t>
+            </a:r>
+          </a:p>
+        </p:txBody>
+      </p:sp>
+      <p:sp>
+        <p:nvSpPr>
+          <p:cNvPr id="4" name="Slide Number Placeholder 3"/>
+          <p:cNvSpPr>
+            <a:spLocks noGrp="1"/>
+          </p:cNvSpPr>
+          <p:nvPr>
+            <p:ph type="sldNum" idx="5" sz="quarter"/>
+          </p:nvPr>
+        </p:nvSpPr>
+        <p:spPr/>
+      </p:sp>
+    </p:spTree>
+  </p:cSld>
+  <p:clrMapOvr>
+    <a:masterClrMapping/>
+  </p:clrMapOvr>
+</p:notes>
+</file>
+
+<file path=ppt/notesSlides/notesSlide15.xml><?xml version="1.0" encoding="utf-8"?>
+<p:notes xmlns:a="http://schemas.openxmlformats.org/drawingml/2006/main" xmlns:p="http://schemas.openxmlformats.org/presentationml/2006/main" xmlns:r="http://schemas.openxmlformats.org/officeDocument/2006/relationships">
+  <p:cSld>
+    <p:spTree>
+      <p:nvGrpSpPr>
+        <p:cNvPr id="1" name=""/>
+        <p:cNvGrpSpPr/>
+        <p:nvPr/>
+      </p:nvGrpSpPr>
+      <p:grpSpPr>
+        <a:xfrm>
+          <a:off x="0" y="0"/>
+          <a:ext cx="0" cy="0"/>
+          <a:chOff x="0" y="0"/>
+          <a:chExt cx="0" cy="0"/>
+        </a:xfrm>
+      </p:grpSpPr>
+      <p:sp>
+        <p:nvSpPr>
+          <p:cNvPr id="2" name="Slide Image Placeholder 1"/>
+          <p:cNvSpPr>
+            <a:spLocks noGrp="1"/>
+          </p:cNvSpPr>
+          <p:nvPr>
+            <p:ph type="sldImg" idx="2"/>
+          </p:nvPr>
+        </p:nvSpPr>
+        <p:spPr/>
+      </p:sp>
+      <p:sp>
+        <p:nvSpPr>
+          <p:cNvPr id="3" name="Notes Placeholder 2"/>
+          <p:cNvSpPr>
+            <a:spLocks noGrp="1"/>
+          </p:cNvSpPr>
+          <p:nvPr>
+            <p:ph type="body" idx="3" sz="quarter"/>
+          </p:nvPr>
+        </p:nvSpPr>
+        <p:spPr/>
+        <p:txBody>
+          <a:bodyPr/>
+          <a:lstStyle/>
+          <a:p>
+            <a:r>
+              <a:t>캐시는 비용 레버이면서 데이터 보존 문제다. 개인정보가 섞인 접두부는 캐싱 대상에서 뺀다.</a:t>
+            </a:r>
+          </a:p>
+          <a:p>
+            <a:r>
+              <a:t>시맨틱 캐시는 질의가 비슷할 때 호출 자체를 제거한다. 히트율보다 오답 위험이 먼저다.</a:t>
+            </a:r>
+          </a:p>
+          <a:p>
+            <a:r>
+              <a:t>TTL과 삭제 시점을 벤더 문서 기준으로 확인하고 기록해 둔다.</a:t>
+            </a:r>
+          </a:p>
+          <a:p>
+            <a:r>
+              <a:t>근거: experiments/exp06_other_levers.py</a:t>
+            </a:r>
+          </a:p>
+          <a:p>
+            <a:r>
+              <a:t>증거 범위: 운영 주의</a:t>
+            </a:r>
+          </a:p>
+        </p:txBody>
+      </p:sp>
+      <p:sp>
+        <p:nvSpPr>
+          <p:cNvPr id="4" name="Slide Number Placeholder 3"/>
+          <p:cNvSpPr>
+            <a:spLocks noGrp="1"/>
+          </p:cNvSpPr>
+          <p:nvPr>
+            <p:ph type="sldNum" idx="5" sz="quarter"/>
+          </p:nvPr>
+        </p:nvSpPr>
+        <p:spPr/>
+      </p:sp>
+    </p:spTree>
+  </p:cSld>
+  <p:clrMapOvr>
+    <a:masterClrMapping/>
+  </p:clrMapOvr>
+</p:notes>
+</file>
+
+<file path=ppt/notesSlides/notesSlide16.xml><?xml version="1.0" encoding="utf-8"?>
+<p:notes xmlns:a="http://schemas.openxmlformats.org/drawingml/2006/main" xmlns:p="http://schemas.openxmlformats.org/presentationml/2006/main" xmlns:r="http://schemas.openxmlformats.org/officeDocument/2006/relationships">
+  <p:cSld>
+    <p:spTree>
+      <p:nvGrpSpPr>
+        <p:cNvPr id="1" name=""/>
+        <p:cNvGrpSpPr/>
+        <p:nvPr/>
+      </p:nvGrpSpPr>
+      <p:grpSpPr>
+        <a:xfrm>
+          <a:off x="0" y="0"/>
+          <a:ext cx="0" cy="0"/>
+          <a:chOff x="0" y="0"/>
+          <a:chExt cx="0" cy="0"/>
+        </a:xfrm>
+      </p:grpSpPr>
+      <p:sp>
+        <p:nvSpPr>
+          <p:cNvPr id="2" name="Slide Image Placeholder 1"/>
+          <p:cNvSpPr>
+            <a:spLocks noGrp="1"/>
+          </p:cNvSpPr>
+          <p:nvPr>
+            <p:ph type="sldImg" idx="2"/>
+          </p:nvPr>
+        </p:nvSpPr>
+        <p:spPr/>
+      </p:sp>
+      <p:sp>
+        <p:nvSpPr>
+          <p:cNvPr id="3" name="Notes Placeholder 2"/>
+          <p:cNvSpPr>
+            <a:spLocks noGrp="1"/>
+          </p:cNvSpPr>
+          <p:nvPr>
+            <p:ph type="body" idx="3" sz="quarter"/>
+          </p:nvPr>
+        </p:nvSpPr>
+        <p:spPr/>
+        <p:txBody>
+          <a:bodyPr/>
+          <a:lstStyle/>
+          <a:p>
+            <a:r>
               <a:t>오늘 배운 것을 다 적용하지 말고 되돌리기 쉬운 것 하나만 켜고 재측정한다.</a:t>
             </a:r>
           </a:p>
@@ -1055,27 +1237,27 @@
           <a:lstStyle/>
           <a:p>
             <a:r>
-              <a:t>고정 20,000 + 가변 1,000 + 출력 1,500, Sonnet 단가, 100콜 조건의 계산이다.</a:t>
-            </a:r>
-          </a:p>
-          <a:p>
-            <a:r>
-              <a:t>히트율은 가정값이다. 실제 값은 자기 usage의 cache_read 필드로 측정해야 한다.</a:t>
-            </a:r>
-          </a:p>
-          <a:p>
-            <a:r>
-              <a:t>저장료·TTL·최소 길이는 모델별로 다르다. 미확인 기준은 할인 가정을 하지 않는다.</a:t>
-            </a:r>
-          </a:p>
-          <a:p>
-            <a:r>
-              <a:t>근거: experiments/exp03_prompt_caching.py</a:t>
-            </a:r>
-          </a:p>
-          <a:p>
-            <a:r>
-              <a:t>증거 범위: 비용 시나리오 (100콜)</a:t>
+              <a:t>본편에서 다 못 다룬 레버를 심화한다. 각 레버는 '켜는 조건'과 '깨지는 조건'이 한 쌍이다.</a:t>
+            </a:r>
+          </a:p>
+          <a:p>
+            <a:r>
+              <a:t>심화 세션이므로 숫자의 가정(모델 단가·토큰 수)을 슬라이드마다 확인한다.</a:t>
+            </a:r>
+          </a:p>
+          <a:p>
+            <a:r>
+              <a:t>마지막에 우선순위와 보안 주의로 정리한다.</a:t>
+            </a:r>
+          </a:p>
+          <a:p>
+            <a:r>
+              <a:t>근거: docs/CORRECTIONS.md</a:t>
+            </a:r>
+          </a:p>
+          <a:p>
+            <a:r>
+              <a:t>증거 범위: 심화 세션</a:t>
             </a:r>
           </a:p>
         </p:txBody>
@@ -1145,17 +1327,17 @@
           <a:lstStyle/>
           <a:p>
             <a:r>
-              <a:t>캐시는 프리픽스를 단위로 매칭한다. 앞부분이 한 글자만 달라도 전액을 다시 낸다.</a:t>
-            </a:r>
-          </a:p>
-          <a:p>
-            <a:r>
-              <a:t>히트율 0%에서는 쓰기 프리미엄만 계속 물어 캐시 없음($8.55)보다 비싸진다($10.05).</a:t>
-            </a:r>
-          </a:p>
-          <a:p>
-            <a:r>
-              <a:t>반대로 히트율이 40%만 넘어도 이미 이득이다. 그래서 '켜고, 적중률을 본다'가 순서다.</a:t>
+              <a:t>고정 20,000 + 가변 1,000 + 출력 1,500, Sonnet 단가, 100콜 조건의 계산이다.</a:t>
+            </a:r>
+          </a:p>
+          <a:p>
+            <a:r>
+              <a:t>히트율은 가정값이다. 실제 값은 자기 usage의 cache_read 필드로 측정한다.</a:t>
+            </a:r>
+          </a:p>
+          <a:p>
+            <a:r>
+              <a:t>저장료·TTL·최소 길이는 모델별로 다르다. 미확인 기준은 할인 가정을 하지 않는다.</a:t>
             </a:r>
           </a:p>
           <a:p>
@@ -1165,7 +1347,7 @@
           </a:p>
           <a:p>
             <a:r>
-              <a:t>증거 범위: 비용 시나리오</a:t>
+              <a:t>증거 범위: 비용 시나리오 (100콜)</a:t>
             </a:r>
           </a:p>
         </p:txBody>
@@ -1235,27 +1417,32 @@
           <a:lstStyle/>
           <a:p>
             <a:r>
-              <a:t>고정 20,000 + 가변 1,000 + 출력 1,500, Sonnet 단가, 100콜 조건의 계산이다.</a:t>
-            </a:r>
-          </a:p>
-          <a:p>
-            <a:r>
-              <a:t>히트율은 가정값이다. 실제 값은 자기 usage의 cache_read 필드로 측정한다.</a:t>
-            </a:r>
-          </a:p>
-          <a:p>
-            <a:r>
-              <a:t>저장료·TTL·최소 길이는 모델별로 다르다. 미확인 기준은 할인 가정을 하지 않는다.</a:t>
-            </a:r>
-          </a:p>
-          <a:p>
-            <a:r>
-              <a:t>근거: experiments/exp03_prompt_caching.py</a:t>
-            </a:r>
-          </a:p>
-          <a:p>
-            <a:r>
-              <a:t>증거 범위: 비용 시나리오 (100콜)</a:t>
+              <a:t>같은 12,000토큰을 매번 보내던 세션을 절반으로 줄이고 캐시까지 걸었을 때의 산술이다.</a:t>
+            </a:r>
+          </a:p>
+          <a:p>
+            <a:r>
+              <a:t>압축률과 정확도는 작업별로 다르다. 지시·수용 기준을 지우면 요구사항이 바뀐다.</a:t>
+            </a:r>
+          </a:p>
+          <a:p>
+            <a:r>
+              <a:t>압축기 실행 비용과 지연도 손익에 포함해야 한다. 짧은 프롬프트는 압축이 손해일 수 있다.</a:t>
+            </a:r>
+          </a:p>
+          <a:p>
+            <a:r>
+              <a:t>압축 자체의 지연·품질 손실은 이 계산 밖이다.</a:t>
+            </a:r>
+          </a:p>
+          <a:p>
+            <a:r>
+              <a:t>근거: experiments/exp09_dry.py</a:t>
+            </a:r>
+          </a:p>
+          <a:p>
+            <a:r>
+              <a:t>증거 범위: 비용 시나리오</a:t>
             </a:r>
           </a:p>
         </p:txBody>
@@ -1325,27 +1512,22 @@
           <a:lstStyle/>
           <a:p>
             <a:r>
-              <a:t>같은 12,000토큰을 매번 보내던 세션을 절반으로 줄이고 캐시까지 걸었을 때의 산술이다.</a:t>
-            </a:r>
-          </a:p>
-          <a:p>
-            <a:r>
-              <a:t>압축률과 정확도는 작업별로 다르다. 지시·수용 기준을 지우면 요구사항이 바뀐다.</a:t>
-            </a:r>
-          </a:p>
-          <a:p>
-            <a:r>
-              <a:t>압축기 실행 비용과 지연도 손익에 포함해야 한다. 짧은 프롬프트는 압축이 손해일 수 있다.</a:t>
-            </a:r>
-          </a:p>
-          <a:p>
-            <a:r>
-              <a:t>압축 자체의 지연·품질 손실은 이 계산 밖이다.</a:t>
-            </a:r>
-          </a:p>
-          <a:p>
-            <a:r>
-              <a:t>근거: experiments/exp09_dry.py</a:t>
+              <a:t>20턴 세션에 캐싱만 걸면 $1.91(+17%) — 이력 누적은 그대로 남기 때문이다.</a:t>
+            </a:r>
+          </a:p>
+          <a:p>
+            <a:r>
+              <a:t>요약은 품질에 영향을 준다. 압축 과정에서 잃는 정보가 재작업을 만들면 절감이 상쇄된다.</a:t>
+            </a:r>
+          </a:p>
+          <a:p>
+            <a:r>
+              <a:t>주기를 바꿔 가며 재작업률과 총비용을 함께 측정할 것을 권한다.</a:t>
+            </a:r>
+          </a:p>
+          <a:p>
+            <a:r>
+              <a:t>근거: experiments/exp04_agent_loop_sdd.py</a:t>
             </a:r>
           </a:p>
           <a:p>
@@ -1420,17 +1602,17 @@
           <a:lstStyle/>
           <a:p>
             <a:r>
-              <a:t>20턴 세션에 캐싱만 걸면 $1.91(+17%) — 이력 누적은 그대로 남기 때문이다.</a:t>
-            </a:r>
-          </a:p>
-          <a:p>
-            <a:r>
-              <a:t>요약은 품질에 영향을 준다. 압축 과정에서 잃는 정보가 재작업을 만들면 절감이 상쇄된다.</a:t>
-            </a:r>
-          </a:p>
-          <a:p>
-            <a:r>
-              <a:t>주기를 바꿔 가며 재작업률과 총비용을 함께 측정할 것을 권한다.</a:t>
+              <a:t>고정 8,000토큰 프리픽스, 턴당 입력 2,000·출력 800의 계산이다.</a:t>
+            </a:r>
+          </a:p>
+          <a:p>
+            <a:r>
+              <a:t>이력 재전송은 캐시 프리픽스로 접을 수 있다. 실제 적중 여부는 배치에 달렸다.</a:t>
+            </a:r>
+          </a:p>
+          <a:p>
+            <a:r>
+              <a:t>출력은 단가가 비싸므로 비중이 작아도 금액 기여는 별도로 봐야 한다.</a:t>
             </a:r>
           </a:p>
           <a:p>
@@ -1440,7 +1622,7 @@
           </a:p>
           <a:p>
             <a:r>
-              <a:t>증거 범위: 비용 시나리오</a:t>
+              <a:t>증거 범위: 비용 시나리오 (20턴)</a:t>
             </a:r>
           </a:p>
         </p:txBody>
@@ -1510,27 +1692,27 @@
           <a:lstStyle/>
           <a:p>
             <a:r>
-              <a:t>같은 툴 작업량을 가정하고 메인·자식·요약 비용을 모두 합산한 값이다.</a:t>
-            </a:r>
-          </a:p>
-          <a:p>
-            <a:r>
-              <a:t>서브에이전트는 요약 품질과 실패·재시도 특성이 다르다. 비용만으로 우열을 단정하지 않는다.</a:t>
-            </a:r>
-          </a:p>
-          <a:p>
-            <a:r>
-              <a:t>과거의 -87%는 자식·요약을 빼고 계산한 값이어서 전체 절감으로 쓰지 않는다.</a:t>
-            </a:r>
-          </a:p>
-          <a:p>
-            <a:r>
-              <a:t>근거: experiments/exp11_tool_output_bloat.py</a:t>
-            </a:r>
-          </a:p>
-          <a:p>
-            <a:r>
-              <a:t>증거 범위: 전체 시스템 비용 시나리오</a:t>
+              <a:t>고정 20,000 + 가변 1,000 + 출력 1,500, Sonnet 단가, 100콜 조건의 계산이다.</a:t>
+            </a:r>
+          </a:p>
+          <a:p>
+            <a:r>
+              <a:t>적중률은 관측값이 아니라 가정 축이다. 자기 usage의 cache_read로 실측해야 한다.</a:t>
+            </a:r>
+          </a:p>
+          <a:p>
+            <a:r>
+              <a:t>캐시 저장료·TTL·최소 길이는 별도 조건이며, 미확인 모델은 할인을 가정하지 않는다.</a:t>
+            </a:r>
+          </a:p>
+          <a:p>
+            <a:r>
+              <a:t>근거: experiments/exp03_prompt_caching.py</a:t>
+            </a:r>
+          </a:p>
+          <a:p>
+            <a:r>
+              <a:t>증거 범위: 비용 시나리오 (100콜)</a:t>
             </a:r>
           </a:p>
         </p:txBody>
@@ -1600,27 +1782,27 @@
           <a:lstStyle/>
           <a:p>
             <a:r>
-              <a:t>벤치마크에서 잡은 임계값을 그대로 프로덕션에 쓰면 절감이 과대 추정된다.</a:t>
-            </a:r>
-          </a:p>
-          <a:p>
-            <a:r>
-              <a:t>저볼륨에서는 라우팅 오버헤드가 절감을 상쇄한다. 반복률과 볼륨을 먼저 본다.</a:t>
-            </a:r>
-          </a:p>
-          <a:p>
-            <a:r>
-              <a:t>라우터 오류율·검출률은 이 저장소에서 측정하지 않았다. 참조 구현의 회귀 테스트만 있다.</a:t>
-            </a:r>
-          </a:p>
-          <a:p>
-            <a:r>
-              <a:t>근거: experiments/exp06_other_levers.py</a:t>
-            </a:r>
-          </a:p>
-          <a:p>
-            <a:r>
-              <a:t>증거 범위: 시나리오 (10,000콜)</a:t>
+              <a:t>같은 툴 작업량을 가정하고 메인·자식·요약 비용을 모두 합산한 값이다.</a:t>
+            </a:r>
+          </a:p>
+          <a:p>
+            <a:r>
+              <a:t>서브에이전트는 요약 품질과 실패·재시도 특성이 다르다. 비용만으로 우열을 단정하지 않는다.</a:t>
+            </a:r>
+          </a:p>
+          <a:p>
+            <a:r>
+              <a:t>과거의 -87%는 자식·요약을 빼고 계산한 값이어서 전체 절감으로 쓰지 않는다.</a:t>
+            </a:r>
+          </a:p>
+          <a:p>
+            <a:r>
+              <a:t>근거: experiments/exp11_tool_output_bloat.py</a:t>
+            </a:r>
+          </a:p>
+          <a:p>
+            <a:r>
+              <a:t>증거 범위: 전체 시스템 비용 시나리오</a:t>
             </a:r>
           </a:p>
         </p:txBody>
@@ -1690,17 +1872,17 @@
           <a:lstStyle/>
           <a:p>
             <a:r>
-              <a:t>토큰 수는 그대로이고 지원 서비스에서 가격을 줄이는 레버다.</a:t>
-            </a:r>
-          </a:p>
-          <a:p>
-            <a:r>
-              <a:t>실시간 UI, 대화형 코딩 에이전트처럼 대기 화면이 있는 작업에는 쓸 수 없다.</a:t>
-            </a:r>
-          </a:p>
-          <a:p>
-            <a:r>
-              <a:t>지연·실패 처리·지원 조건(요청 수 상한, 결과 보관 기간)을 확인해야 한다.</a:t>
+              <a:t>벤치마크에서 잡은 임계값을 그대로 프로덕션에 쓰면 절감이 과대 추정된다.</a:t>
+            </a:r>
+          </a:p>
+          <a:p>
+            <a:r>
+              <a:t>저볼륨에서는 라우팅 오버헤드가 절감을 상쇄한다. 반복률과 볼륨을 먼저 본다.</a:t>
+            </a:r>
+          </a:p>
+          <a:p>
+            <a:r>
+              <a:t>라우터 오류율·검출률은 이 저장소에서 측정하지 않았다. 참조 구현의 회귀 테스트만 있다.</a:t>
             </a:r>
           </a:p>
           <a:p>
@@ -1710,7 +1892,7 @@
           </a:p>
           <a:p>
             <a:r>
-              <a:t>증거 범위: 가격표 + 시나리오</a:t>
+              <a:t>증거 범위: 시나리오 (10,000콜)</a:t>
             </a:r>
           </a:p>
         </p:txBody>
@@ -4834,20 +5016,99 @@
                 <a:ea typeface="NanumGothic"/>
                 <a:cs typeface="NanumGothic"/>
               </a:rPr>
-              <a:t>심화 세션</a:t>
-            </a:r>
-          </a:p>
-        </p:txBody>
-      </p:sp>
-      <p:sp>
-        <p:nvSpPr>
-          <p:cNvPr id="5" name="audit:title"/>
-          <p:cNvSpPr txBox="1"/>
-          <p:nvPr/>
-        </p:nvSpPr>
-        <p:spPr>
-          <a:xfrm>
-            <a:off x="640080" y="822960"/>
+              <a:t>구간 표지</a:t>
+            </a:r>
+          </a:p>
+        </p:txBody>
+      </p:sp>
+      <p:sp>
+        <p:nvSpPr>
+          <p:cNvPr id="5" name="Rectangle 4"/>
+          <p:cNvSpPr/>
+          <p:nvPr/>
+        </p:nvSpPr>
+        <p:spPr>
+          <a:xfrm>
+            <a:off x="640080" y="2084831"/>
+            <a:ext cx="3108960" cy="64008"/>
+          </a:xfrm>
+          <a:prstGeom prst="rect">
+            <a:avLst/>
+          </a:prstGeom>
+          <a:solidFill>
+            <a:srgbClr val="36D399"/>
+          </a:solidFill>
+          <a:ln>
+            <a:noFill/>
+          </a:ln>
+        </p:spPr>
+        <p:style>
+          <a:lnRef idx="1">
+            <a:schemeClr val="accent1"/>
+          </a:lnRef>
+          <a:fillRef idx="3">
+            <a:schemeClr val="accent1"/>
+          </a:fillRef>
+          <a:effectRef idx="2">
+            <a:schemeClr val="accent1"/>
+          </a:effectRef>
+          <a:fontRef idx="minor">
+            <a:schemeClr val="lt1"/>
+          </a:fontRef>
+        </p:style>
+        <p:txBody>
+          <a:bodyPr rtlCol="0" anchor="ctr"/>
+          <a:lstStyle/>
+          <a:p>
+            <a:pPr algn="ctr"/>
+          </a:p>
+        </p:txBody>
+      </p:sp>
+      <p:sp>
+        <p:nvSpPr>
+          <p:cNvPr id="6" name="audit:title"/>
+          <p:cNvSpPr txBox="1"/>
+          <p:nvPr/>
+        </p:nvSpPr>
+        <p:spPr>
+          <a:xfrm>
+            <a:off x="640080" y="2304288"/>
+            <a:ext cx="10881360" cy="1097280"/>
+          </a:xfrm>
+          <a:prstGeom prst="rect">
+            <a:avLst/>
+          </a:prstGeom>
+          <a:noFill/>
+        </p:spPr>
+        <p:txBody>
+          <a:bodyPr wrap="square" lIns="0" rIns="0" tIns="0" bIns="0">
+            <a:spAutoFit/>
+          </a:bodyPr>
+          <a:lstStyle/>
+          <a:p>
+            <a:r>
+              <a:rPr sz="4600" b="1">
+                <a:solidFill>
+                  <a:srgbClr val="ECF1F6"/>
+                </a:solidFill>
+                <a:latin typeface="NanumGothic"/>
+                <a:ea typeface="NanumGothic"/>
+                <a:cs typeface="NanumGothic"/>
+              </a:rPr>
+              <a:t>심화 · 나머지 레버</a:t>
+            </a:r>
+          </a:p>
+        </p:txBody>
+      </p:sp>
+      <p:sp>
+        <p:nvSpPr>
+          <p:cNvPr id="7" name="audit:hero"/>
+          <p:cNvSpPr txBox="1"/>
+          <p:nvPr/>
+        </p:nvSpPr>
+        <p:spPr>
+          <a:xfrm>
+            <a:off x="640080" y="3383280"/>
             <a:ext cx="10881360" cy="822960"/>
           </a:xfrm>
           <a:prstGeom prst="rect">
@@ -4862,43 +5123,7 @@
           <a:lstStyle/>
           <a:p>
             <a:r>
-              <a:rPr sz="2900" b="1">
-                <a:solidFill>
-                  <a:srgbClr val="ECF1F6"/>
-                </a:solidFill>
-                <a:latin typeface="NanumGothic"/>
-                <a:ea typeface="NanumGothic"/>
-                <a:cs typeface="NanumGothic"/>
-              </a:rPr>
-              <a:t>견적서의 나머지 항목</a:t>
-            </a:r>
-          </a:p>
-        </p:txBody>
-      </p:sp>
-      <p:sp>
-        <p:nvSpPr>
-          <p:cNvPr id="6" name="audit:hero"/>
-          <p:cNvSpPr txBox="1"/>
-          <p:nvPr/>
-        </p:nvSpPr>
-        <p:spPr>
-          <a:xfrm>
-            <a:off x="640080" y="1783080"/>
-            <a:ext cx="10881360" cy="777240"/>
-          </a:xfrm>
-          <a:prstGeom prst="rect">
-            <a:avLst/>
-          </a:prstGeom>
-          <a:noFill/>
-        </p:spPr>
-        <p:txBody>
-          <a:bodyPr wrap="square" lIns="0" rIns="0" tIns="0" bIns="0">
-            <a:spAutoFit/>
-          </a:bodyPr>
-          <a:lstStyle/>
-          <a:p>
-            <a:r>
-              <a:rPr sz="2900" b="1">
+              <a:rPr sz="2500" b="1">
                 <a:solidFill>
                   <a:srgbClr val="36D399"/>
                 </a:solidFill>
@@ -4913,115 +5138,43 @@
       </p:sp>
       <p:sp>
         <p:nvSpPr>
-          <p:cNvPr id="7" name="audit:body-0"/>
-          <p:cNvSpPr txBox="1"/>
-          <p:nvPr/>
-        </p:nvSpPr>
-        <p:spPr>
-          <a:xfrm>
-            <a:off x="777240" y="2862072"/>
-            <a:ext cx="10652760" cy="612648"/>
-          </a:xfrm>
-          <a:prstGeom prst="rect">
-            <a:avLst/>
-          </a:prstGeom>
-          <a:noFill/>
-        </p:spPr>
-        <p:txBody>
-          <a:bodyPr wrap="square" lIns="0" rIns="0" tIns="0" bIns="0">
-            <a:spAutoFit/>
-          </a:bodyPr>
-          <a:lstStyle/>
-          <a:p>
-            <a:r>
-              <a:rPr sz="1750" b="0">
-                <a:solidFill>
-                  <a:srgbClr val="ECF1F6"/>
-                </a:solidFill>
-                <a:latin typeface="NanumGothic"/>
-                <a:ea typeface="NanumGothic"/>
-                <a:cs typeface="NanumGothic"/>
-              </a:rPr>
-              <a:t>캐싱 · 압축 · 컴팩션 · 서브에이전트 · 라우팅 · 배치</a:t>
-            </a:r>
-          </a:p>
-        </p:txBody>
-      </p:sp>
-      <p:sp>
-        <p:nvSpPr>
-          <p:cNvPr id="8" name="audit:body-1"/>
-          <p:cNvSpPr txBox="1"/>
-          <p:nvPr/>
-        </p:nvSpPr>
-        <p:spPr>
-          <a:xfrm>
-            <a:off x="777240" y="3502152"/>
-            <a:ext cx="10652760" cy="612648"/>
-          </a:xfrm>
-          <a:prstGeom prst="rect">
-            <a:avLst/>
-          </a:prstGeom>
-          <a:noFill/>
-        </p:spPr>
-        <p:txBody>
-          <a:bodyPr wrap="square" lIns="0" rIns="0" tIns="0" bIns="0">
-            <a:spAutoFit/>
-          </a:bodyPr>
-          <a:lstStyle/>
-          <a:p>
-            <a:r>
-              <a:rPr sz="1750" b="0">
-                <a:solidFill>
-                  <a:srgbClr val="ECF1F6"/>
-                </a:solidFill>
-                <a:latin typeface="NanumGothic"/>
-                <a:ea typeface="NanumGothic"/>
-                <a:cs typeface="NanumGothic"/>
-              </a:rPr>
-              <a:t>각 레버의 조건과 함정을 한 장씩 본다</a:t>
-            </a:r>
-          </a:p>
-        </p:txBody>
-      </p:sp>
-      <p:sp>
-        <p:nvSpPr>
-          <p:cNvPr id="9" name="audit:body-2"/>
-          <p:cNvSpPr txBox="1"/>
-          <p:nvPr/>
-        </p:nvSpPr>
-        <p:spPr>
-          <a:xfrm>
-            <a:off x="777240" y="4142231"/>
-            <a:ext cx="10652760" cy="612648"/>
-          </a:xfrm>
-          <a:prstGeom prst="rect">
-            <a:avLst/>
-          </a:prstGeom>
-          <a:noFill/>
-        </p:spPr>
-        <p:txBody>
-          <a:bodyPr wrap="square" lIns="0" rIns="0" tIns="0" bIns="0">
-            <a:spAutoFit/>
-          </a:bodyPr>
-          <a:lstStyle/>
-          <a:p>
-            <a:r>
-              <a:rPr sz="1750" b="0">
-                <a:solidFill>
-                  <a:srgbClr val="ECF1F6"/>
-                </a:solidFill>
-                <a:latin typeface="NanumGothic"/>
-                <a:ea typeface="NanumGothic"/>
-                <a:cs typeface="NanumGothic"/>
-              </a:rPr>
-              <a:t>레버는 곱해진다 — 우선순위는 뒤에서</a:t>
-            </a:r>
-          </a:p>
-        </p:txBody>
-      </p:sp>
-      <p:sp>
-        <p:nvSpPr>
-          <p:cNvPr id="10" name="audit:source"/>
+          <p:cNvPr id="8" name="audit:body-0"/>
+          <p:cNvSpPr txBox="1"/>
+          <p:nvPr/>
+        </p:nvSpPr>
+        <p:spPr>
+          <a:xfrm>
+            <a:off x="640080" y="4224528"/>
+            <a:ext cx="10881360" cy="548640"/>
+          </a:xfrm>
+          <a:prstGeom prst="rect">
+            <a:avLst/>
+          </a:prstGeom>
+          <a:noFill/>
+        </p:spPr>
+        <p:txBody>
+          <a:bodyPr wrap="square" lIns="0" rIns="0" tIns="0" bIns="0">
+            <a:spAutoFit/>
+          </a:bodyPr>
+          <a:lstStyle/>
+          <a:p>
+            <a:r>
+              <a:rPr sz="1700" b="0">
+                <a:solidFill>
+                  <a:srgbClr val="C7D2DE"/>
+                </a:solidFill>
+                <a:latin typeface="NanumGothic"/>
+                <a:ea typeface="NanumGothic"/>
+                <a:cs typeface="NanumGothic"/>
+              </a:rPr>
+              <a:t>캐시 미스 · 압축 · 컴팩션 · 툴 출력 · 라우팅 · 배치 · 사고 예산</a:t>
+            </a:r>
+          </a:p>
+        </p:txBody>
+      </p:sp>
+      <p:sp>
+        <p:nvSpPr>
+          <p:cNvPr id="9" name="audit:source"/>
           <p:cNvSpPr txBox="1"/>
           <p:nvPr/>
         </p:nvSpPr>
@@ -5057,7 +5210,7 @@
       </p:sp>
       <p:sp>
         <p:nvSpPr>
-          <p:cNvPr id="11" name="audit:footer"/>
+          <p:cNvPr id="10" name="audit:footer"/>
           <p:cNvSpPr txBox="1"/>
           <p:nvPr/>
         </p:nvSpPr>
@@ -5227,7 +5380,7 @@
                 <a:ea typeface="NanumGothic"/>
                 <a:cs typeface="NanumGothic"/>
               </a:rPr>
-              <a:t>순차 시나리오</a:t>
+              <a:t>가격표 + 시나리오</a:t>
             </a:r>
           </a:p>
         </p:txBody>
@@ -5240,7 +5393,7 @@
         </p:nvSpPr>
         <p:spPr>
           <a:xfrm>
-            <a:off x="640080" y="566928"/>
+            <a:off x="640080" y="822960"/>
             <a:ext cx="10881360" cy="822960"/>
           </a:xfrm>
           <a:prstGeom prst="rect">
@@ -5263,7 +5416,7 @@
                 <a:ea typeface="NanumGothic"/>
                 <a:cs typeface="NanumGothic"/>
               </a:rPr>
-              <a:t>다섯 레버를 겹치면</a:t>
+              <a:t>배치 API · 지연을 할인으로 바꾼다</a:t>
             </a:r>
           </a:p>
         </p:txBody>
@@ -5276,7 +5429,7 @@
         </p:nvSpPr>
         <p:spPr>
           <a:xfrm>
-            <a:off x="640080" y="1261872"/>
+            <a:off x="640080" y="1783080"/>
             <a:ext cx="10881360" cy="777240"/>
           </a:xfrm>
           <a:prstGeom prst="rect">
@@ -5299,7 +5452,7 @@
                 <a:ea typeface="NanumGothic"/>
                 <a:cs typeface="NanumGothic"/>
               </a:rPr>
-              <a:t>잔여 14.18%</a:t>
+              <a:t>50,000건 $675 → $337.50</a:t>
             </a:r>
           </a:p>
         </p:txBody>
@@ -5312,7 +5465,7 @@
         </p:nvSpPr>
         <p:spPr>
           <a:xfrm>
-            <a:off x="777240" y="2029968"/>
+            <a:off x="777240" y="2862072"/>
             <a:ext cx="10652760" cy="612648"/>
           </a:xfrm>
           <a:prstGeom prst="rect">
@@ -5335,7 +5488,7 @@
                 <a:ea typeface="NanumGothic"/>
                 <a:cs typeface="NanumGothic"/>
               </a:rPr>
-              <a:t>시맨틱 캐시 → 라우팅 → 캐싱 → effort → 배치</a:t>
+              <a:t>입력·출력 모두 50% 할인</a:t>
             </a:r>
           </a:p>
         </p:txBody>
@@ -5348,7 +5501,7 @@
         </p:nvSpPr>
         <p:spPr>
           <a:xfrm>
-            <a:off x="777240" y="2542032"/>
+            <a:off x="777240" y="3502152"/>
             <a:ext cx="10652760" cy="612648"/>
           </a:xfrm>
           <a:prstGeom prst="rect">
@@ -5371,59 +5524,71 @@
                 <a:ea typeface="NanumGothic"/>
                 <a:cs typeface="NanumGothic"/>
               </a:rPr>
-              <a:t>각 레버가 자기 조건을 만족할 때의 순차 산술</a:t>
-            </a:r>
-          </a:p>
-        </p:txBody>
-      </p:sp>
-      <p:pic>
-        <p:nvPicPr>
-          <p:cNvPr id="9" name="Picture 8" descr="stack.png"/>
-          <p:cNvPicPr>
-            <a:picLocks noChangeAspect="1"/>
-          </p:cNvPicPr>
-          <p:nvPr/>
-        </p:nvPicPr>
-        <p:blipFill>
-          <a:blip r:embed="rId2"/>
-          <a:stretch>
-            <a:fillRect/>
-          </a:stretch>
-        </p:blipFill>
-        <p:spPr>
-          <a:xfrm>
-            <a:off x="777240" y="3101593"/>
-            <a:ext cx="10652760" cy="2959100"/>
-          </a:xfrm>
-          <a:prstGeom prst="rect">
-            <a:avLst/>
-          </a:prstGeom>
-        </p:spPr>
-      </p:pic>
-      <p:sp>
-        <p:nvSpPr>
-          <p:cNvPr id="10" name="audit:chart-caption"/>
-          <p:cNvSpPr txBox="1"/>
-          <p:nvPr/>
-        </p:nvSpPr>
-        <p:spPr>
-          <a:xfrm>
-            <a:off x="777240" y="6135624"/>
-            <a:ext cx="10652760" cy="237744"/>
-          </a:xfrm>
-          <a:prstGeom prst="rect">
-            <a:avLst/>
-          </a:prstGeom>
-          <a:noFill/>
-        </p:spPr>
-        <p:txBody>
-          <a:bodyPr wrap="square" lIns="0" rIns="0" tIns="0" bIns="0">
-            <a:spAutoFit/>
-          </a:bodyPr>
-          <a:lstStyle/>
-          <a:p>
-            <a:r>
-              <a:rPr sz="950" b="0">
+              <a:t>24시간 안에 끝나면 되는 잡만</a:t>
+            </a:r>
+          </a:p>
+        </p:txBody>
+      </p:sp>
+      <p:sp>
+        <p:nvSpPr>
+          <p:cNvPr id="9" name="audit:body-2"/>
+          <p:cNvSpPr txBox="1"/>
+          <p:nvPr/>
+        </p:nvSpPr>
+        <p:spPr>
+          <a:xfrm>
+            <a:off x="777240" y="4142231"/>
+            <a:ext cx="10652760" cy="612648"/>
+          </a:xfrm>
+          <a:prstGeom prst="rect">
+            <a:avLst/>
+          </a:prstGeom>
+          <a:noFill/>
+        </p:spPr>
+        <p:txBody>
+          <a:bodyPr wrap="square" lIns="0" rIns="0" tIns="0" bIns="0">
+            <a:spAutoFit/>
+          </a:bodyPr>
+          <a:lstStyle/>
+          <a:p>
+            <a:r>
+              <a:rPr sz="1750" b="0">
+                <a:solidFill>
+                  <a:srgbClr val="ECF1F6"/>
+                </a:solidFill>
+                <a:latin typeface="NanumGothic"/>
+                <a:ea typeface="NanumGothic"/>
+                <a:cs typeface="NanumGothic"/>
+              </a:rPr>
+              <a:t>야간 평가 · 대량 분류 · 리포트 생성 · 레포 전체 분석</a:t>
+            </a:r>
+          </a:p>
+        </p:txBody>
+      </p:sp>
+      <p:sp>
+        <p:nvSpPr>
+          <p:cNvPr id="10" name="audit:source"/>
+          <p:cNvSpPr txBox="1"/>
+          <p:nvPr/>
+        </p:nvSpPr>
+        <p:spPr>
+          <a:xfrm>
+            <a:off x="640080" y="6080760"/>
+            <a:ext cx="10972800" cy="274320"/>
+          </a:xfrm>
+          <a:prstGeom prst="rect">
+            <a:avLst/>
+          </a:prstGeom>
+          <a:noFill/>
+        </p:spPr>
+        <p:txBody>
+          <a:bodyPr wrap="square" lIns="0" rIns="0" tIns="0" bIns="0">
+            <a:spAutoFit/>
+          </a:bodyPr>
+          <a:lstStyle/>
+          <a:p>
+            <a:r>
+              <a:rPr sz="1000" b="0">
                 <a:solidFill>
                   <a:srgbClr val="93A4B5"/>
                 </a:solidFill>
@@ -5431,42 +5596,6 @@
                 <a:ea typeface="NanumGothic"/>
                 <a:cs typeface="NanumGothic"/>
               </a:rPr>
-              <a:t>그래프 · 남은 비율 (%) · stack.png</a:t>
-            </a:r>
-          </a:p>
-        </p:txBody>
-      </p:sp>
-      <p:sp>
-        <p:nvSpPr>
-          <p:cNvPr id="11" name="audit:source"/>
-          <p:cNvSpPr txBox="1"/>
-          <p:nvPr/>
-        </p:nvSpPr>
-        <p:spPr>
-          <a:xfrm>
-            <a:off x="777240" y="6382512"/>
-            <a:ext cx="10972800" cy="274320"/>
-          </a:xfrm>
-          <a:prstGeom prst="rect">
-            <a:avLst/>
-          </a:prstGeom>
-          <a:noFill/>
-        </p:spPr>
-        <p:txBody>
-          <a:bodyPr wrap="square" lIns="0" rIns="0" tIns="0" bIns="0">
-            <a:spAutoFit/>
-          </a:bodyPr>
-          <a:lstStyle/>
-          <a:p>
-            <a:r>
-              <a:rPr sz="1000" b="0">
-                <a:solidFill>
-                  <a:srgbClr val="93A4B5"/>
-                </a:solidFill>
-                <a:latin typeface="NanumGothic"/>
-                <a:ea typeface="NanumGothic"/>
-                <a:cs typeface="NanumGothic"/>
-              </a:rPr>
               <a:t>experiments/exp06_other_levers.py</a:t>
             </a:r>
           </a:p>
@@ -5474,13 +5603,13 @@
       </p:sp>
       <p:sp>
         <p:nvSpPr>
-          <p:cNvPr id="12" name="audit:footer"/>
-          <p:cNvSpPr txBox="1"/>
-          <p:nvPr/>
-        </p:nvSpPr>
-        <p:spPr>
-          <a:xfrm>
-            <a:off x="777240" y="6583680"/>
+          <p:cNvPr id="11" name="audit:footer"/>
+          <p:cNvSpPr txBox="1"/>
+          <p:nvPr/>
+        </p:nvSpPr>
+        <p:spPr>
+          <a:xfrm>
+            <a:off x="640080" y="6419088"/>
             <a:ext cx="10972800" cy="256032"/>
           </a:xfrm>
           <a:prstGeom prst="rect">
@@ -5644,7 +5773,7 @@
                 <a:ea typeface="NanumGothic"/>
                 <a:cs typeface="NanumGothic"/>
               </a:rPr>
-              <a:t>저장 API 로그 재계산</a:t>
+              <a:t>정책 시나리오 재생</a:t>
             </a:r>
           </a:p>
         </p:txBody>
@@ -5680,7 +5809,7 @@
                 <a:ea typeface="NanumGothic"/>
                 <a:cs typeface="NanumGothic"/>
               </a:rPr>
-              <a:t>안 보이는 사고 토큰</a:t>
+              <a:t>작은 모델이 지휘한다</a:t>
             </a:r>
           </a:p>
         </p:txBody>
@@ -5716,7 +5845,7 @@
                 <a:ea typeface="NanumGothic"/>
                 <a:cs typeface="NanumGothic"/>
               </a:rPr>
-              <a:t>199.47배 (기존 환산 240.02배)</a:t>
+              <a:t>사다리 2.81배 (1턴 27% · 2턴 43%)</a:t>
             </a:r>
           </a:p>
         </p:txBody>
@@ -5752,7 +5881,7 @@
                 <a:ea typeface="NanumGothic"/>
                 <a:cs typeface="NanumGothic"/>
               </a:rPr>
-              <a:t>같은 문제를 조건당 6회 실행한 저장 로그 30행</a:t>
+              <a:t>실패가 반복되면 격차가 커진다 — 6회 2.80배</a:t>
             </a:r>
           </a:p>
         </p:txBody>
@@ -5788,7 +5917,7 @@
                 <a:ea typeface="NanumGothic"/>
                 <a:cs typeface="NanumGothic"/>
               </a:rPr>
-              <a:t>사고가 난 호출에서 사고 토큰 비중 99.625%</a:t>
+              <a:t>짧은 리워크에서도 이득 — 1턴 27% · 2턴 43%</a:t>
             </a:r>
           </a:p>
         </p:txBody>
@@ -5824,7 +5953,7 @@
                 <a:ea typeface="NanumGothic"/>
                 <a:cs typeface="NanumGothic"/>
               </a:rPr>
-              <a:t>예산을 지정하지 않으면 사실상 '무제한' — 명시적으로 정한다</a:t>
+              <a:t>respec이면 실행 전에 멈추므로 실행 비용만 계산</a:t>
             </a:r>
           </a:p>
         </p:txBody>
@@ -5860,7 +5989,7 @@
                 <a:ea typeface="NanumGothic"/>
                 <a:cs typeface="NanumGothic"/>
               </a:rPr>
-              <a:t>results/thinking_sweep.jsonl (30 rows)</a:t>
+              <a:t>analysis/lean_vs_full.py</a:t>
             </a:r>
           </a:p>
         </p:txBody>
@@ -6037,7 +6166,7 @@
                 <a:ea typeface="NanumGothic"/>
                 <a:cs typeface="NanumGothic"/>
               </a:rPr>
-              <a:t>저장 로그 80행 재계산</a:t>
+              <a:t>순차 시나리오</a:t>
             </a:r>
           </a:p>
         </p:txBody>
@@ -6050,7 +6179,7 @@
         </p:nvSpPr>
         <p:spPr>
           <a:xfrm>
-            <a:off x="640080" y="822960"/>
+            <a:off x="640080" y="566928"/>
             <a:ext cx="10881360" cy="822960"/>
           </a:xfrm>
           <a:prstGeom prst="rect">
@@ -6073,7 +6202,7 @@
                 <a:ea typeface="NanumGothic"/>
                 <a:cs typeface="NanumGothic"/>
               </a:rPr>
-              <a:t>언어별 비용은 지표마다 다르다</a:t>
+              <a:t>다섯 레버를 겹치면</a:t>
             </a:r>
           </a:p>
         </p:txBody>
@@ -6086,7 +6215,7 @@
         </p:nvSpPr>
         <p:spPr>
           <a:xfrm>
-            <a:off x="640080" y="1783080"/>
+            <a:off x="640080" y="1188720"/>
             <a:ext cx="10881360" cy="777240"/>
           </a:xfrm>
           <a:prstGeom prst="rect">
@@ -6109,7 +6238,7 @@
                 <a:ea typeface="NanumGothic"/>
                 <a:cs typeface="NanumGothic"/>
               </a:rPr>
-              <a:t>호출당 1.364배 · 0.729배</a:t>
+              <a:t>잔여 14.18%</a:t>
             </a:r>
           </a:p>
         </p:txBody>
@@ -6122,7 +6251,7 @@
         </p:nvSpPr>
         <p:spPr>
           <a:xfrm>
-            <a:off x="777240" y="2862072"/>
+            <a:off x="777240" y="1920240"/>
             <a:ext cx="10652760" cy="612648"/>
           </a:xfrm>
           <a:prstGeom prst="rect">
@@ -6145,7 +6274,7 @@
                 <a:ea typeface="NanumGothic"/>
                 <a:cs typeface="NanumGothic"/>
               </a:rPr>
-              <a:t>문자당(기존 환산 단가) 3.027배 · 1.363배</a:t>
+              <a:t>시맨틱 캐시 → 라우팅 → 캐싱 → effort → 배치</a:t>
             </a:r>
           </a:p>
         </p:txBody>
@@ -6158,7 +6287,7 @@
         </p:nvSpPr>
         <p:spPr>
           <a:xfrm>
-            <a:off x="777240" y="3502152"/>
+            <a:off x="777240" y="2359152"/>
             <a:ext cx="10652760" cy="612648"/>
           </a:xfrm>
           <a:prstGeom prst="rect">
@@ -6181,71 +6310,59 @@
                 <a:ea typeface="NanumGothic"/>
                 <a:cs typeface="NanumGothic"/>
               </a:rPr>
-              <a:t>같은 과제라도 언어에 따라 생성 길이가 달라진다</a:t>
-            </a:r>
-          </a:p>
-        </p:txBody>
-      </p:sp>
-      <p:sp>
-        <p:nvSpPr>
-          <p:cNvPr id="9" name="audit:body-2"/>
-          <p:cNvSpPr txBox="1"/>
-          <p:nvPr/>
-        </p:nvSpPr>
-        <p:spPr>
-          <a:xfrm>
-            <a:off x="777240" y="4142231"/>
-            <a:ext cx="10652760" cy="612648"/>
-          </a:xfrm>
-          <a:prstGeom prst="rect">
-            <a:avLst/>
-          </a:prstGeom>
-          <a:noFill/>
-        </p:spPr>
-        <p:txBody>
-          <a:bodyPr wrap="square" lIns="0" rIns="0" tIns="0" bIns="0">
-            <a:spAutoFit/>
-          </a:bodyPr>
-          <a:lstStyle/>
-          <a:p>
-            <a:r>
-              <a:rPr sz="1750" b="0">
-                <a:solidFill>
-                  <a:srgbClr val="ECF1F6"/>
-                </a:solidFill>
-                <a:latin typeface="NanumGothic"/>
-                <a:ea typeface="NanumGothic"/>
-                <a:cs typeface="NanumGothic"/>
-              </a:rPr>
-              <a:t>지표를 섞으면 결론이 뒤집힌다</a:t>
-            </a:r>
-          </a:p>
-        </p:txBody>
-      </p:sp>
-      <p:sp>
-        <p:nvSpPr>
-          <p:cNvPr id="10" name="audit:source"/>
-          <p:cNvSpPr txBox="1"/>
-          <p:nvPr/>
-        </p:nvSpPr>
-        <p:spPr>
-          <a:xfrm>
-            <a:off x="640080" y="6080760"/>
-            <a:ext cx="10972800" cy="274320"/>
-          </a:xfrm>
-          <a:prstGeom prst="rect">
-            <a:avLst/>
-          </a:prstGeom>
-          <a:noFill/>
-        </p:spPr>
-        <p:txBody>
-          <a:bodyPr wrap="square" lIns="0" rIns="0" tIns="0" bIns="0">
-            <a:spAutoFit/>
-          </a:bodyPr>
-          <a:lstStyle/>
-          <a:p>
-            <a:r>
-              <a:rPr sz="1000" b="0">
+              <a:t>각 레버가 자기 조건을 만족할 때의 순차 산술</a:t>
+            </a:r>
+          </a:p>
+        </p:txBody>
+      </p:sp>
+      <p:pic>
+        <p:nvPicPr>
+          <p:cNvPr id="9" name="Picture 8" descr="stack.png"/>
+          <p:cNvPicPr>
+            <a:picLocks noChangeAspect="1"/>
+          </p:cNvPicPr>
+          <p:nvPr/>
+        </p:nvPicPr>
+        <p:blipFill>
+          <a:blip r:embed="rId2"/>
+          <a:stretch>
+            <a:fillRect/>
+          </a:stretch>
+        </p:blipFill>
+        <p:spPr>
+          <a:xfrm>
+            <a:off x="980030" y="2670048"/>
+            <a:ext cx="10247179" cy="3529584"/>
+          </a:xfrm>
+          <a:prstGeom prst="rect">
+            <a:avLst/>
+          </a:prstGeom>
+        </p:spPr>
+      </p:pic>
+      <p:sp>
+        <p:nvSpPr>
+          <p:cNvPr id="10" name="audit:chart-caption"/>
+          <p:cNvSpPr txBox="1"/>
+          <p:nvPr/>
+        </p:nvSpPr>
+        <p:spPr>
+          <a:xfrm>
+            <a:off x="777240" y="6217920"/>
+            <a:ext cx="5120640" cy="219456"/>
+          </a:xfrm>
+          <a:prstGeom prst="rect">
+            <a:avLst/>
+          </a:prstGeom>
+          <a:noFill/>
+        </p:spPr>
+        <p:txBody>
+          <a:bodyPr wrap="square" lIns="0" rIns="0" tIns="0" bIns="0">
+            <a:spAutoFit/>
+          </a:bodyPr>
+          <a:lstStyle/>
+          <a:p>
+            <a:r>
+              <a:rPr sz="950" b="0">
                 <a:solidFill>
                   <a:srgbClr val="93A4B5"/>
                 </a:solidFill>
@@ -6253,35 +6370,71 @@
                 <a:ea typeface="NanumGothic"/>
                 <a:cs typeface="NanumGothic"/>
               </a:rPr>
-              <a:t>tools/stats_test.py · storage logs</a:t>
-            </a:r>
-          </a:p>
-        </p:txBody>
-      </p:sp>
-      <p:sp>
-        <p:nvSpPr>
-          <p:cNvPr id="11" name="audit:footer"/>
-          <p:cNvSpPr txBox="1"/>
-          <p:nvPr/>
-        </p:nvSpPr>
-        <p:spPr>
-          <a:xfrm>
-            <a:off x="640080" y="6419088"/>
-            <a:ext cx="10972800" cy="256032"/>
-          </a:xfrm>
-          <a:prstGeom prst="rect">
-            <a:avLst/>
-          </a:prstGeom>
-          <a:noFill/>
-        </p:spPr>
-        <p:txBody>
-          <a:bodyPr wrap="square" lIns="0" rIns="0" tIns="0" bIns="0">
-            <a:spAutoFit/>
-          </a:bodyPr>
-          <a:lstStyle/>
-          <a:p>
-            <a:r>
-              <a:rPr sz="1000" b="0">
+              <a:t>그래프 · 남은 비율 (%) · stack.png</a:t>
+            </a:r>
+          </a:p>
+        </p:txBody>
+      </p:sp>
+      <p:sp>
+        <p:nvSpPr>
+          <p:cNvPr id="11" name="audit:source"/>
+          <p:cNvSpPr txBox="1"/>
+          <p:nvPr/>
+        </p:nvSpPr>
+        <p:spPr>
+          <a:xfrm>
+            <a:off x="6035040" y="6217920"/>
+            <a:ext cx="5394960" cy="219456"/>
+          </a:xfrm>
+          <a:prstGeom prst="rect">
+            <a:avLst/>
+          </a:prstGeom>
+          <a:noFill/>
+        </p:spPr>
+        <p:txBody>
+          <a:bodyPr wrap="square" lIns="0" rIns="0" tIns="0" bIns="0">
+            <a:spAutoFit/>
+          </a:bodyPr>
+          <a:lstStyle/>
+          <a:p>
+            <a:r>
+              <a:rPr sz="950" b="0">
+                <a:solidFill>
+                  <a:srgbClr val="93A4B5"/>
+                </a:solidFill>
+                <a:latin typeface="NanumGothic"/>
+                <a:ea typeface="NanumGothic"/>
+                <a:cs typeface="NanumGothic"/>
+              </a:rPr>
+              <a:t>experiments/exp06_other_levers.py</a:t>
+            </a:r>
+          </a:p>
+        </p:txBody>
+      </p:sp>
+      <p:sp>
+        <p:nvSpPr>
+          <p:cNvPr id="12" name="audit:footer"/>
+          <p:cNvSpPr txBox="1"/>
+          <p:nvPr/>
+        </p:nvSpPr>
+        <p:spPr>
+          <a:xfrm>
+            <a:off x="777240" y="6620256"/>
+            <a:ext cx="10972800" cy="219456"/>
+          </a:xfrm>
+          <a:prstGeom prst="rect">
+            <a:avLst/>
+          </a:prstGeom>
+          <a:noFill/>
+        </p:spPr>
+        <p:txBody>
+          <a:bodyPr wrap="square" lIns="0" rIns="0" tIns="0" bIns="0">
+            <a:spAutoFit/>
+          </a:bodyPr>
+          <a:lstStyle/>
+          <a:p>
+            <a:r>
+              <a:rPr sz="950" b="0">
                 <a:solidFill>
                   <a:srgbClr val="93A4B5"/>
                 </a:solidFill>
@@ -6430,7 +6583,7 @@
                 <a:ea typeface="NanumGothic"/>
                 <a:cs typeface="NanumGothic"/>
               </a:rPr>
-              <a:t>운영 주의</a:t>
+              <a:t>저장 API 로그 재계산</a:t>
             </a:r>
           </a:p>
         </p:txBody>
@@ -6466,7 +6619,7 @@
                 <a:ea typeface="NanumGothic"/>
                 <a:cs typeface="NanumGothic"/>
               </a:rPr>
-              <a:t>캐싱과 개인정보</a:t>
+              <a:t>안 보이는 사고 토큰</a:t>
             </a:r>
           </a:p>
         </p:txBody>
@@ -6502,7 +6655,7 @@
                 <a:ea typeface="NanumGothic"/>
                 <a:cs typeface="NanumGothic"/>
               </a:rPr>
-              <a:t>개인화 · 실시간 응답은 캐싱 금지</a:t>
+              <a:t>199.47배 (기존 환산 240.02배)</a:t>
             </a:r>
           </a:p>
         </p:txBody>
@@ -6538,7 +6691,7 @@
                 <a:ea typeface="NanumGothic"/>
                 <a:cs typeface="NanumGothic"/>
               </a:rPr>
-              <a:t>멀티턴은 캐시 키에 컨텍스트를 포함</a:t>
+              <a:t>같은 문제를 조건당 6회 실행한 저장 로그 30행</a:t>
             </a:r>
           </a:p>
         </p:txBody>
@@ -6574,7 +6727,7 @@
                 <a:ea typeface="NanumGothic"/>
                 <a:cs typeface="NanumGothic"/>
               </a:rPr>
-              <a:t>시맨틱 캐시 임계값이 느슨하면 '비슷하지만 틀린 답'을 준다</a:t>
+              <a:t>사고가 난 호출에서 사고 토큰 비중 99.625%</a:t>
             </a:r>
           </a:p>
         </p:txBody>
@@ -6610,7 +6763,7 @@
                 <a:ea typeface="NanumGothic"/>
                 <a:cs typeface="NanumGothic"/>
               </a:rPr>
-              <a:t>삭제·TTL 정책을 프롬프트 설계와 함께 정한다</a:t>
+              <a:t>예산을 지정하지 않으면 사실상 '무제한' — 명시적으로 정한다</a:t>
             </a:r>
           </a:p>
         </p:txBody>
@@ -6646,7 +6799,7 @@
                 <a:ea typeface="NanumGothic"/>
                 <a:cs typeface="NanumGothic"/>
               </a:rPr>
-              <a:t>experiments/exp06_other_levers.py</a:t>
+              <a:t>results/thinking_sweep.jsonl (30 rows)</a:t>
             </a:r>
           </a:p>
         </p:txBody>
@@ -6823,6 +6976,792 @@
                 <a:ea typeface="NanumGothic"/>
                 <a:cs typeface="NanumGothic"/>
               </a:rPr>
+              <a:t>저장 로그 80행 재계산</a:t>
+            </a:r>
+          </a:p>
+        </p:txBody>
+      </p:sp>
+      <p:sp>
+        <p:nvSpPr>
+          <p:cNvPr id="5" name="audit:title"/>
+          <p:cNvSpPr txBox="1"/>
+          <p:nvPr/>
+        </p:nvSpPr>
+        <p:spPr>
+          <a:xfrm>
+            <a:off x="640080" y="822960"/>
+            <a:ext cx="10881360" cy="822960"/>
+          </a:xfrm>
+          <a:prstGeom prst="rect">
+            <a:avLst/>
+          </a:prstGeom>
+          <a:noFill/>
+        </p:spPr>
+        <p:txBody>
+          <a:bodyPr wrap="square" lIns="0" rIns="0" tIns="0" bIns="0">
+            <a:spAutoFit/>
+          </a:bodyPr>
+          <a:lstStyle/>
+          <a:p>
+            <a:r>
+              <a:rPr sz="2900" b="1">
+                <a:solidFill>
+                  <a:srgbClr val="ECF1F6"/>
+                </a:solidFill>
+                <a:latin typeface="NanumGothic"/>
+                <a:ea typeface="NanumGothic"/>
+                <a:cs typeface="NanumGothic"/>
+              </a:rPr>
+              <a:t>언어별 비용은 지표마다 다르다</a:t>
+            </a:r>
+          </a:p>
+        </p:txBody>
+      </p:sp>
+      <p:sp>
+        <p:nvSpPr>
+          <p:cNvPr id="6" name="audit:hero"/>
+          <p:cNvSpPr txBox="1"/>
+          <p:nvPr/>
+        </p:nvSpPr>
+        <p:spPr>
+          <a:xfrm>
+            <a:off x="640080" y="1783080"/>
+            <a:ext cx="10881360" cy="777240"/>
+          </a:xfrm>
+          <a:prstGeom prst="rect">
+            <a:avLst/>
+          </a:prstGeom>
+          <a:noFill/>
+        </p:spPr>
+        <p:txBody>
+          <a:bodyPr wrap="square" lIns="0" rIns="0" tIns="0" bIns="0">
+            <a:spAutoFit/>
+          </a:bodyPr>
+          <a:lstStyle/>
+          <a:p>
+            <a:r>
+              <a:rPr sz="2900" b="1">
+                <a:solidFill>
+                  <a:srgbClr val="36D399"/>
+                </a:solidFill>
+                <a:latin typeface="NanumGothic"/>
+                <a:ea typeface="NanumGothic"/>
+                <a:cs typeface="NanumGothic"/>
+              </a:rPr>
+              <a:t>호출당 1.364배 · 0.729배</a:t>
+            </a:r>
+          </a:p>
+        </p:txBody>
+      </p:sp>
+      <p:sp>
+        <p:nvSpPr>
+          <p:cNvPr id="7" name="audit:body-0"/>
+          <p:cNvSpPr txBox="1"/>
+          <p:nvPr/>
+        </p:nvSpPr>
+        <p:spPr>
+          <a:xfrm>
+            <a:off x="777240" y="2862072"/>
+            <a:ext cx="10652760" cy="612648"/>
+          </a:xfrm>
+          <a:prstGeom prst="rect">
+            <a:avLst/>
+          </a:prstGeom>
+          <a:noFill/>
+        </p:spPr>
+        <p:txBody>
+          <a:bodyPr wrap="square" lIns="0" rIns="0" tIns="0" bIns="0">
+            <a:spAutoFit/>
+          </a:bodyPr>
+          <a:lstStyle/>
+          <a:p>
+            <a:r>
+              <a:rPr sz="1750" b="0">
+                <a:solidFill>
+                  <a:srgbClr val="ECF1F6"/>
+                </a:solidFill>
+                <a:latin typeface="NanumGothic"/>
+                <a:ea typeface="NanumGothic"/>
+                <a:cs typeface="NanumGothic"/>
+              </a:rPr>
+              <a:t>문자당(기존 환산 단가) 3.027배 · 1.363배</a:t>
+            </a:r>
+          </a:p>
+        </p:txBody>
+      </p:sp>
+      <p:sp>
+        <p:nvSpPr>
+          <p:cNvPr id="8" name="audit:body-1"/>
+          <p:cNvSpPr txBox="1"/>
+          <p:nvPr/>
+        </p:nvSpPr>
+        <p:spPr>
+          <a:xfrm>
+            <a:off x="777240" y="3502152"/>
+            <a:ext cx="10652760" cy="612648"/>
+          </a:xfrm>
+          <a:prstGeom prst="rect">
+            <a:avLst/>
+          </a:prstGeom>
+          <a:noFill/>
+        </p:spPr>
+        <p:txBody>
+          <a:bodyPr wrap="square" lIns="0" rIns="0" tIns="0" bIns="0">
+            <a:spAutoFit/>
+          </a:bodyPr>
+          <a:lstStyle/>
+          <a:p>
+            <a:r>
+              <a:rPr sz="1750" b="0">
+                <a:solidFill>
+                  <a:srgbClr val="ECF1F6"/>
+                </a:solidFill>
+                <a:latin typeface="NanumGothic"/>
+                <a:ea typeface="NanumGothic"/>
+                <a:cs typeface="NanumGothic"/>
+              </a:rPr>
+              <a:t>같은 과제라도 언어에 따라 생성 길이가 달라진다</a:t>
+            </a:r>
+          </a:p>
+        </p:txBody>
+      </p:sp>
+      <p:sp>
+        <p:nvSpPr>
+          <p:cNvPr id="9" name="audit:body-2"/>
+          <p:cNvSpPr txBox="1"/>
+          <p:nvPr/>
+        </p:nvSpPr>
+        <p:spPr>
+          <a:xfrm>
+            <a:off x="777240" y="4142231"/>
+            <a:ext cx="10652760" cy="612648"/>
+          </a:xfrm>
+          <a:prstGeom prst="rect">
+            <a:avLst/>
+          </a:prstGeom>
+          <a:noFill/>
+        </p:spPr>
+        <p:txBody>
+          <a:bodyPr wrap="square" lIns="0" rIns="0" tIns="0" bIns="0">
+            <a:spAutoFit/>
+          </a:bodyPr>
+          <a:lstStyle/>
+          <a:p>
+            <a:r>
+              <a:rPr sz="1750" b="0">
+                <a:solidFill>
+                  <a:srgbClr val="ECF1F6"/>
+                </a:solidFill>
+                <a:latin typeface="NanumGothic"/>
+                <a:ea typeface="NanumGothic"/>
+                <a:cs typeface="NanumGothic"/>
+              </a:rPr>
+              <a:t>지표를 섞으면 결론이 뒤집힌다</a:t>
+            </a:r>
+          </a:p>
+        </p:txBody>
+      </p:sp>
+      <p:sp>
+        <p:nvSpPr>
+          <p:cNvPr id="10" name="audit:source"/>
+          <p:cNvSpPr txBox="1"/>
+          <p:nvPr/>
+        </p:nvSpPr>
+        <p:spPr>
+          <a:xfrm>
+            <a:off x="640080" y="6080760"/>
+            <a:ext cx="10972800" cy="274320"/>
+          </a:xfrm>
+          <a:prstGeom prst="rect">
+            <a:avLst/>
+          </a:prstGeom>
+          <a:noFill/>
+        </p:spPr>
+        <p:txBody>
+          <a:bodyPr wrap="square" lIns="0" rIns="0" tIns="0" bIns="0">
+            <a:spAutoFit/>
+          </a:bodyPr>
+          <a:lstStyle/>
+          <a:p>
+            <a:r>
+              <a:rPr sz="1000" b="0">
+                <a:solidFill>
+                  <a:srgbClr val="93A4B5"/>
+                </a:solidFill>
+                <a:latin typeface="NanumGothic"/>
+                <a:ea typeface="NanumGothic"/>
+                <a:cs typeface="NanumGothic"/>
+              </a:rPr>
+              <a:t>tools/stats_test.py · storage logs</a:t>
+            </a:r>
+          </a:p>
+        </p:txBody>
+      </p:sp>
+      <p:sp>
+        <p:nvSpPr>
+          <p:cNvPr id="11" name="audit:footer"/>
+          <p:cNvSpPr txBox="1"/>
+          <p:nvPr/>
+        </p:nvSpPr>
+        <p:spPr>
+          <a:xfrm>
+            <a:off x="640080" y="6419088"/>
+            <a:ext cx="10972800" cy="256032"/>
+          </a:xfrm>
+          <a:prstGeom prst="rect">
+            <a:avLst/>
+          </a:prstGeom>
+          <a:noFill/>
+        </p:spPr>
+        <p:txBody>
+          <a:bodyPr wrap="square" lIns="0" rIns="0" tIns="0" bIns="0">
+            <a:spAutoFit/>
+          </a:bodyPr>
+          <a:lstStyle/>
+          <a:p>
+            <a:r>
+              <a:rPr sz="1000" b="0">
+                <a:solidFill>
+                  <a:srgbClr val="93A4B5"/>
+                </a:solidFill>
+                <a:latin typeface="NanumGothic"/>
+                <a:ea typeface="NanumGothic"/>
+                <a:cs typeface="NanumGothic"/>
+              </a:rPr>
+              <a:t>2026-09-20  ·  근거와 조건을 함께 인용</a:t>
+            </a:r>
+          </a:p>
+        </p:txBody>
+      </p:sp>
+    </p:spTree>
+  </p:cSld>
+  <p:clrMapOvr>
+    <a:masterClrMapping/>
+  </p:clrMapOvr>
+</p:sld>
+</file>
+
+<file path=ppt/slides/slide15.xml><?xml version="1.0" encoding="utf-8"?>
+<p:sld xmlns:a="http://schemas.openxmlformats.org/drawingml/2006/main" xmlns:p="http://schemas.openxmlformats.org/presentationml/2006/main" xmlns:r="http://schemas.openxmlformats.org/officeDocument/2006/relationships">
+  <p:cSld>
+    <p:bg>
+      <p:bgPr>
+        <a:solidFill>
+          <a:srgbClr val="0E141B"/>
+        </a:solidFill>
+        <a:effectLst/>
+      </p:bgPr>
+    </p:bg>
+    <p:spTree>
+      <p:nvGrpSpPr>
+        <p:cNvPr id="1" name=""/>
+        <p:cNvGrpSpPr/>
+        <p:nvPr/>
+      </p:nvGrpSpPr>
+      <p:grpSpPr/>
+      <p:sp>
+        <p:nvSpPr>
+          <p:cNvPr id="2" name="Rectangle 1"/>
+          <p:cNvSpPr/>
+          <p:nvPr/>
+        </p:nvSpPr>
+        <p:spPr>
+          <a:xfrm>
+            <a:off x="0" y="0"/>
+            <a:ext cx="100584" cy="6858000"/>
+          </a:xfrm>
+          <a:prstGeom prst="rect">
+            <a:avLst/>
+          </a:prstGeom>
+          <a:solidFill>
+            <a:srgbClr val="36D399"/>
+          </a:solidFill>
+          <a:ln>
+            <a:noFill/>
+          </a:ln>
+        </p:spPr>
+        <p:style>
+          <a:lnRef idx="1">
+            <a:schemeClr val="accent1"/>
+          </a:lnRef>
+          <a:fillRef idx="3">
+            <a:schemeClr val="accent1"/>
+          </a:fillRef>
+          <a:effectRef idx="2">
+            <a:schemeClr val="accent1"/>
+          </a:effectRef>
+          <a:fontRef idx="minor">
+            <a:schemeClr val="lt1"/>
+          </a:fontRef>
+        </p:style>
+        <p:txBody>
+          <a:bodyPr rtlCol="0" anchor="ctr"/>
+          <a:lstStyle/>
+          <a:p>
+            <a:pPr algn="ctr"/>
+          </a:p>
+        </p:txBody>
+      </p:sp>
+      <p:sp>
+        <p:nvSpPr>
+          <p:cNvPr id="3" name="audit:index"/>
+          <p:cNvSpPr txBox="1"/>
+          <p:nvPr/>
+        </p:nvSpPr>
+        <p:spPr>
+          <a:xfrm>
+            <a:off x="640080" y="274320"/>
+            <a:ext cx="4572000" cy="274320"/>
+          </a:xfrm>
+          <a:prstGeom prst="rect">
+            <a:avLst/>
+          </a:prstGeom>
+          <a:noFill/>
+        </p:spPr>
+        <p:txBody>
+          <a:bodyPr wrap="square" lIns="0" rIns="0" tIns="0" bIns="0">
+            <a:spAutoFit/>
+          </a:bodyPr>
+          <a:lstStyle/>
+          <a:p>
+            <a:r>
+              <a:rPr sz="1100" b="0">
+                <a:solidFill>
+                  <a:srgbClr val="93A4B5"/>
+                </a:solidFill>
+                <a:latin typeface="NanumGothic"/>
+                <a:ea typeface="NanumGothic"/>
+                <a:cs typeface="NanumGothic"/>
+              </a:rPr>
+              <a:t>TOKEN COST LAB  /  15</a:t>
+            </a:r>
+          </a:p>
+        </p:txBody>
+      </p:sp>
+      <p:sp>
+        <p:nvSpPr>
+          <p:cNvPr id="4" name="audit:scope"/>
+          <p:cNvSpPr txBox="1"/>
+          <p:nvPr/>
+        </p:nvSpPr>
+        <p:spPr>
+          <a:xfrm>
+            <a:off x="5760720" y="274320"/>
+            <a:ext cx="5760720" cy="274320"/>
+          </a:xfrm>
+          <a:prstGeom prst="rect">
+            <a:avLst/>
+          </a:prstGeom>
+          <a:noFill/>
+        </p:spPr>
+        <p:txBody>
+          <a:bodyPr wrap="square" lIns="0" rIns="0" tIns="0" bIns="0">
+            <a:spAutoFit/>
+          </a:bodyPr>
+          <a:lstStyle/>
+          <a:p>
+            <a:r>
+              <a:rPr sz="1100" b="0">
+                <a:solidFill>
+                  <a:srgbClr val="36D399"/>
+                </a:solidFill>
+                <a:latin typeface="NanumGothic"/>
+                <a:ea typeface="NanumGothic"/>
+                <a:cs typeface="NanumGothic"/>
+              </a:rPr>
+              <a:t>운영 주의</a:t>
+            </a:r>
+          </a:p>
+        </p:txBody>
+      </p:sp>
+      <p:sp>
+        <p:nvSpPr>
+          <p:cNvPr id="5" name="audit:title"/>
+          <p:cNvSpPr txBox="1"/>
+          <p:nvPr/>
+        </p:nvSpPr>
+        <p:spPr>
+          <a:xfrm>
+            <a:off x="640080" y="822960"/>
+            <a:ext cx="10881360" cy="822960"/>
+          </a:xfrm>
+          <a:prstGeom prst="rect">
+            <a:avLst/>
+          </a:prstGeom>
+          <a:noFill/>
+        </p:spPr>
+        <p:txBody>
+          <a:bodyPr wrap="square" lIns="0" rIns="0" tIns="0" bIns="0">
+            <a:spAutoFit/>
+          </a:bodyPr>
+          <a:lstStyle/>
+          <a:p>
+            <a:r>
+              <a:rPr sz="2900" b="1">
+                <a:solidFill>
+                  <a:srgbClr val="ECF1F6"/>
+                </a:solidFill>
+                <a:latin typeface="NanumGothic"/>
+                <a:ea typeface="NanumGothic"/>
+                <a:cs typeface="NanumGothic"/>
+              </a:rPr>
+              <a:t>캐싱과 개인정보</a:t>
+            </a:r>
+          </a:p>
+        </p:txBody>
+      </p:sp>
+      <p:sp>
+        <p:nvSpPr>
+          <p:cNvPr id="6" name="audit:hero"/>
+          <p:cNvSpPr txBox="1"/>
+          <p:nvPr/>
+        </p:nvSpPr>
+        <p:spPr>
+          <a:xfrm>
+            <a:off x="640080" y="1783080"/>
+            <a:ext cx="10881360" cy="777240"/>
+          </a:xfrm>
+          <a:prstGeom prst="rect">
+            <a:avLst/>
+          </a:prstGeom>
+          <a:noFill/>
+        </p:spPr>
+        <p:txBody>
+          <a:bodyPr wrap="square" lIns="0" rIns="0" tIns="0" bIns="0">
+            <a:spAutoFit/>
+          </a:bodyPr>
+          <a:lstStyle/>
+          <a:p>
+            <a:r>
+              <a:rPr sz="2900" b="1">
+                <a:solidFill>
+                  <a:srgbClr val="36D399"/>
+                </a:solidFill>
+                <a:latin typeface="NanumGothic"/>
+                <a:ea typeface="NanumGothic"/>
+                <a:cs typeface="NanumGothic"/>
+              </a:rPr>
+              <a:t>개인화 · 실시간 응답은 캐싱 금지</a:t>
+            </a:r>
+          </a:p>
+        </p:txBody>
+      </p:sp>
+      <p:sp>
+        <p:nvSpPr>
+          <p:cNvPr id="7" name="audit:body-0"/>
+          <p:cNvSpPr txBox="1"/>
+          <p:nvPr/>
+        </p:nvSpPr>
+        <p:spPr>
+          <a:xfrm>
+            <a:off x="777240" y="2862072"/>
+            <a:ext cx="10652760" cy="612648"/>
+          </a:xfrm>
+          <a:prstGeom prst="rect">
+            <a:avLst/>
+          </a:prstGeom>
+          <a:noFill/>
+        </p:spPr>
+        <p:txBody>
+          <a:bodyPr wrap="square" lIns="0" rIns="0" tIns="0" bIns="0">
+            <a:spAutoFit/>
+          </a:bodyPr>
+          <a:lstStyle/>
+          <a:p>
+            <a:r>
+              <a:rPr sz="1750" b="0">
+                <a:solidFill>
+                  <a:srgbClr val="ECF1F6"/>
+                </a:solidFill>
+                <a:latin typeface="NanumGothic"/>
+                <a:ea typeface="NanumGothic"/>
+                <a:cs typeface="NanumGothic"/>
+              </a:rPr>
+              <a:t>멀티턴은 캐시 키에 컨텍스트를 포함</a:t>
+            </a:r>
+          </a:p>
+        </p:txBody>
+      </p:sp>
+      <p:sp>
+        <p:nvSpPr>
+          <p:cNvPr id="8" name="audit:body-1"/>
+          <p:cNvSpPr txBox="1"/>
+          <p:nvPr/>
+        </p:nvSpPr>
+        <p:spPr>
+          <a:xfrm>
+            <a:off x="777240" y="3502152"/>
+            <a:ext cx="10652760" cy="612648"/>
+          </a:xfrm>
+          <a:prstGeom prst="rect">
+            <a:avLst/>
+          </a:prstGeom>
+          <a:noFill/>
+        </p:spPr>
+        <p:txBody>
+          <a:bodyPr wrap="square" lIns="0" rIns="0" tIns="0" bIns="0">
+            <a:spAutoFit/>
+          </a:bodyPr>
+          <a:lstStyle/>
+          <a:p>
+            <a:r>
+              <a:rPr sz="1750" b="0">
+                <a:solidFill>
+                  <a:srgbClr val="ECF1F6"/>
+                </a:solidFill>
+                <a:latin typeface="NanumGothic"/>
+                <a:ea typeface="NanumGothic"/>
+                <a:cs typeface="NanumGothic"/>
+              </a:rPr>
+              <a:t>시맨틱 캐시 임계값이 느슨하면 '비슷하지만 틀린 답'을 준다</a:t>
+            </a:r>
+          </a:p>
+        </p:txBody>
+      </p:sp>
+      <p:sp>
+        <p:nvSpPr>
+          <p:cNvPr id="9" name="audit:body-2"/>
+          <p:cNvSpPr txBox="1"/>
+          <p:nvPr/>
+        </p:nvSpPr>
+        <p:spPr>
+          <a:xfrm>
+            <a:off x="777240" y="4142231"/>
+            <a:ext cx="10652760" cy="612648"/>
+          </a:xfrm>
+          <a:prstGeom prst="rect">
+            <a:avLst/>
+          </a:prstGeom>
+          <a:noFill/>
+        </p:spPr>
+        <p:txBody>
+          <a:bodyPr wrap="square" lIns="0" rIns="0" tIns="0" bIns="0">
+            <a:spAutoFit/>
+          </a:bodyPr>
+          <a:lstStyle/>
+          <a:p>
+            <a:r>
+              <a:rPr sz="1750" b="0">
+                <a:solidFill>
+                  <a:srgbClr val="ECF1F6"/>
+                </a:solidFill>
+                <a:latin typeface="NanumGothic"/>
+                <a:ea typeface="NanumGothic"/>
+                <a:cs typeface="NanumGothic"/>
+              </a:rPr>
+              <a:t>삭제·TTL 정책을 프롬프트 설계와 함께 정한다</a:t>
+            </a:r>
+          </a:p>
+        </p:txBody>
+      </p:sp>
+      <p:sp>
+        <p:nvSpPr>
+          <p:cNvPr id="10" name="audit:source"/>
+          <p:cNvSpPr txBox="1"/>
+          <p:nvPr/>
+        </p:nvSpPr>
+        <p:spPr>
+          <a:xfrm>
+            <a:off x="640080" y="6080760"/>
+            <a:ext cx="10972800" cy="274320"/>
+          </a:xfrm>
+          <a:prstGeom prst="rect">
+            <a:avLst/>
+          </a:prstGeom>
+          <a:noFill/>
+        </p:spPr>
+        <p:txBody>
+          <a:bodyPr wrap="square" lIns="0" rIns="0" tIns="0" bIns="0">
+            <a:spAutoFit/>
+          </a:bodyPr>
+          <a:lstStyle/>
+          <a:p>
+            <a:r>
+              <a:rPr sz="1000" b="0">
+                <a:solidFill>
+                  <a:srgbClr val="93A4B5"/>
+                </a:solidFill>
+                <a:latin typeface="NanumGothic"/>
+                <a:ea typeface="NanumGothic"/>
+                <a:cs typeface="NanumGothic"/>
+              </a:rPr>
+              <a:t>experiments/exp06_other_levers.py</a:t>
+            </a:r>
+          </a:p>
+        </p:txBody>
+      </p:sp>
+      <p:sp>
+        <p:nvSpPr>
+          <p:cNvPr id="11" name="audit:footer"/>
+          <p:cNvSpPr txBox="1"/>
+          <p:nvPr/>
+        </p:nvSpPr>
+        <p:spPr>
+          <a:xfrm>
+            <a:off x="640080" y="6419088"/>
+            <a:ext cx="10972800" cy="256032"/>
+          </a:xfrm>
+          <a:prstGeom prst="rect">
+            <a:avLst/>
+          </a:prstGeom>
+          <a:noFill/>
+        </p:spPr>
+        <p:txBody>
+          <a:bodyPr wrap="square" lIns="0" rIns="0" tIns="0" bIns="0">
+            <a:spAutoFit/>
+          </a:bodyPr>
+          <a:lstStyle/>
+          <a:p>
+            <a:r>
+              <a:rPr sz="1000" b="0">
+                <a:solidFill>
+                  <a:srgbClr val="93A4B5"/>
+                </a:solidFill>
+                <a:latin typeface="NanumGothic"/>
+                <a:ea typeface="NanumGothic"/>
+                <a:cs typeface="NanumGothic"/>
+              </a:rPr>
+              <a:t>2026-09-20  ·  근거와 조건을 함께 인용</a:t>
+            </a:r>
+          </a:p>
+        </p:txBody>
+      </p:sp>
+    </p:spTree>
+  </p:cSld>
+  <p:clrMapOvr>
+    <a:masterClrMapping/>
+  </p:clrMapOvr>
+</p:sld>
+</file>
+
+<file path=ppt/slides/slide16.xml><?xml version="1.0" encoding="utf-8"?>
+<p:sld xmlns:a="http://schemas.openxmlformats.org/drawingml/2006/main" xmlns:p="http://schemas.openxmlformats.org/presentationml/2006/main" xmlns:r="http://schemas.openxmlformats.org/officeDocument/2006/relationships">
+  <p:cSld>
+    <p:bg>
+      <p:bgPr>
+        <a:solidFill>
+          <a:srgbClr val="0E141B"/>
+        </a:solidFill>
+        <a:effectLst/>
+      </p:bgPr>
+    </p:bg>
+    <p:spTree>
+      <p:nvGrpSpPr>
+        <p:cNvPr id="1" name=""/>
+        <p:cNvGrpSpPr/>
+        <p:nvPr/>
+      </p:nvGrpSpPr>
+      <p:grpSpPr/>
+      <p:sp>
+        <p:nvSpPr>
+          <p:cNvPr id="2" name="Rectangle 1"/>
+          <p:cNvSpPr/>
+          <p:nvPr/>
+        </p:nvSpPr>
+        <p:spPr>
+          <a:xfrm>
+            <a:off x="0" y="0"/>
+            <a:ext cx="100584" cy="6858000"/>
+          </a:xfrm>
+          <a:prstGeom prst="rect">
+            <a:avLst/>
+          </a:prstGeom>
+          <a:solidFill>
+            <a:srgbClr val="36D399"/>
+          </a:solidFill>
+          <a:ln>
+            <a:noFill/>
+          </a:ln>
+        </p:spPr>
+        <p:style>
+          <a:lnRef idx="1">
+            <a:schemeClr val="accent1"/>
+          </a:lnRef>
+          <a:fillRef idx="3">
+            <a:schemeClr val="accent1"/>
+          </a:fillRef>
+          <a:effectRef idx="2">
+            <a:schemeClr val="accent1"/>
+          </a:effectRef>
+          <a:fontRef idx="minor">
+            <a:schemeClr val="lt1"/>
+          </a:fontRef>
+        </p:style>
+        <p:txBody>
+          <a:bodyPr rtlCol="0" anchor="ctr"/>
+          <a:lstStyle/>
+          <a:p>
+            <a:pPr algn="ctr"/>
+          </a:p>
+        </p:txBody>
+      </p:sp>
+      <p:sp>
+        <p:nvSpPr>
+          <p:cNvPr id="3" name="audit:index"/>
+          <p:cNvSpPr txBox="1"/>
+          <p:nvPr/>
+        </p:nvSpPr>
+        <p:spPr>
+          <a:xfrm>
+            <a:off x="640080" y="274320"/>
+            <a:ext cx="4572000" cy="274320"/>
+          </a:xfrm>
+          <a:prstGeom prst="rect">
+            <a:avLst/>
+          </a:prstGeom>
+          <a:noFill/>
+        </p:spPr>
+        <p:txBody>
+          <a:bodyPr wrap="square" lIns="0" rIns="0" tIns="0" bIns="0">
+            <a:spAutoFit/>
+          </a:bodyPr>
+          <a:lstStyle/>
+          <a:p>
+            <a:r>
+              <a:rPr sz="1100" b="0">
+                <a:solidFill>
+                  <a:srgbClr val="93A4B5"/>
+                </a:solidFill>
+                <a:latin typeface="NanumGothic"/>
+                <a:ea typeface="NanumGothic"/>
+                <a:cs typeface="NanumGothic"/>
+              </a:rPr>
+              <a:t>TOKEN COST LAB  /  16</a:t>
+            </a:r>
+          </a:p>
+        </p:txBody>
+      </p:sp>
+      <p:sp>
+        <p:nvSpPr>
+          <p:cNvPr id="4" name="audit:scope"/>
+          <p:cNvSpPr txBox="1"/>
+          <p:nvPr/>
+        </p:nvSpPr>
+        <p:spPr>
+          <a:xfrm>
+            <a:off x="5760720" y="274320"/>
+            <a:ext cx="5760720" cy="274320"/>
+          </a:xfrm>
+          <a:prstGeom prst="rect">
+            <a:avLst/>
+          </a:prstGeom>
+          <a:noFill/>
+        </p:spPr>
+        <p:txBody>
+          <a:bodyPr wrap="square" lIns="0" rIns="0" tIns="0" bIns="0">
+            <a:spAutoFit/>
+          </a:bodyPr>
+          <a:lstStyle/>
+          <a:p>
+            <a:r>
+              <a:rPr sz="1100" b="0">
+                <a:solidFill>
+                  <a:srgbClr val="36D399"/>
+                </a:solidFill>
+                <a:latin typeface="NanumGothic"/>
+                <a:ea typeface="NanumGothic"/>
+                <a:cs typeface="NanumGothic"/>
+              </a:rPr>
               <a:t>마무리</a:t>
             </a:r>
           </a:p>
@@ -7216,7 +8155,7 @@
                 <a:ea typeface="NanumGothic"/>
                 <a:cs typeface="NanumGothic"/>
               </a:rPr>
-              <a:t>비용 시나리오 (100콜)</a:t>
+              <a:t>심화 세션</a:t>
             </a:r>
           </a:p>
         </p:txBody>
@@ -7252,7 +8191,7 @@
                 <a:ea typeface="NanumGothic"/>
                 <a:cs typeface="NanumGothic"/>
               </a:rPr>
-              <a:t>캐싱 · 오늘 바로 켤 수 있는 레버</a:t>
+              <a:t>견적서의 나머지 항목</a:t>
             </a:r>
           </a:p>
         </p:txBody>
@@ -7288,7 +8227,7 @@
                 <a:ea typeface="NanumGothic"/>
                 <a:cs typeface="NanumGothic"/>
               </a:rPr>
-              <a:t>$8.55 → $3.22 (62.4% 절감)</a:t>
+              <a:t>원칙 5개로 다 못 줄인 비용은 어디 있나</a:t>
             </a:r>
           </a:p>
         </p:txBody>
@@ -7324,7 +8263,7 @@
                 <a:ea typeface="NanumGothic"/>
                 <a:cs typeface="NanumGothic"/>
               </a:rPr>
-              <a:t>쓰기 프리미엄은 두 번째 호출에서 회수된다</a:t>
+              <a:t>캐싱 · 압축 · 컴팩션 · 서브에이전트 · 라우팅 · 배치</a:t>
             </a:r>
           </a:p>
         </p:txBody>
@@ -7360,7 +8299,7 @@
                 <a:ea typeface="NanumGothic"/>
                 <a:cs typeface="NanumGothic"/>
               </a:rPr>
-              <a:t>고정 블록(시스템 · 툴 정의 · 규약)을 맨 앞으로 모은다</a:t>
+              <a:t>각 레버의 조건과 함정을 한 장씩 본다</a:t>
             </a:r>
           </a:p>
         </p:txBody>
@@ -7396,7 +8335,7 @@
                 <a:ea typeface="NanumGothic"/>
                 <a:cs typeface="NanumGothic"/>
               </a:rPr>
-              <a:t>최소 길이를 확인한다 — Haiku 4.5는 4,096토큰</a:t>
+              <a:t>레버는 곱해진다 — 우선순위는 뒤에서</a:t>
             </a:r>
           </a:p>
         </p:txBody>
@@ -7432,7 +8371,7 @@
                 <a:ea typeface="NanumGothic"/>
                 <a:cs typeface="NanumGothic"/>
               </a:rPr>
-              <a:t>experiments/exp03_prompt_caching.py</a:t>
+              <a:t>docs/CORRECTIONS.md</a:t>
             </a:r>
           </a:p>
         </p:txBody>
@@ -7609,7 +8548,7 @@
                 <a:ea typeface="NanumGothic"/>
                 <a:cs typeface="NanumGothic"/>
               </a:rPr>
-              <a:t>비용 시나리오</a:t>
+              <a:t>비용 시나리오 (100콜)</a:t>
             </a:r>
           </a:p>
         </p:txBody>
@@ -7622,7 +8561,7 @@
         </p:nvSpPr>
         <p:spPr>
           <a:xfrm>
-            <a:off x="640080" y="822960"/>
+            <a:off x="640080" y="566928"/>
             <a:ext cx="10881360" cy="822960"/>
           </a:xfrm>
           <a:prstGeom prst="rect">
@@ -7645,7 +8584,7 @@
                 <a:ea typeface="NanumGothic"/>
                 <a:cs typeface="NanumGothic"/>
               </a:rPr>
-              <a:t>캐시를 깨는 한 줄</a:t>
+              <a:t>캐시는 조건이 맞을 때만 이득</a:t>
             </a:r>
           </a:p>
         </p:txBody>
@@ -7658,7 +8597,7 @@
         </p:nvSpPr>
         <p:spPr>
           <a:xfrm>
-            <a:off x="640080" y="1783080"/>
+            <a:off x="640080" y="1188720"/>
             <a:ext cx="10881360" cy="777240"/>
           </a:xfrm>
           <a:prstGeom prst="rect">
@@ -7681,7 +8620,7 @@
                 <a:ea typeface="NanumGothic"/>
                 <a:cs typeface="NanumGothic"/>
               </a:rPr>
-              <a:t>$10.05 (17.5% 더 지출)</a:t>
+              <a:t>$8.55 → $3.219 (-62%)</a:t>
             </a:r>
           </a:p>
         </p:txBody>
@@ -7694,7 +8633,7 @@
         </p:nvSpPr>
         <p:spPr>
           <a:xfrm>
-            <a:off x="777240" y="2862072"/>
+            <a:off x="777240" y="1920240"/>
             <a:ext cx="10652760" cy="612648"/>
           </a:xfrm>
           <a:prstGeom prst="rect">
@@ -7717,7 +8656,7 @@
                 <a:ea typeface="NanumGothic"/>
                 <a:cs typeface="NanumGothic"/>
               </a:rPr>
-              <a:t>맨 앞의 타임스탬프·요청 ID는 매번 미스로 만든다</a:t>
+              <a:t>프리픽스를 매번 바꾸면 $10.05 (+17.5%)</a:t>
             </a:r>
           </a:p>
         </p:txBody>
@@ -7730,7 +8669,7 @@
         </p:nvSpPr>
         <p:spPr>
           <a:xfrm>
-            <a:off x="777240" y="3502152"/>
+            <a:off x="777240" y="2359152"/>
             <a:ext cx="10652760" cy="612648"/>
           </a:xfrm>
           <a:prstGeom prst="rect">
@@ -7753,71 +8692,59 @@
                 <a:ea typeface="NanumGothic"/>
                 <a:cs typeface="NanumGothic"/>
               </a:rPr>
-              <a:t>변하는 값은 반드시 뒤로 보낸다</a:t>
-            </a:r>
-          </a:p>
-        </p:txBody>
-      </p:sp>
-      <p:sp>
-        <p:nvSpPr>
-          <p:cNvPr id="9" name="audit:body-2"/>
-          <p:cNvSpPr txBox="1"/>
-          <p:nvPr/>
-        </p:nvSpPr>
-        <p:spPr>
-          <a:xfrm>
-            <a:off x="777240" y="4142231"/>
-            <a:ext cx="10652760" cy="612648"/>
-          </a:xfrm>
-          <a:prstGeom prst="rect">
-            <a:avLst/>
-          </a:prstGeom>
-          <a:noFill/>
-        </p:spPr>
-        <p:txBody>
-          <a:bodyPr wrap="square" lIns="0" rIns="0" tIns="0" bIns="0">
-            <a:spAutoFit/>
-          </a:bodyPr>
-          <a:lstStyle/>
-          <a:p>
-            <a:r>
-              <a:rPr sz="1750" b="0">
-                <a:solidFill>
-                  <a:srgbClr val="ECF1F6"/>
-                </a:solidFill>
-                <a:latin typeface="NanumGothic"/>
-                <a:ea typeface="NanumGothic"/>
-                <a:cs typeface="NanumGothic"/>
-              </a:rPr>
-              <a:t>미스 상태의 캐싱은 안 쓰느니만 못하다</a:t>
-            </a:r>
-          </a:p>
-        </p:txBody>
-      </p:sp>
-      <p:sp>
-        <p:nvSpPr>
-          <p:cNvPr id="10" name="audit:source"/>
-          <p:cNvSpPr txBox="1"/>
-          <p:nvPr/>
-        </p:nvSpPr>
-        <p:spPr>
-          <a:xfrm>
-            <a:off x="640080" y="6080760"/>
-            <a:ext cx="10972800" cy="274320"/>
-          </a:xfrm>
-          <a:prstGeom prst="rect">
-            <a:avLst/>
-          </a:prstGeom>
-          <a:noFill/>
-        </p:spPr>
-        <p:txBody>
-          <a:bodyPr wrap="square" lIns="0" rIns="0" tIns="0" bIns="0">
-            <a:spAutoFit/>
-          </a:bodyPr>
-          <a:lstStyle/>
-          <a:p>
-            <a:r>
-              <a:rPr sz="1000" b="0">
+              <a:t>고정 블록을 앞으로 모아 적중률을 올린다</a:t>
+            </a:r>
+          </a:p>
+        </p:txBody>
+      </p:sp>
+      <p:pic>
+        <p:nvPicPr>
+          <p:cNvPr id="9" name="Picture 8" descr="cache.png"/>
+          <p:cNvPicPr>
+            <a:picLocks noChangeAspect="1"/>
+          </p:cNvPicPr>
+          <p:nvPr/>
+        </p:nvPicPr>
+        <p:blipFill>
+          <a:blip r:embed="rId2"/>
+          <a:stretch>
+            <a:fillRect/>
+          </a:stretch>
+        </p:blipFill>
+        <p:spPr>
+          <a:xfrm>
+            <a:off x="980030" y="2670048"/>
+            <a:ext cx="10247179" cy="3529584"/>
+          </a:xfrm>
+          <a:prstGeom prst="rect">
+            <a:avLst/>
+          </a:prstGeom>
+        </p:spPr>
+      </p:pic>
+      <p:sp>
+        <p:nvSpPr>
+          <p:cNvPr id="10" name="audit:chart-caption"/>
+          <p:cNvSpPr txBox="1"/>
+          <p:nvPr/>
+        </p:nvSpPr>
+        <p:spPr>
+          <a:xfrm>
+            <a:off x="777240" y="6217920"/>
+            <a:ext cx="5120640" cy="219456"/>
+          </a:xfrm>
+          <a:prstGeom prst="rect">
+            <a:avLst/>
+          </a:prstGeom>
+          <a:noFill/>
+        </p:spPr>
+        <p:txBody>
+          <a:bodyPr wrap="square" lIns="0" rIns="0" tIns="0" bIns="0">
+            <a:spAutoFit/>
+          </a:bodyPr>
+          <a:lstStyle/>
+          <a:p>
+            <a:r>
+              <a:rPr sz="950" b="0">
                 <a:solidFill>
                   <a:srgbClr val="93A4B5"/>
                 </a:solidFill>
@@ -7825,6 +8752,42 @@
                 <a:ea typeface="NanumGothic"/>
                 <a:cs typeface="NanumGothic"/>
               </a:rPr>
+              <a:t>그래프 · 100콜 비용 (USD) · cache.png</a:t>
+            </a:r>
+          </a:p>
+        </p:txBody>
+      </p:sp>
+      <p:sp>
+        <p:nvSpPr>
+          <p:cNvPr id="11" name="audit:source"/>
+          <p:cNvSpPr txBox="1"/>
+          <p:nvPr/>
+        </p:nvSpPr>
+        <p:spPr>
+          <a:xfrm>
+            <a:off x="6035040" y="6217920"/>
+            <a:ext cx="5394960" cy="219456"/>
+          </a:xfrm>
+          <a:prstGeom prst="rect">
+            <a:avLst/>
+          </a:prstGeom>
+          <a:noFill/>
+        </p:spPr>
+        <p:txBody>
+          <a:bodyPr wrap="square" lIns="0" rIns="0" tIns="0" bIns="0">
+            <a:spAutoFit/>
+          </a:bodyPr>
+          <a:lstStyle/>
+          <a:p>
+            <a:r>
+              <a:rPr sz="950" b="0">
+                <a:solidFill>
+                  <a:srgbClr val="93A4B5"/>
+                </a:solidFill>
+                <a:latin typeface="NanumGothic"/>
+                <a:ea typeface="NanumGothic"/>
+                <a:cs typeface="NanumGothic"/>
+              </a:rPr>
               <a:t>experiments/exp03_prompt_caching.py</a:t>
             </a:r>
           </a:p>
@@ -7832,28 +8795,28 @@
       </p:sp>
       <p:sp>
         <p:nvSpPr>
-          <p:cNvPr id="11" name="audit:footer"/>
-          <p:cNvSpPr txBox="1"/>
-          <p:nvPr/>
-        </p:nvSpPr>
-        <p:spPr>
-          <a:xfrm>
-            <a:off x="640080" y="6419088"/>
-            <a:ext cx="10972800" cy="256032"/>
-          </a:xfrm>
-          <a:prstGeom prst="rect">
-            <a:avLst/>
-          </a:prstGeom>
-          <a:noFill/>
-        </p:spPr>
-        <p:txBody>
-          <a:bodyPr wrap="square" lIns="0" rIns="0" tIns="0" bIns="0">
-            <a:spAutoFit/>
-          </a:bodyPr>
-          <a:lstStyle/>
-          <a:p>
-            <a:r>
-              <a:rPr sz="1000" b="0">
+          <p:cNvPr id="12" name="audit:footer"/>
+          <p:cNvSpPr txBox="1"/>
+          <p:nvPr/>
+        </p:nvSpPr>
+        <p:spPr>
+          <a:xfrm>
+            <a:off x="777240" y="6620256"/>
+            <a:ext cx="10972800" cy="219456"/>
+          </a:xfrm>
+          <a:prstGeom prst="rect">
+            <a:avLst/>
+          </a:prstGeom>
+          <a:noFill/>
+        </p:spPr>
+        <p:txBody>
+          <a:bodyPr wrap="square" lIns="0" rIns="0" tIns="0" bIns="0">
+            <a:spAutoFit/>
+          </a:bodyPr>
+          <a:lstStyle/>
+          <a:p>
+            <a:r>
+              <a:rPr sz="950" b="0">
                 <a:solidFill>
                   <a:srgbClr val="93A4B5"/>
                 </a:solidFill>
@@ -8002,7 +8965,7 @@
                 <a:ea typeface="NanumGothic"/>
                 <a:cs typeface="NanumGothic"/>
               </a:rPr>
-              <a:t>비용 시나리오 (100콜)</a:t>
+              <a:t>비용 시나리오</a:t>
             </a:r>
           </a:p>
         </p:txBody>
@@ -8015,7 +8978,7 @@
         </p:nvSpPr>
         <p:spPr>
           <a:xfrm>
-            <a:off x="640080" y="566928"/>
+            <a:off x="640080" y="822960"/>
             <a:ext cx="10881360" cy="822960"/>
           </a:xfrm>
           <a:prstGeom prst="rect">
@@ -8038,7 +9001,7 @@
                 <a:ea typeface="NanumGothic"/>
                 <a:cs typeface="NanumGothic"/>
               </a:rPr>
-              <a:t>캐시는 조건이 맞을 때만 이득</a:t>
+              <a:t>압축과 캐싱은 대체재가 아니다</a:t>
             </a:r>
           </a:p>
         </p:txBody>
@@ -8051,7 +9014,7 @@
         </p:nvSpPr>
         <p:spPr>
           <a:xfrm>
-            <a:off x="640080" y="1261872"/>
+            <a:off x="640080" y="1783080"/>
             <a:ext cx="10881360" cy="777240"/>
           </a:xfrm>
           <a:prstGeom prst="rect">
@@ -8074,7 +9037,7 @@
                 <a:ea typeface="NanumGothic"/>
                 <a:cs typeface="NanumGothic"/>
               </a:rPr>
-              <a:t>$8.55 → $3.219 (-62%)</a:t>
+              <a:t>$0.4014 → $0.2007 (94% 절감)</a:t>
             </a:r>
           </a:p>
         </p:txBody>
@@ -8087,7 +9050,7 @@
         </p:nvSpPr>
         <p:spPr>
           <a:xfrm>
-            <a:off x="777240" y="2029968"/>
+            <a:off x="777240" y="2862072"/>
             <a:ext cx="10652760" cy="612648"/>
           </a:xfrm>
           <a:prstGeom prst="rect">
@@ -8110,7 +9073,7 @@
                 <a:ea typeface="NanumGothic"/>
                 <a:cs typeface="NanumGothic"/>
               </a:rPr>
-              <a:t>프리픽스를 매번 바꾸면 $10.05 (+17.5%)</a:t>
+              <a:t>그냥 캐싱 $0.4014 vs 절반 요약 $1.8000</a:t>
             </a:r>
           </a:p>
         </p:txBody>
@@ -8123,7 +9086,7 @@
         </p:nvSpPr>
         <p:spPr>
           <a:xfrm>
-            <a:off x="777240" y="2542032"/>
+            <a:off x="777240" y="3502152"/>
             <a:ext cx="10652760" cy="612648"/>
           </a:xfrm>
           <a:prstGeom prst="rect">
@@ -8146,59 +9109,71 @@
                 <a:ea typeface="NanumGothic"/>
                 <a:cs typeface="NanumGothic"/>
               </a:rPr>
-              <a:t>고정 블록을 앞으로 모아 적중률을 올린다</a:t>
-            </a:r>
-          </a:p>
-        </p:txBody>
-      </p:sp>
-      <p:pic>
-        <p:nvPicPr>
-          <p:cNvPr id="9" name="Picture 8" descr="cache.png"/>
-          <p:cNvPicPr>
-            <a:picLocks noChangeAspect="1"/>
-          </p:cNvPicPr>
-          <p:nvPr/>
-        </p:nvPicPr>
-        <p:blipFill>
-          <a:blip r:embed="rId2"/>
-          <a:stretch>
-            <a:fillRect/>
-          </a:stretch>
-        </p:blipFill>
-        <p:spPr>
-          <a:xfrm>
-            <a:off x="777240" y="3101593"/>
-            <a:ext cx="10652760" cy="2959100"/>
-          </a:xfrm>
-          <a:prstGeom prst="rect">
-            <a:avLst/>
-          </a:prstGeom>
-        </p:spPr>
-      </p:pic>
-      <p:sp>
-        <p:nvSpPr>
-          <p:cNvPr id="10" name="audit:chart-caption"/>
-          <p:cNvSpPr txBox="1"/>
-          <p:nvPr/>
-        </p:nvSpPr>
-        <p:spPr>
-          <a:xfrm>
-            <a:off x="777240" y="6135624"/>
-            <a:ext cx="10652760" cy="237744"/>
-          </a:xfrm>
-          <a:prstGeom prst="rect">
-            <a:avLst/>
-          </a:prstGeom>
-          <a:noFill/>
-        </p:spPr>
-        <p:txBody>
-          <a:bodyPr wrap="square" lIns="0" rIns="0" tIns="0" bIns="0">
-            <a:spAutoFit/>
-          </a:bodyPr>
-          <a:lstStyle/>
-          <a:p>
-            <a:r>
-              <a:rPr sz="950" b="0">
+              <a:t>지울 수 있는 반복은 지우고, 지울 수 없는 반복은 고정해 캐시에 태운다</a:t>
+            </a:r>
+          </a:p>
+        </p:txBody>
+      </p:sp>
+      <p:sp>
+        <p:nvSpPr>
+          <p:cNvPr id="9" name="audit:body-2"/>
+          <p:cNvSpPr txBox="1"/>
+          <p:nvPr/>
+        </p:nvSpPr>
+        <p:spPr>
+          <a:xfrm>
+            <a:off x="777240" y="4142231"/>
+            <a:ext cx="10652760" cy="612648"/>
+          </a:xfrm>
+          <a:prstGeom prst="rect">
+            <a:avLst/>
+          </a:prstGeom>
+          <a:noFill/>
+        </p:spPr>
+        <p:txBody>
+          <a:bodyPr wrap="square" lIns="0" rIns="0" tIns="0" bIns="0">
+            <a:spAutoFit/>
+          </a:bodyPr>
+          <a:lstStyle/>
+          <a:p>
+            <a:r>
+              <a:rPr sz="1750" b="0">
+                <a:solidFill>
+                  <a:srgbClr val="ECF1F6"/>
+                </a:solidFill>
+                <a:latin typeface="NanumGothic"/>
+                <a:ea typeface="NanumGothic"/>
+                <a:cs typeface="NanumGothic"/>
+              </a:rPr>
+              <a:t>압축률이 높을수록 조합의 이득도 커진다</a:t>
+            </a:r>
+          </a:p>
+        </p:txBody>
+      </p:sp>
+      <p:sp>
+        <p:nvSpPr>
+          <p:cNvPr id="10" name="audit:source"/>
+          <p:cNvSpPr txBox="1"/>
+          <p:nvPr/>
+        </p:nvSpPr>
+        <p:spPr>
+          <a:xfrm>
+            <a:off x="640080" y="6080760"/>
+            <a:ext cx="10972800" cy="274320"/>
+          </a:xfrm>
+          <a:prstGeom prst="rect">
+            <a:avLst/>
+          </a:prstGeom>
+          <a:noFill/>
+        </p:spPr>
+        <p:txBody>
+          <a:bodyPr wrap="square" lIns="0" rIns="0" tIns="0" bIns="0">
+            <a:spAutoFit/>
+          </a:bodyPr>
+          <a:lstStyle/>
+          <a:p>
+            <a:r>
+              <a:rPr sz="1000" b="0">
                 <a:solidFill>
                   <a:srgbClr val="93A4B5"/>
                 </a:solidFill>
@@ -8206,56 +9181,20 @@
                 <a:ea typeface="NanumGothic"/>
                 <a:cs typeface="NanumGothic"/>
               </a:rPr>
-              <a:t>그래프 · 100콜 비용 (USD) · cache.png</a:t>
-            </a:r>
-          </a:p>
-        </p:txBody>
-      </p:sp>
-      <p:sp>
-        <p:nvSpPr>
-          <p:cNvPr id="11" name="audit:source"/>
-          <p:cNvSpPr txBox="1"/>
-          <p:nvPr/>
-        </p:nvSpPr>
-        <p:spPr>
-          <a:xfrm>
-            <a:off x="777240" y="6382512"/>
-            <a:ext cx="10972800" cy="274320"/>
-          </a:xfrm>
-          <a:prstGeom prst="rect">
-            <a:avLst/>
-          </a:prstGeom>
-          <a:noFill/>
-        </p:spPr>
-        <p:txBody>
-          <a:bodyPr wrap="square" lIns="0" rIns="0" tIns="0" bIns="0">
-            <a:spAutoFit/>
-          </a:bodyPr>
-          <a:lstStyle/>
-          <a:p>
-            <a:r>
-              <a:rPr sz="1000" b="0">
-                <a:solidFill>
-                  <a:srgbClr val="93A4B5"/>
-                </a:solidFill>
-                <a:latin typeface="NanumGothic"/>
-                <a:ea typeface="NanumGothic"/>
-                <a:cs typeface="NanumGothic"/>
-              </a:rPr>
-              <a:t>experiments/exp03_prompt_caching.py</a:t>
-            </a:r>
-          </a:p>
-        </p:txBody>
-      </p:sp>
-      <p:sp>
-        <p:nvSpPr>
-          <p:cNvPr id="12" name="audit:footer"/>
-          <p:cNvSpPr txBox="1"/>
-          <p:nvPr/>
-        </p:nvSpPr>
-        <p:spPr>
-          <a:xfrm>
-            <a:off x="777240" y="6583680"/>
+              <a:t>experiments/exp09_dry.py</a:t>
+            </a:r>
+          </a:p>
+        </p:txBody>
+      </p:sp>
+      <p:sp>
+        <p:nvSpPr>
+          <p:cNvPr id="11" name="audit:footer"/>
+          <p:cNvSpPr txBox="1"/>
+          <p:nvPr/>
+        </p:nvSpPr>
+        <p:spPr>
+          <a:xfrm>
+            <a:off x="640080" y="6419088"/>
             <a:ext cx="10972800" cy="256032"/>
           </a:xfrm>
           <a:prstGeom prst="rect">
@@ -8455,7 +9394,7 @@
                 <a:ea typeface="NanumGothic"/>
                 <a:cs typeface="NanumGothic"/>
               </a:rPr>
-              <a:t>압축과 캐싱은 대체재가 아니다</a:t>
+              <a:t>긴 세션은 컴팩션으로 접는다</a:t>
             </a:r>
           </a:p>
         </p:txBody>
@@ -8491,7 +9430,7 @@
                 <a:ea typeface="NanumGothic"/>
                 <a:cs typeface="NanumGothic"/>
               </a:rPr>
-              <a:t>$0.4014 → $0.2007 (94% 절감)</a:t>
+              <a:t>$2.32 → $0.93 (60% 절감)</a:t>
             </a:r>
           </a:p>
         </p:txBody>
@@ -8527,7 +9466,7 @@
                 <a:ea typeface="NanumGothic"/>
                 <a:cs typeface="NanumGothic"/>
               </a:rPr>
-              <a:t>그냥 캐싱 $0.4014 vs 절반 요약 $1.8000</a:t>
+              <a:t>10턴마다 접으면 $1.23 (47% 절감)</a:t>
             </a:r>
           </a:p>
         </p:txBody>
@@ -8563,7 +9502,7 @@
                 <a:ea typeface="NanumGothic"/>
                 <a:cs typeface="NanumGothic"/>
               </a:rPr>
-              <a:t>지울 수 있는 반복은 지우고, 지울 수 없는 반복은 고정해 캐시에 태운다</a:t>
+              <a:t>너무 자주 접으면 요약 호출이 이득을 먹는다</a:t>
             </a:r>
           </a:p>
         </p:txBody>
@@ -8599,7 +9538,7 @@
                 <a:ea typeface="NanumGothic"/>
                 <a:cs typeface="NanumGothic"/>
               </a:rPr>
-              <a:t>압축률이 높을수록 조합의 이득도 커진다</a:t>
+              <a:t>최적 주기는 세션 길이와 요약 비용으로 정해진다</a:t>
             </a:r>
           </a:p>
         </p:txBody>
@@ -8635,7 +9574,7 @@
                 <a:ea typeface="NanumGothic"/>
                 <a:cs typeface="NanumGothic"/>
               </a:rPr>
-              <a:t>experiments/exp09_dry.py</a:t>
+              <a:t>experiments/exp04_agent_loop_sdd.py</a:t>
             </a:r>
           </a:p>
         </p:txBody>
@@ -8812,7 +9751,7 @@
                 <a:ea typeface="NanumGothic"/>
                 <a:cs typeface="NanumGothic"/>
               </a:rPr>
-              <a:t>비용 시나리오</a:t>
+              <a:t>비용 시나리오 (20턴)</a:t>
             </a:r>
           </a:p>
         </p:txBody>
@@ -8825,7 +9764,7 @@
         </p:nvSpPr>
         <p:spPr>
           <a:xfrm>
-            <a:off x="640080" y="822960"/>
+            <a:off x="640080" y="566928"/>
             <a:ext cx="10881360" cy="822960"/>
           </a:xfrm>
           <a:prstGeom prst="rect">
@@ -8848,7 +9787,7 @@
                 <a:ea typeface="NanumGothic"/>
                 <a:cs typeface="NanumGothic"/>
               </a:rPr>
-              <a:t>긴 세션은 컴팩션으로 접는다</a:t>
+              <a:t>세션 토큰의 4분의 3은 이력 재전송</a:t>
             </a:r>
           </a:p>
         </p:txBody>
@@ -8861,7 +9800,7 @@
         </p:nvSpPr>
         <p:spPr>
           <a:xfrm>
-            <a:off x="640080" y="1783080"/>
+            <a:off x="640080" y="1188720"/>
             <a:ext cx="10881360" cy="777240"/>
           </a:xfrm>
           <a:prstGeom prst="rect">
@@ -8884,7 +9823,7 @@
                 <a:ea typeface="NanumGothic"/>
                 <a:cs typeface="NanumGothic"/>
               </a:rPr>
-              <a:t>$2.32 → $0.93 (60% 절감)</a:t>
+              <a:t>고정 프리픽스 22.6% · 이력 75.1%</a:t>
             </a:r>
           </a:p>
         </p:txBody>
@@ -8897,7 +9836,7 @@
         </p:nvSpPr>
         <p:spPr>
           <a:xfrm>
-            <a:off x="777240" y="2862072"/>
+            <a:off x="777240" y="1920240"/>
             <a:ext cx="10652760" cy="612648"/>
           </a:xfrm>
           <a:prstGeom prst="rect">
@@ -8920,7 +9859,7 @@
                 <a:ea typeface="NanumGothic"/>
                 <a:cs typeface="NanumGothic"/>
               </a:rPr>
-              <a:t>10턴마다 접으면 $1.23 (47% 절감)</a:t>
+              <a:t>생성(출력)은 2.3%뿐이다</a:t>
             </a:r>
           </a:p>
         </p:txBody>
@@ -8933,7 +9872,7 @@
         </p:nvSpPr>
         <p:spPr>
           <a:xfrm>
-            <a:off x="777240" y="3502152"/>
+            <a:off x="777240" y="2359152"/>
             <a:ext cx="10652760" cy="612648"/>
           </a:xfrm>
           <a:prstGeom prst="rect">
@@ -8956,71 +9895,59 @@
                 <a:ea typeface="NanumGothic"/>
                 <a:cs typeface="NanumGothic"/>
               </a:rPr>
-              <a:t>너무 자주 접으면 요약 호출이 이득을 먹는다</a:t>
-            </a:r>
-          </a:p>
-        </p:txBody>
-      </p:sp>
-      <p:sp>
-        <p:nvSpPr>
-          <p:cNvPr id="9" name="audit:body-2"/>
-          <p:cNvSpPr txBox="1"/>
-          <p:nvPr/>
-        </p:nvSpPr>
-        <p:spPr>
-          <a:xfrm>
-            <a:off x="777240" y="4142231"/>
-            <a:ext cx="10652760" cy="612648"/>
-          </a:xfrm>
-          <a:prstGeom prst="rect">
-            <a:avLst/>
-          </a:prstGeom>
-          <a:noFill/>
-        </p:spPr>
-        <p:txBody>
-          <a:bodyPr wrap="square" lIns="0" rIns="0" tIns="0" bIns="0">
-            <a:spAutoFit/>
-          </a:bodyPr>
-          <a:lstStyle/>
-          <a:p>
-            <a:r>
-              <a:rPr sz="1750" b="0">
-                <a:solidFill>
-                  <a:srgbClr val="ECF1F6"/>
-                </a:solidFill>
-                <a:latin typeface="NanumGothic"/>
-                <a:ea typeface="NanumGothic"/>
-                <a:cs typeface="NanumGothic"/>
-              </a:rPr>
-              <a:t>최적 주기는 세션 길이와 요약 비용으로 정해진다</a:t>
-            </a:r>
-          </a:p>
-        </p:txBody>
-      </p:sp>
-      <p:sp>
-        <p:nvSpPr>
-          <p:cNvPr id="10" name="audit:source"/>
-          <p:cNvSpPr txBox="1"/>
-          <p:nvPr/>
-        </p:nvSpPr>
-        <p:spPr>
-          <a:xfrm>
-            <a:off x="640080" y="6080760"/>
-            <a:ext cx="10972800" cy="274320"/>
-          </a:xfrm>
-          <a:prstGeom prst="rect">
-            <a:avLst/>
-          </a:prstGeom>
-          <a:noFill/>
-        </p:spPr>
-        <p:txBody>
-          <a:bodyPr wrap="square" lIns="0" rIns="0" tIns="0" bIns="0">
-            <a:spAutoFit/>
-          </a:bodyPr>
-          <a:lstStyle/>
-          <a:p>
-            <a:r>
-              <a:rPr sz="1000" b="0">
+              <a:t>그래서 '덜 쓰기'보다 '다시 안 보내기'가 크다</a:t>
+            </a:r>
+          </a:p>
+        </p:txBody>
+      </p:sp>
+      <p:pic>
+        <p:nvPicPr>
+          <p:cNvPr id="9" name="Picture 8" descr="usage_mix.png"/>
+          <p:cNvPicPr>
+            <a:picLocks noChangeAspect="1"/>
+          </p:cNvPicPr>
+          <p:nvPr/>
+        </p:nvPicPr>
+        <p:blipFill>
+          <a:blip r:embed="rId2"/>
+          <a:stretch>
+            <a:fillRect/>
+          </a:stretch>
+        </p:blipFill>
+        <p:spPr>
+          <a:xfrm>
+            <a:off x="980030" y="2670048"/>
+            <a:ext cx="10247179" cy="3529584"/>
+          </a:xfrm>
+          <a:prstGeom prst="rect">
+            <a:avLst/>
+          </a:prstGeom>
+        </p:spPr>
+      </p:pic>
+      <p:sp>
+        <p:nvSpPr>
+          <p:cNvPr id="10" name="audit:chart-caption"/>
+          <p:cNvSpPr txBox="1"/>
+          <p:nvPr/>
+        </p:nvSpPr>
+        <p:spPr>
+          <a:xfrm>
+            <a:off x="777240" y="6217920"/>
+            <a:ext cx="5120640" cy="219456"/>
+          </a:xfrm>
+          <a:prstGeom prst="rect">
+            <a:avLst/>
+          </a:prstGeom>
+          <a:noFill/>
+        </p:spPr>
+        <p:txBody>
+          <a:bodyPr wrap="square" lIns="0" rIns="0" tIns="0" bIns="0">
+            <a:spAutoFit/>
+          </a:bodyPr>
+          <a:lstStyle/>
+          <a:p>
+            <a:r>
+              <a:rPr sz="950" b="0">
                 <a:solidFill>
                   <a:srgbClr val="93A4B5"/>
                 </a:solidFill>
@@ -9028,6 +9955,42 @@
                 <a:ea typeface="NanumGothic"/>
                 <a:cs typeface="NanumGothic"/>
               </a:rPr>
+              <a:t>그래프 · 20턴 세션 토큰 구성 · usage_mix.png</a:t>
+            </a:r>
+          </a:p>
+        </p:txBody>
+      </p:sp>
+      <p:sp>
+        <p:nvSpPr>
+          <p:cNvPr id="11" name="audit:source"/>
+          <p:cNvSpPr txBox="1"/>
+          <p:nvPr/>
+        </p:nvSpPr>
+        <p:spPr>
+          <a:xfrm>
+            <a:off x="6035040" y="6217920"/>
+            <a:ext cx="5394960" cy="219456"/>
+          </a:xfrm>
+          <a:prstGeom prst="rect">
+            <a:avLst/>
+          </a:prstGeom>
+          <a:noFill/>
+        </p:spPr>
+        <p:txBody>
+          <a:bodyPr wrap="square" lIns="0" rIns="0" tIns="0" bIns="0">
+            <a:spAutoFit/>
+          </a:bodyPr>
+          <a:lstStyle/>
+          <a:p>
+            <a:r>
+              <a:rPr sz="950" b="0">
+                <a:solidFill>
+                  <a:srgbClr val="93A4B5"/>
+                </a:solidFill>
+                <a:latin typeface="NanumGothic"/>
+                <a:ea typeface="NanumGothic"/>
+                <a:cs typeface="NanumGothic"/>
+              </a:rPr>
               <a:t>experiments/exp04_agent_loop_sdd.py</a:t>
             </a:r>
           </a:p>
@@ -9035,28 +9998,28 @@
       </p:sp>
       <p:sp>
         <p:nvSpPr>
-          <p:cNvPr id="11" name="audit:footer"/>
-          <p:cNvSpPr txBox="1"/>
-          <p:nvPr/>
-        </p:nvSpPr>
-        <p:spPr>
-          <a:xfrm>
-            <a:off x="640080" y="6419088"/>
-            <a:ext cx="10972800" cy="256032"/>
-          </a:xfrm>
-          <a:prstGeom prst="rect">
-            <a:avLst/>
-          </a:prstGeom>
-          <a:noFill/>
-        </p:spPr>
-        <p:txBody>
-          <a:bodyPr wrap="square" lIns="0" rIns="0" tIns="0" bIns="0">
-            <a:spAutoFit/>
-          </a:bodyPr>
-          <a:lstStyle/>
-          <a:p>
-            <a:r>
-              <a:rPr sz="1000" b="0">
+          <p:cNvPr id="12" name="audit:footer"/>
+          <p:cNvSpPr txBox="1"/>
+          <p:nvPr/>
+        </p:nvSpPr>
+        <p:spPr>
+          <a:xfrm>
+            <a:off x="777240" y="6620256"/>
+            <a:ext cx="10972800" cy="219456"/>
+          </a:xfrm>
+          <a:prstGeom prst="rect">
+            <a:avLst/>
+          </a:prstGeom>
+          <a:noFill/>
+        </p:spPr>
+        <p:txBody>
+          <a:bodyPr wrap="square" lIns="0" rIns="0" tIns="0" bIns="0">
+            <a:spAutoFit/>
+          </a:bodyPr>
+          <a:lstStyle/>
+          <a:p>
+            <a:r>
+              <a:rPr sz="950" b="0">
                 <a:solidFill>
                   <a:srgbClr val="93A4B5"/>
                 </a:solidFill>
@@ -9205,7 +10168,7 @@
                 <a:ea typeface="NanumGothic"/>
                 <a:cs typeface="NanumGothic"/>
               </a:rPr>
-              <a:t>전체 시스템 비용 시나리오</a:t>
+              <a:t>비용 시나리오 (100콜)</a:t>
             </a:r>
           </a:p>
         </p:txBody>
@@ -9218,7 +10181,7 @@
         </p:nvSpPr>
         <p:spPr>
           <a:xfrm>
-            <a:off x="640080" y="822960"/>
+            <a:off x="640080" y="566928"/>
             <a:ext cx="10881360" cy="822960"/>
           </a:xfrm>
           <a:prstGeom prst="rect">
@@ -9241,7 +10204,7 @@
                 <a:ea typeface="NanumGothic"/>
                 <a:cs typeface="NanumGothic"/>
               </a:rPr>
-              <a:t>툴 출력과 서브에이전트는 전체 비용으로 본다</a:t>
+              <a:t>적중률 22%면 본전</a:t>
             </a:r>
           </a:p>
         </p:txBody>
@@ -9254,7 +10217,7 @@
         </p:nvSpPr>
         <p:spPr>
           <a:xfrm>
-            <a:off x="640080" y="1783080"/>
+            <a:off x="640080" y="1188720"/>
             <a:ext cx="10881360" cy="777240"/>
           </a:xfrm>
           <a:prstGeom prst="rect">
@@ -9277,7 +10240,7 @@
                 <a:ea typeface="NanumGothic"/>
                 <a:cs typeface="NanumGothic"/>
               </a:rPr>
-              <a:t>$5.6010 → $2.7360</a:t>
+              <a:t>캐시 없음 $8.550</a:t>
             </a:r>
           </a:p>
         </p:txBody>
@@ -9290,7 +10253,7 @@
         </p:nvSpPr>
         <p:spPr>
           <a:xfrm>
-            <a:off x="777240" y="2862072"/>
+            <a:off x="777240" y="1920240"/>
             <a:ext cx="10652760" cy="612648"/>
           </a:xfrm>
           <a:prstGeom prst="rect">
@@ -9313,7 +10276,7 @@
                 <a:ea typeface="NanumGothic"/>
                 <a:cs typeface="NanumGothic"/>
               </a:rPr>
-              <a:t>툴 읽기 누적 전송 1,680,000 토큰 (20턴)</a:t>
+              <a:t>적중률이 오를수록 단조 감소한다</a:t>
             </a:r>
           </a:p>
         </p:txBody>
@@ -9326,7 +10289,7 @@
         </p:nvSpPr>
         <p:spPr>
           <a:xfrm>
-            <a:off x="777240" y="3502152"/>
+            <a:off x="777240" y="2359152"/>
             <a:ext cx="10652760" cy="612648"/>
           </a:xfrm>
           <a:prstGeom prst="rect">
@@ -9349,71 +10312,59 @@
                 <a:ea typeface="NanumGothic"/>
                 <a:cs typeface="NanumGothic"/>
               </a:rPr>
-              <a:t>컴팩션 $3.4425 · 서브에이전트 $2.736</a:t>
-            </a:r>
-          </a:p>
-        </p:txBody>
-      </p:sp>
-      <p:sp>
-        <p:nvSpPr>
-          <p:cNvPr id="9" name="audit:body-2"/>
-          <p:cNvSpPr txBox="1"/>
-          <p:nvPr/>
-        </p:nvSpPr>
-        <p:spPr>
-          <a:xfrm>
-            <a:off x="777240" y="4142231"/>
-            <a:ext cx="10652760" cy="612648"/>
-          </a:xfrm>
-          <a:prstGeom prst="rect">
-            <a:avLst/>
-          </a:prstGeom>
-          <a:noFill/>
-        </p:spPr>
-        <p:txBody>
-          <a:bodyPr wrap="square" lIns="0" rIns="0" tIns="0" bIns="0">
-            <a:spAutoFit/>
-          </a:bodyPr>
-          <a:lstStyle/>
-          <a:p>
-            <a:r>
-              <a:rPr sz="1750" b="0">
-                <a:solidFill>
-                  <a:srgbClr val="ECF1F6"/>
-                </a:solidFill>
-                <a:latin typeface="NanumGothic"/>
-                <a:ea typeface="NanumGothic"/>
-                <a:cs typeface="NanumGothic"/>
-              </a:rPr>
-              <a:t>자식 호출·요약 비용까지 포함해 비교한다</a:t>
-            </a:r>
-          </a:p>
-        </p:txBody>
-      </p:sp>
-      <p:sp>
-        <p:nvSpPr>
-          <p:cNvPr id="10" name="audit:source"/>
-          <p:cNvSpPr txBox="1"/>
-          <p:nvPr/>
-        </p:nvSpPr>
-        <p:spPr>
-          <a:xfrm>
-            <a:off x="640080" y="6080760"/>
-            <a:ext cx="10972800" cy="274320"/>
-          </a:xfrm>
-          <a:prstGeom prst="rect">
-            <a:avLst/>
-          </a:prstGeom>
-          <a:noFill/>
-        </p:spPr>
-        <p:txBody>
-          <a:bodyPr wrap="square" lIns="0" rIns="0" tIns="0" bIns="0">
-            <a:spAutoFit/>
-          </a:bodyPr>
-          <a:lstStyle/>
-          <a:p>
-            <a:r>
-              <a:rPr sz="1000" b="0">
+              <a:t>미스가 섞이면 쓰기 프리미엄을 계속 문다</a:t>
+            </a:r>
+          </a:p>
+        </p:txBody>
+      </p:sp>
+      <p:pic>
+        <p:nvPicPr>
+          <p:cNvPr id="9" name="Picture 8" descr="cache_hit.png"/>
+          <p:cNvPicPr>
+            <a:picLocks noChangeAspect="1"/>
+          </p:cNvPicPr>
+          <p:nvPr/>
+        </p:nvPicPr>
+        <p:blipFill>
+          <a:blip r:embed="rId2"/>
+          <a:stretch>
+            <a:fillRect/>
+          </a:stretch>
+        </p:blipFill>
+        <p:spPr>
+          <a:xfrm>
+            <a:off x="980030" y="2670048"/>
+            <a:ext cx="10247179" cy="3529584"/>
+          </a:xfrm>
+          <a:prstGeom prst="rect">
+            <a:avLst/>
+          </a:prstGeom>
+        </p:spPr>
+      </p:pic>
+      <p:sp>
+        <p:nvSpPr>
+          <p:cNvPr id="10" name="audit:chart-caption"/>
+          <p:cNvSpPr txBox="1"/>
+          <p:nvPr/>
+        </p:nvSpPr>
+        <p:spPr>
+          <a:xfrm>
+            <a:off x="777240" y="6217920"/>
+            <a:ext cx="5120640" cy="219456"/>
+          </a:xfrm>
+          <a:prstGeom prst="rect">
+            <a:avLst/>
+          </a:prstGeom>
+          <a:noFill/>
+        </p:spPr>
+        <p:txBody>
+          <a:bodyPr wrap="square" lIns="0" rIns="0" tIns="0" bIns="0">
+            <a:spAutoFit/>
+          </a:bodyPr>
+          <a:lstStyle/>
+          <a:p>
+            <a:r>
+              <a:rPr sz="950" b="0">
                 <a:solidFill>
                   <a:srgbClr val="93A4B5"/>
                 </a:solidFill>
@@ -9421,35 +10372,71 @@
                 <a:ea typeface="NanumGothic"/>
                 <a:cs typeface="NanumGothic"/>
               </a:rPr>
-              <a:t>experiments/exp11_tool_output_bloat.py</a:t>
-            </a:r>
-          </a:p>
-        </p:txBody>
-      </p:sp>
-      <p:sp>
-        <p:nvSpPr>
-          <p:cNvPr id="11" name="audit:footer"/>
-          <p:cNvSpPr txBox="1"/>
-          <p:nvPr/>
-        </p:nvSpPr>
-        <p:spPr>
-          <a:xfrm>
-            <a:off x="640080" y="6419088"/>
-            <a:ext cx="10972800" cy="256032"/>
-          </a:xfrm>
-          <a:prstGeom prst="rect">
-            <a:avLst/>
-          </a:prstGeom>
-          <a:noFill/>
-        </p:spPr>
-        <p:txBody>
-          <a:bodyPr wrap="square" lIns="0" rIns="0" tIns="0" bIns="0">
-            <a:spAutoFit/>
-          </a:bodyPr>
-          <a:lstStyle/>
-          <a:p>
-            <a:r>
-              <a:rPr sz="1000" b="0">
+              <a:t>그래프 · 적중률별 비용 (USD) · cache_hit.png</a:t>
+            </a:r>
+          </a:p>
+        </p:txBody>
+      </p:sp>
+      <p:sp>
+        <p:nvSpPr>
+          <p:cNvPr id="11" name="audit:source"/>
+          <p:cNvSpPr txBox="1"/>
+          <p:nvPr/>
+        </p:nvSpPr>
+        <p:spPr>
+          <a:xfrm>
+            <a:off x="6035040" y="6217920"/>
+            <a:ext cx="5394960" cy="219456"/>
+          </a:xfrm>
+          <a:prstGeom prst="rect">
+            <a:avLst/>
+          </a:prstGeom>
+          <a:noFill/>
+        </p:spPr>
+        <p:txBody>
+          <a:bodyPr wrap="square" lIns="0" rIns="0" tIns="0" bIns="0">
+            <a:spAutoFit/>
+          </a:bodyPr>
+          <a:lstStyle/>
+          <a:p>
+            <a:r>
+              <a:rPr sz="950" b="0">
+                <a:solidFill>
+                  <a:srgbClr val="93A4B5"/>
+                </a:solidFill>
+                <a:latin typeface="NanumGothic"/>
+                <a:ea typeface="NanumGothic"/>
+                <a:cs typeface="NanumGothic"/>
+              </a:rPr>
+              <a:t>experiments/exp03_prompt_caching.py</a:t>
+            </a:r>
+          </a:p>
+        </p:txBody>
+      </p:sp>
+      <p:sp>
+        <p:nvSpPr>
+          <p:cNvPr id="12" name="audit:footer"/>
+          <p:cNvSpPr txBox="1"/>
+          <p:nvPr/>
+        </p:nvSpPr>
+        <p:spPr>
+          <a:xfrm>
+            <a:off x="777240" y="6620256"/>
+            <a:ext cx="10972800" cy="219456"/>
+          </a:xfrm>
+          <a:prstGeom prst="rect">
+            <a:avLst/>
+          </a:prstGeom>
+          <a:noFill/>
+        </p:spPr>
+        <p:txBody>
+          <a:bodyPr wrap="square" lIns="0" rIns="0" tIns="0" bIns="0">
+            <a:spAutoFit/>
+          </a:bodyPr>
+          <a:lstStyle/>
+          <a:p>
+            <a:r>
+              <a:rPr sz="950" b="0">
                 <a:solidFill>
                   <a:srgbClr val="93A4B5"/>
                 </a:solidFill>
@@ -9598,7 +10585,7 @@
                 <a:ea typeface="NanumGothic"/>
                 <a:cs typeface="NanumGothic"/>
               </a:rPr>
-              <a:t>시나리오 (10,000콜)</a:t>
+              <a:t>전체 시스템 비용 시나리오</a:t>
             </a:r>
           </a:p>
         </p:txBody>
@@ -9634,7 +10621,7 @@
                 <a:ea typeface="NanumGothic"/>
                 <a:cs typeface="NanumGothic"/>
               </a:rPr>
-              <a:t>모델 라우팅 · 쉬운 요청에 비싼 모델을 쓰지 않는다</a:t>
+              <a:t>툴 출력과 서브에이전트는 전체 비용으로 본다</a:t>
             </a:r>
           </a:p>
         </p:txBody>
@@ -9670,7 +10657,7 @@
                 <a:ea typeface="NanumGothic"/>
                 <a:cs typeface="NanumGothic"/>
               </a:rPr>
-              <a:t>전부 강 $350 → 절반 $184</a:t>
+              <a:t>$5.6010 → $2.7360</a:t>
             </a:r>
           </a:p>
         </p:txBody>
@@ -9706,7 +10693,7 @@
                 <a:ea typeface="NanumGothic"/>
                 <a:cs typeface="NanumGothic"/>
               </a:rPr>
-              <a:t>절반만 라우팅해도 47% 절감</a:t>
+              <a:t>툴 읽기 누적 전송 1,680,000 토큰 (20턴)</a:t>
             </a:r>
           </a:p>
         </p:txBody>
@@ -9742,7 +10729,7 @@
                 <a:ea typeface="NanumGothic"/>
                 <a:cs typeface="NanumGothic"/>
               </a:rPr>
-              <a:t>공격적 라우팅은 $35.17 (90% 절감)</a:t>
+              <a:t>컴팩션 $3.4425 · 서브에이전트 $2.736</a:t>
             </a:r>
           </a:p>
         </p:txBody>
@@ -9778,7 +10765,7 @@
                 <a:ea typeface="NanumGothic"/>
                 <a:cs typeface="NanumGothic"/>
               </a:rPr>
-              <a:t>품질 측정 도구가 먼저다 — 임계값은 주기적으로 재보정</a:t>
+              <a:t>자식 호출·요약 비용까지 포함해 비교한다</a:t>
             </a:r>
           </a:p>
         </p:txBody>
@@ -9814,7 +10801,7 @@
                 <a:ea typeface="NanumGothic"/>
                 <a:cs typeface="NanumGothic"/>
               </a:rPr>
-              <a:t>experiments/exp06_other_levers.py</a:t>
+              <a:t>experiments/exp11_tool_output_bloat.py</a:t>
             </a:r>
           </a:p>
         </p:txBody>
@@ -9991,7 +10978,7 @@
                 <a:ea typeface="NanumGothic"/>
                 <a:cs typeface="NanumGothic"/>
               </a:rPr>
-              <a:t>가격표 + 시나리오</a:t>
+              <a:t>시나리오 (10,000콜)</a:t>
             </a:r>
           </a:p>
         </p:txBody>
@@ -10027,7 +11014,7 @@
                 <a:ea typeface="NanumGothic"/>
                 <a:cs typeface="NanumGothic"/>
               </a:rPr>
-              <a:t>배치 API · 지연을 할인으로 바꾼다</a:t>
+              <a:t>모델 라우팅 · 쉬운 요청에 비싼 모델을 쓰지 않는다</a:t>
             </a:r>
           </a:p>
         </p:txBody>
@@ -10063,7 +11050,7 @@
                 <a:ea typeface="NanumGothic"/>
                 <a:cs typeface="NanumGothic"/>
               </a:rPr>
-              <a:t>50,000건 $675 → $337.50</a:t>
+              <a:t>전부 강 $350 → 절반 $184</a:t>
             </a:r>
           </a:p>
         </p:txBody>
@@ -10099,7 +11086,7 @@
                 <a:ea typeface="NanumGothic"/>
                 <a:cs typeface="NanumGothic"/>
               </a:rPr>
-              <a:t>입력·출력 모두 50% 할인</a:t>
+              <a:t>절반만 라우팅해도 47% 절감</a:t>
             </a:r>
           </a:p>
         </p:txBody>
@@ -10135,7 +11122,7 @@
                 <a:ea typeface="NanumGothic"/>
                 <a:cs typeface="NanumGothic"/>
               </a:rPr>
-              <a:t>24시간 안에 끝나면 되는 잡만</a:t>
+              <a:t>공격적 라우팅은 $35.17 (90% 절감)</a:t>
             </a:r>
           </a:p>
         </p:txBody>
@@ -10171,7 +11158,7 @@
                 <a:ea typeface="NanumGothic"/>
                 <a:cs typeface="NanumGothic"/>
               </a:rPr>
-              <a:t>야간 평가 · 대량 분류 · 리포트 생성 · 레포 전체 분석</a:t>
+              <a:t>품질 측정 도구가 먼저다 — 임계값은 주기적으로 재보정</a:t>
             </a:r>
           </a:p>
         </p:txBody>
